--- a/content/assets/disciplinas/6-periodo/banco-de-dados/slides_iff_disciplina.pptx
+++ b/content/assets/disciplinas/6-periodo/banco-de-dados/slides_iff_disciplina.pptx
@@ -13,6 +13,9 @@
     <p:sldId id="261" r:id="rId12"/>
     <p:sldId id="262" r:id="rId13"/>
     <p:sldId id="263" r:id="rId14"/>
+    <p:sldId id="264" r:id="rId15"/>
+    <p:sldId id="265" r:id="rId16"/>
+    <p:sldId id="266" r:id="rId17"/>
   </p:sldIdLst>
   <p:sldSz cx="12191999" cy="6858000" type="screen4x3"/>
   <p:notesSz cx="6858000" cy="9144000"/>
@@ -116,7 +119,7 @@
 
 <file path=ppt/slideLayouts/slideLayout1.xml><?xml version="1.0" encoding="utf-8"?>
 <p:sldLayout xmlns:a="http://schemas.openxmlformats.org/drawingml/2006/main" xmlns:r="http://schemas.openxmlformats.org/officeDocument/2006/relationships" xmlns:p="http://schemas.openxmlformats.org/presentationml/2006/main" type="title" preserve="1">
-  <p:cSld name="Title Slide" showMasterSp="0">
+  <p:cSld name="Title Slide">
     <p:spTree>
       <p:nvGrpSpPr>
         <p:cNvPr id="1" name=""/>
@@ -2579,12 +2582,9 @@
 <p:sldMaster xmlns:a="http://schemas.openxmlformats.org/drawingml/2006/main" xmlns:r="http://schemas.openxmlformats.org/officeDocument/2006/relationships" xmlns:p="http://schemas.openxmlformats.org/presentationml/2006/main">
   <p:cSld>
     <p:bg>
-      <p:bgPr>
-        <a:solidFill>
-          <a:srgbClr val="FFFFFF"/>
-        </a:solidFill>
-        <a:effectLst/>
-      </p:bgPr>
+      <p:bgRef idx="1001">
+        <a:schemeClr val="bg1"/>
+      </p:bgRef>
     </p:bg>
     <p:spTree>
       <p:nvGrpSpPr>
@@ -2600,252 +2600,226 @@
           <a:chExt cx="0" cy="0"/>
         </a:xfrm>
       </p:grpSpPr>
-      <!-- 1. Logo IFF no Cabeçalho Superior Esquerdo -->
-      <p:pic>
-        <p:nvPicPr>
-          <p:cNvPr id="1001" name="LogoIFFMaster"/>
-          <p:cNvPicPr>
-            <a:picLocks noChangeAspect="1"/>
-          </p:cNvPicPr>
-          <p:nvPr/>
-        </p:nvPicPr>
-        <p:blipFill>
-          <a:blip r:embed="rIdLogoMaster"/>
-          <a:stretch>
-            <a:fillRect/>
-          </a:stretch>
-        </p:blipFill>
-        <p:spPr>
-          <a:xfrm>
-            <a:off x="731520" y="73152"/>
-            <a:ext cx="1591056" cy="438912"/>
-          </a:xfrm>
-          <a:prstGeom prst="rect">
-            <a:avLst/>
-          </a:prstGeom>
-        </p:spPr>
-      </p:pic>
-      <!-- 2. Linha Divisória Superior (Verde IFF / Dourado) -->
-      <p:sp>
-        <p:nvSpPr>
-          <p:cNvPr id="1002" name="LinhaDivisoriaSuperior"/>
-          <p:cNvSpPr/>
-          <p:nvPr/>
-        </p:nvSpPr>
-        <p:spPr>
-          <a:xfrm>
-            <a:off x="0" y="621792"/>
-            <a:ext cx="12192000" cy="13716"/>
-          </a:xfrm>
-          <a:prstGeom prst="rect">
-            <a:avLst/>
-          </a:prstGeom>
-          <a:solidFill>
-            <a:srgbClr val="1E823C"/>
-          </a:solidFill>
-          <a:ln>
-            <a:solidFill>
-              <a:srgbClr val="1E823C"/>
-            </a:solidFill>
-          </a:ln>
-        </p:spPr>
-      </p:sp>
-      <!-- 3. Disciplina & Tópico no Cabeçalho Superior Direito -->
-      <p:sp>
-        <p:nvSpPr>
-          <p:cNvPr id="1003" name="CabecalhoDisciplinaTopico"/>
-          <p:cNvSpPr/>
-          <p:nvPr/>
-        </p:nvSpPr>
-        <p:spPr>
-          <a:xfrm>
-            <a:off x="6217920" y="73152"/>
-            <a:ext cx="5303520" cy="365760"/>
-          </a:xfrm>
-          <a:prstGeom prst="rect">
-            <a:avLst/>
-          </a:prstGeom>
-          <a:noFill/>
-          <a:ln>
-            <a:noFill/>
-          </a:ln>
-        </p:spPr>
-        <p:txBody>
-          <a:bodyPr vert="horz" lIns="0" tIns="0" rIns="0" bIns="0" rtlCol="0" anchor="ctr"/>
-          <a:lstStyle/>
-          <a:p>
-            <a:pPr algn="r"/>
-            <a:r>
-              <a:rPr lang="pt-BR" sz="1800" b="1">
-                <a:solidFill>
-                  <a:srgbClr val="000000"/>
-                </a:solidFill>
-                <a:latin typeface="Arial"/>
-              </a:rPr>
-              <a:t>Banco de Dados</a:t>
-            </a:r>
-            <a:r>
-              <a:rPr lang="pt-BR" sz="1800">
-                <a:solidFill>
-                  <a:srgbClr val="5A5A5A"/>
-                </a:solidFill>
-                <a:latin typeface="Arial"/>
-              </a:rPr>
-              <a:t>  |  </a:t>
-            </a:r>
-            <a:r>
-              <a:rPr lang="pt-BR" sz="1800" b="1">
-                <a:solidFill>
-                  <a:srgbClr val="1E823C"/>
-                </a:solidFill>
-                <a:latin typeface="Arial"/>
-              </a:rPr>
-              <a:t>Seminário | Normalização &amp; FN</a:t>
-            </a:r>
-          </a:p>
-        </p:txBody>
-      </p:sp>
-      <!-- 4. Linha Divisória Inferior (Verde IFF / Dourado) -->
-      <p:sp>
-        <p:nvSpPr>
-          <p:cNvPr id="1004" name="LinhaDivisoriaInferior"/>
-          <p:cNvSpPr/>
-          <p:nvPr/>
-        </p:nvSpPr>
-        <p:spPr>
-          <a:xfrm>
-            <a:off x="0" y="6510528"/>
-            <a:ext cx="12192000" cy="13716"/>
-          </a:xfrm>
-          <a:prstGeom prst="rect">
-            <a:avLst/>
-          </a:prstGeom>
-          <a:solidFill>
-            <a:srgbClr val="1E823C"/>
-          </a:solidFill>
-          <a:ln>
-            <a:solidFill>
-              <a:srgbClr val="1E823C"/>
-            </a:solidFill>
-          </a:ln>
-        </p:spPr>
-      </p:sp>
-      <!-- 5. Rodapé: Autor à Esquerda -->
-      <p:sp>
-        <p:nvSpPr>
-          <p:cNvPr id="1005" name="RodapeAutor"/>
-          <p:cNvSpPr/>
-          <p:nvPr/>
-        </p:nvSpPr>
-        <p:spPr>
-          <a:xfrm>
-            <a:off x="548640" y="6537960"/>
-            <a:ext cx="3657600" cy="256032"/>
-          </a:xfrm>
-          <a:prstGeom prst="rect">
-            <a:avLst/>
-          </a:prstGeom>
-          <a:noFill/>
-          <a:ln>
-            <a:noFill/>
-          </a:ln>
-        </p:spPr>
-        <p:txBody>
-          <a:bodyPr vert="horz" lIns="0" tIns="0" rIns="0" bIns="0" rtlCol="0" anchor="ctr"/>
-          <a:lstStyle/>
-          <a:p>
-            <a:r>
-              <a:rPr lang="pt-BR" sz="1050" b="1">
-                <a:solidFill>
-                  <a:srgbClr val="000000"/>
-                </a:solidFill>
-                <a:latin typeface="Arial"/>
-              </a:rPr>
-              <a:t>Pedro Henrique Rocha de Andrade</a:t>
-            </a:r>
-          </a:p>
-        </p:txBody>
-      </p:sp>
-      <!-- 6. Rodapé: Título do Trabalho no Centro -->
-      <p:sp>
-        <p:nvSpPr>
-          <p:cNvPr id="1006" name="RodapeTituloTrabalho"/>
-          <p:cNvSpPr/>
-          <p:nvPr/>
-        </p:nvSpPr>
-        <p:spPr>
-          <a:xfrm>
-            <a:off x="4480560" y="6537960"/>
-            <a:ext cx="3593592" cy="256032"/>
-          </a:xfrm>
-          <a:prstGeom prst="rect">
-            <a:avLst/>
-          </a:prstGeom>
-          <a:noFill/>
-          <a:ln>
-            <a:noFill/>
-          </a:ln>
-        </p:spPr>
-        <p:txBody>
-          <a:bodyPr vert="horz" lIns="0" tIns="0" rIns="0" bIns="0" rtlCol="0" anchor="ctr"/>
-          <a:lstStyle/>
-          <a:p>
-            <a:pPr algn="ctr"/>
-            <a:r>
-              <a:rPr lang="pt-BR" sz="1050" b="1">
-                <a:solidFill>
-                  <a:srgbClr val="141414"/>
-                </a:solidFill>
-                <a:latin typeface="Arial"/>
-              </a:rPr>
-              <a:t>Trabalho - Normalização e Dependências Funcionais</a:t>
-            </a:r>
-          </a:p>
-        </p:txBody>
-      </p:sp>
-      <!-- 7. Rodapé: Placeholder de Numeração do Slide à Direita -->
-      <p:sp>
-        <p:nvSpPr>
-          <p:cNvPr id="1007" name="Slide Number Placeholder 5"/>
+      <p:sp>
+        <p:nvSpPr>
+          <p:cNvPr id="2" name="Title Placeholder 1"/>
           <p:cNvSpPr>
             <a:spLocks noGrp="1"/>
           </p:cNvSpPr>
           <p:nvPr>
-            <p:ph type="sldNum" sz="quarter" idx="12"/>
+            <p:ph type="title"/>
           </p:nvPr>
         </p:nvSpPr>
         <p:spPr>
           <a:xfrm>
-            <a:off x="9445752" y="6537960"/>
-            <a:ext cx="2194560" cy="256032"/>
-          </a:xfrm>
-          <a:prstGeom prst="rect">
-            <a:avLst/>
-          </a:prstGeom>
-          <a:noFill/>
-          <a:ln>
-            <a:noFill/>
-          </a:ln>
-        </p:spPr>
-        <p:txBody>
-          <a:bodyPr vert="horz" lIns="0" tIns="0" rIns="0" bIns="0" rtlCol="0" anchor="ctr"/>
-          <a:lstStyle/>
-          <a:p>
-            <a:pPr algn="r"/>
-            <a:fld id="{B6B8CE0B-97CD-45E9-85EC-3FEBD145DE74}" type="slidenum">
-              <a:rPr lang="pt-BR" sz="1050" b="1">
-                <a:solidFill>
-                  <a:srgbClr val="141414"/>
-                </a:solidFill>
-                <a:latin typeface="Arial"/>
-              </a:rPr>
+            <a:off x="457200" y="274638"/>
+            <a:ext cx="8229600" cy="1143000"/>
+          </a:xfrm>
+          <a:prstGeom prst="rect">
+            <a:avLst/>
+          </a:prstGeom>
+        </p:spPr>
+        <p:txBody>
+          <a:bodyPr vert="horz" lIns="91440" tIns="45720" rIns="91440" bIns="45720" rtlCol="0" anchor="ctr">
+            <a:normAutofit/>
+          </a:bodyPr>
+          <a:lstStyle/>
+          <a:p>
+            <a:r>
+              <a:rPr lang="en-US" smtClean="0"/>
+              <a:t>Click to edit Master title style</a:t>
+            </a:r>
+            <a:endParaRPr lang="en-US"/>
+          </a:p>
+        </p:txBody>
+      </p:sp>
+      <p:sp>
+        <p:nvSpPr>
+          <p:cNvPr id="3" name="Text Placeholder 2"/>
+          <p:cNvSpPr>
+            <a:spLocks noGrp="1"/>
+          </p:cNvSpPr>
+          <p:nvPr>
+            <p:ph type="body" idx="1"/>
+          </p:nvPr>
+        </p:nvSpPr>
+        <p:spPr>
+          <a:xfrm>
+            <a:off x="457200" y="1600200"/>
+            <a:ext cx="8229600" cy="4525963"/>
+          </a:xfrm>
+          <a:prstGeom prst="rect">
+            <a:avLst/>
+          </a:prstGeom>
+        </p:spPr>
+        <p:txBody>
+          <a:bodyPr vert="horz" lIns="91440" tIns="45720" rIns="91440" bIns="45720" rtlCol="0">
+            <a:normAutofit/>
+          </a:bodyPr>
+          <a:lstStyle/>
+          <a:p>
+            <a:pPr lvl="0"/>
+            <a:r>
+              <a:rPr lang="en-US" smtClean="0"/>
+              <a:t>Click to edit Master text styles</a:t>
+            </a:r>
+          </a:p>
+          <a:p>
+            <a:pPr lvl="1"/>
+            <a:r>
+              <a:rPr lang="en-US" smtClean="0"/>
+              <a:t>Second level</a:t>
+            </a:r>
+          </a:p>
+          <a:p>
+            <a:pPr lvl="2"/>
+            <a:r>
+              <a:rPr lang="en-US" smtClean="0"/>
+              <a:t>Third level</a:t>
+            </a:r>
+          </a:p>
+          <a:p>
+            <a:pPr lvl="3"/>
+            <a:r>
+              <a:rPr lang="en-US" smtClean="0"/>
+              <a:t>Fourth level</a:t>
+            </a:r>
+          </a:p>
+          <a:p>
+            <a:pPr lvl="4"/>
+            <a:r>
+              <a:rPr lang="en-US" smtClean="0"/>
+              <a:t>Fifth level</a:t>
+            </a:r>
+            <a:endParaRPr lang="en-US"/>
+          </a:p>
+        </p:txBody>
+      </p:sp>
+      <p:sp>
+        <p:nvSpPr>
+          <p:cNvPr id="4" name="Date Placeholder 3"/>
+          <p:cNvSpPr>
+            <a:spLocks noGrp="1"/>
+          </p:cNvSpPr>
+          <p:nvPr>
+            <p:ph type="dt" sz="half" idx="2"/>
+          </p:nvPr>
+        </p:nvSpPr>
+        <p:spPr>
+          <a:xfrm>
+            <a:off x="457200" y="6356350"/>
+            <a:ext cx="2133600" cy="365125"/>
+          </a:xfrm>
+          <a:prstGeom prst="rect">
+            <a:avLst/>
+          </a:prstGeom>
+        </p:spPr>
+        <p:txBody>
+          <a:bodyPr vert="horz" lIns="91440" tIns="45720" rIns="91440" bIns="45720" rtlCol="0" anchor="ctr"/>
+          <a:lstStyle>
+            <a:lvl1pPr algn="l">
+              <a:defRPr sz="1200">
+                <a:solidFill>
+                  <a:schemeClr val="tx1">
+                    <a:tint val="75000"/>
+                  </a:schemeClr>
+                </a:solidFill>
+              </a:defRPr>
+            </a:lvl1pPr>
+          </a:lstStyle>
+          <a:p>
+            <a:fld id="{5BCAD085-E8A6-8845-BD4E-CB4CCA059FC4}" type="datetimeFigureOut">
+              <a:rPr lang="en-US" smtClean="0"/>
+              <a:t>1/27/13</a:t>
+            </a:fld>
+            <a:endParaRPr lang="en-US"/>
+          </a:p>
+        </p:txBody>
+      </p:sp>
+      <p:sp>
+        <p:nvSpPr>
+          <p:cNvPr id="5" name="Footer Placeholder 4"/>
+          <p:cNvSpPr>
+            <a:spLocks noGrp="1"/>
+          </p:cNvSpPr>
+          <p:nvPr>
+            <p:ph type="ftr" sz="quarter" idx="3"/>
+          </p:nvPr>
+        </p:nvSpPr>
+        <p:spPr>
+          <a:xfrm>
+            <a:off x="3124200" y="6356350"/>
+            <a:ext cx="2895600" cy="365125"/>
+          </a:xfrm>
+          <a:prstGeom prst="rect">
+            <a:avLst/>
+          </a:prstGeom>
+        </p:spPr>
+        <p:txBody>
+          <a:bodyPr vert="horz" lIns="91440" tIns="45720" rIns="91440" bIns="45720" rtlCol="0" anchor="ctr"/>
+          <a:lstStyle>
+            <a:lvl1pPr algn="ctr">
+              <a:defRPr sz="1200">
+                <a:solidFill>
+                  <a:schemeClr val="tx1">
+                    <a:tint val="75000"/>
+                  </a:schemeClr>
+                </a:solidFill>
+              </a:defRPr>
+            </a:lvl1pPr>
+          </a:lstStyle>
+          <a:p>
+            <a:endParaRPr lang="en-US"/>
+          </a:p>
+        </p:txBody>
+      </p:sp>
+      <p:sp>
+        <p:nvSpPr>
+          <p:cNvPr id="6" name="Slide Number Placeholder 5"/>
+          <p:cNvSpPr>
+            <a:spLocks noGrp="1"/>
+          </p:cNvSpPr>
+          <p:nvPr>
+            <p:ph type="sldNum" sz="quarter" idx="4"/>
+          </p:nvPr>
+        </p:nvSpPr>
+        <p:spPr>
+          <a:xfrm>
+            <a:off x="6553200" y="6356350"/>
+            <a:ext cx="2133600" cy="365125"/>
+          </a:xfrm>
+          <a:prstGeom prst="rect">
+            <a:avLst/>
+          </a:prstGeom>
+        </p:spPr>
+        <p:txBody>
+          <a:bodyPr vert="horz" lIns="91440" tIns="45720" rIns="91440" bIns="45720" rtlCol="0" anchor="ctr"/>
+          <a:lstStyle>
+            <a:lvl1pPr algn="r">
+              <a:defRPr sz="1200">
+                <a:solidFill>
+                  <a:schemeClr val="tx1">
+                    <a:tint val="75000"/>
+                  </a:schemeClr>
+                </a:solidFill>
+              </a:defRPr>
+            </a:lvl1pPr>
+          </a:lstStyle>
+          <a:p>
+            <a:fld id="{C1FF6DA9-008F-8B48-92A6-B652298478BF}" type="slidenum">
+              <a:rPr lang="en-US" smtClean="0"/>
               <a:t>‹#›</a:t>
             </a:fld>
-            <a:endParaRPr lang="pt-BR"/>
+            <a:endParaRPr lang="en-US"/>
           </a:p>
         </p:txBody>
       </p:sp>
     </p:spTree>
+    <p:extLst>
+      <p:ext uri="{BB962C8B-B14F-4D97-AF65-F5344CB8AC3E}">
+        <p14:creationId xmlns:p14="http://schemas.microsoft.com/office/powerpoint/2010/main" val="2209977519"/>
+      </p:ext>
+    </p:extLst>
   </p:cSld>
   <p:clrMap bg1="lt1" tx1="dk1" bg2="lt2" tx2="dk2" accent1="accent1" accent2="accent2" accent3="accent3" accent4="accent4" accent5="accent5" accent6="accent6" hlink="hlink" folHlink="folHlink"/>
   <p:sldLayoutIdLst>
@@ -2863,29 +2837,252 @@
   </p:sldLayoutIdLst>
   <p:txStyles>
     <p:titleStyle>
-      <a:lvl1pPr algn="l">
-        <a:defRPr sz="2000" b="1">
+      <a:lvl1pPr algn="ctr" defTabSz="457200" rtl="0" eaLnBrk="1" latinLnBrk="0" hangingPunct="1">
+        <a:spcBef>
+          <a:spcPct val="0"/>
+        </a:spcBef>
+        <a:buNone/>
+        <a:defRPr sz="4400" kern="1200">
           <a:solidFill>
-            <a:srgbClr val="1E823C"/>
+            <a:schemeClr val="tx1"/>
           </a:solidFill>
-          <a:latin typeface="Arial"/>
+          <a:latin typeface="+mj-lt"/>
+          <a:ea typeface="+mj-ea"/>
+          <a:cs typeface="+mj-cs"/>
         </a:defRPr>
       </a:lvl1pPr>
     </p:titleStyle>
     <p:bodyStyle>
-      <a:lvl1pPr>
-        <a:defRPr sz="1500">
+      <a:lvl1pPr marL="342900" indent="-342900" algn="l" defTabSz="457200" rtl="0" eaLnBrk="1" latinLnBrk="0" hangingPunct="1">
+        <a:spcBef>
+          <a:spcPct val="20000"/>
+        </a:spcBef>
+        <a:buFont typeface="Arial"/>
+        <a:buChar char="•"/>
+        <a:defRPr sz="3200" kern="1200">
           <a:solidFill>
-            <a:srgbClr val="141414"/>
+            <a:schemeClr val="tx1"/>
           </a:solidFill>
-          <a:latin typeface="Arial"/>
+          <a:latin typeface="+mn-lt"/>
+          <a:ea typeface="+mn-ea"/>
+          <a:cs typeface="+mn-cs"/>
         </a:defRPr>
       </a:lvl1pPr>
+      <a:lvl2pPr marL="742950" indent="-285750" algn="l" defTabSz="457200" rtl="0" eaLnBrk="1" latinLnBrk="0" hangingPunct="1">
+        <a:spcBef>
+          <a:spcPct val="20000"/>
+        </a:spcBef>
+        <a:buFont typeface="Arial"/>
+        <a:buChar char="–"/>
+        <a:defRPr sz="2800" kern="1200">
+          <a:solidFill>
+            <a:schemeClr val="tx1"/>
+          </a:solidFill>
+          <a:latin typeface="+mn-lt"/>
+          <a:ea typeface="+mn-ea"/>
+          <a:cs typeface="+mn-cs"/>
+        </a:defRPr>
+      </a:lvl2pPr>
+      <a:lvl3pPr marL="1143000" indent="-228600" algn="l" defTabSz="457200" rtl="0" eaLnBrk="1" latinLnBrk="0" hangingPunct="1">
+        <a:spcBef>
+          <a:spcPct val="20000"/>
+        </a:spcBef>
+        <a:buFont typeface="Arial"/>
+        <a:buChar char="•"/>
+        <a:defRPr sz="2400" kern="1200">
+          <a:solidFill>
+            <a:schemeClr val="tx1"/>
+          </a:solidFill>
+          <a:latin typeface="+mn-lt"/>
+          <a:ea typeface="+mn-ea"/>
+          <a:cs typeface="+mn-cs"/>
+        </a:defRPr>
+      </a:lvl3pPr>
+      <a:lvl4pPr marL="1600200" indent="-228600" algn="l" defTabSz="457200" rtl="0" eaLnBrk="1" latinLnBrk="0" hangingPunct="1">
+        <a:spcBef>
+          <a:spcPct val="20000"/>
+        </a:spcBef>
+        <a:buFont typeface="Arial"/>
+        <a:buChar char="–"/>
+        <a:defRPr sz="2000" kern="1200">
+          <a:solidFill>
+            <a:schemeClr val="tx1"/>
+          </a:solidFill>
+          <a:latin typeface="+mn-lt"/>
+          <a:ea typeface="+mn-ea"/>
+          <a:cs typeface="+mn-cs"/>
+        </a:defRPr>
+      </a:lvl4pPr>
+      <a:lvl5pPr marL="2057400" indent="-228600" algn="l" defTabSz="457200" rtl="0" eaLnBrk="1" latinLnBrk="0" hangingPunct="1">
+        <a:spcBef>
+          <a:spcPct val="20000"/>
+        </a:spcBef>
+        <a:buFont typeface="Arial"/>
+        <a:buChar char="»"/>
+        <a:defRPr sz="2000" kern="1200">
+          <a:solidFill>
+            <a:schemeClr val="tx1"/>
+          </a:solidFill>
+          <a:latin typeface="+mn-lt"/>
+          <a:ea typeface="+mn-ea"/>
+          <a:cs typeface="+mn-cs"/>
+        </a:defRPr>
+      </a:lvl5pPr>
+      <a:lvl6pPr marL="2514600" indent="-228600" algn="l" defTabSz="457200" rtl="0" eaLnBrk="1" latinLnBrk="0" hangingPunct="1">
+        <a:spcBef>
+          <a:spcPct val="20000"/>
+        </a:spcBef>
+        <a:buFont typeface="Arial"/>
+        <a:buChar char="•"/>
+        <a:defRPr sz="2000" kern="1200">
+          <a:solidFill>
+            <a:schemeClr val="tx1"/>
+          </a:solidFill>
+          <a:latin typeface="+mn-lt"/>
+          <a:ea typeface="+mn-ea"/>
+          <a:cs typeface="+mn-cs"/>
+        </a:defRPr>
+      </a:lvl6pPr>
+      <a:lvl7pPr marL="2971800" indent="-228600" algn="l" defTabSz="457200" rtl="0" eaLnBrk="1" latinLnBrk="0" hangingPunct="1">
+        <a:spcBef>
+          <a:spcPct val="20000"/>
+        </a:spcBef>
+        <a:buFont typeface="Arial"/>
+        <a:buChar char="•"/>
+        <a:defRPr sz="2000" kern="1200">
+          <a:solidFill>
+            <a:schemeClr val="tx1"/>
+          </a:solidFill>
+          <a:latin typeface="+mn-lt"/>
+          <a:ea typeface="+mn-ea"/>
+          <a:cs typeface="+mn-cs"/>
+        </a:defRPr>
+      </a:lvl7pPr>
+      <a:lvl8pPr marL="3429000" indent="-228600" algn="l" defTabSz="457200" rtl="0" eaLnBrk="1" latinLnBrk="0" hangingPunct="1">
+        <a:spcBef>
+          <a:spcPct val="20000"/>
+        </a:spcBef>
+        <a:buFont typeface="Arial"/>
+        <a:buChar char="•"/>
+        <a:defRPr sz="2000" kern="1200">
+          <a:solidFill>
+            <a:schemeClr val="tx1"/>
+          </a:solidFill>
+          <a:latin typeface="+mn-lt"/>
+          <a:ea typeface="+mn-ea"/>
+          <a:cs typeface="+mn-cs"/>
+        </a:defRPr>
+      </a:lvl8pPr>
+      <a:lvl9pPr marL="3886200" indent="-228600" algn="l" defTabSz="457200" rtl="0" eaLnBrk="1" latinLnBrk="0" hangingPunct="1">
+        <a:spcBef>
+          <a:spcPct val="20000"/>
+        </a:spcBef>
+        <a:buFont typeface="Arial"/>
+        <a:buChar char="•"/>
+        <a:defRPr sz="2000" kern="1200">
+          <a:solidFill>
+            <a:schemeClr val="tx1"/>
+          </a:solidFill>
+          <a:latin typeface="+mn-lt"/>
+          <a:ea typeface="+mn-ea"/>
+          <a:cs typeface="+mn-cs"/>
+        </a:defRPr>
+      </a:lvl9pPr>
     </p:bodyStyle>
     <p:otherStyle>
       <a:defPPr>
-        <a:defRPr lang="pt-BR"/>
+        <a:defRPr lang="en-US"/>
       </a:defPPr>
+      <a:lvl1pPr marL="0" algn="l" defTabSz="457200" rtl="0" eaLnBrk="1" latinLnBrk="0" hangingPunct="1">
+        <a:defRPr sz="1800" kern="1200">
+          <a:solidFill>
+            <a:schemeClr val="tx1"/>
+          </a:solidFill>
+          <a:latin typeface="+mn-lt"/>
+          <a:ea typeface="+mn-ea"/>
+          <a:cs typeface="+mn-cs"/>
+        </a:defRPr>
+      </a:lvl1pPr>
+      <a:lvl2pPr marL="457200" algn="l" defTabSz="457200" rtl="0" eaLnBrk="1" latinLnBrk="0" hangingPunct="1">
+        <a:defRPr sz="1800" kern="1200">
+          <a:solidFill>
+            <a:schemeClr val="tx1"/>
+          </a:solidFill>
+          <a:latin typeface="+mn-lt"/>
+          <a:ea typeface="+mn-ea"/>
+          <a:cs typeface="+mn-cs"/>
+        </a:defRPr>
+      </a:lvl2pPr>
+      <a:lvl3pPr marL="914400" algn="l" defTabSz="457200" rtl="0" eaLnBrk="1" latinLnBrk="0" hangingPunct="1">
+        <a:defRPr sz="1800" kern="1200">
+          <a:solidFill>
+            <a:schemeClr val="tx1"/>
+          </a:solidFill>
+          <a:latin typeface="+mn-lt"/>
+          <a:ea typeface="+mn-ea"/>
+          <a:cs typeface="+mn-cs"/>
+        </a:defRPr>
+      </a:lvl3pPr>
+      <a:lvl4pPr marL="1371600" algn="l" defTabSz="457200" rtl="0" eaLnBrk="1" latinLnBrk="0" hangingPunct="1">
+        <a:defRPr sz="1800" kern="1200">
+          <a:solidFill>
+            <a:schemeClr val="tx1"/>
+          </a:solidFill>
+          <a:latin typeface="+mn-lt"/>
+          <a:ea typeface="+mn-ea"/>
+          <a:cs typeface="+mn-cs"/>
+        </a:defRPr>
+      </a:lvl4pPr>
+      <a:lvl5pPr marL="1828800" algn="l" defTabSz="457200" rtl="0" eaLnBrk="1" latinLnBrk="0" hangingPunct="1">
+        <a:defRPr sz="1800" kern="1200">
+          <a:solidFill>
+            <a:schemeClr val="tx1"/>
+          </a:solidFill>
+          <a:latin typeface="+mn-lt"/>
+          <a:ea typeface="+mn-ea"/>
+          <a:cs typeface="+mn-cs"/>
+        </a:defRPr>
+      </a:lvl5pPr>
+      <a:lvl6pPr marL="2286000" algn="l" defTabSz="457200" rtl="0" eaLnBrk="1" latinLnBrk="0" hangingPunct="1">
+        <a:defRPr sz="1800" kern="1200">
+          <a:solidFill>
+            <a:schemeClr val="tx1"/>
+          </a:solidFill>
+          <a:latin typeface="+mn-lt"/>
+          <a:ea typeface="+mn-ea"/>
+          <a:cs typeface="+mn-cs"/>
+        </a:defRPr>
+      </a:lvl6pPr>
+      <a:lvl7pPr marL="2743200" algn="l" defTabSz="457200" rtl="0" eaLnBrk="1" latinLnBrk="0" hangingPunct="1">
+        <a:defRPr sz="1800" kern="1200">
+          <a:solidFill>
+            <a:schemeClr val="tx1"/>
+          </a:solidFill>
+          <a:latin typeface="+mn-lt"/>
+          <a:ea typeface="+mn-ea"/>
+          <a:cs typeface="+mn-cs"/>
+        </a:defRPr>
+      </a:lvl7pPr>
+      <a:lvl8pPr marL="3200400" algn="l" defTabSz="457200" rtl="0" eaLnBrk="1" latinLnBrk="0" hangingPunct="1">
+        <a:defRPr sz="1800" kern="1200">
+          <a:solidFill>
+            <a:schemeClr val="tx1"/>
+          </a:solidFill>
+          <a:latin typeface="+mn-lt"/>
+          <a:ea typeface="+mn-ea"/>
+          <a:cs typeface="+mn-cs"/>
+        </a:defRPr>
+      </a:lvl8pPr>
+      <a:lvl9pPr marL="3657600" algn="l" defTabSz="457200" rtl="0" eaLnBrk="1" latinLnBrk="0" hangingPunct="1">
+        <a:defRPr sz="1800" kern="1200">
+          <a:solidFill>
+            <a:schemeClr val="tx1"/>
+          </a:solidFill>
+          <a:latin typeface="+mn-lt"/>
+          <a:ea typeface="+mn-ea"/>
+          <a:cs typeface="+mn-cs"/>
+        </a:defRPr>
+      </a:lvl9pPr>
     </p:otherStyle>
   </p:txStyles>
 </p:sldMaster>
@@ -2999,7 +3196,7 @@
                 <a:latin typeface="Arial"/>
                 <a:hlinkClick r:id="rId3"/>
               </a:rPr>
-              <a:t>BANCO DE DADOS</a:t>
+              <a:t>BANCO DE DADOS — 6º PERÍODO</a:t>
             </a:r>
           </a:p>
         </p:txBody>
@@ -3028,26 +3225,30 @@
           <a:p>
             <a:pPr algn="ctr"/>
             <a:r>
-              <a:rPr sz="3200" b="1">
+              <a:rPr sz="3000" b="1">
                 <a:solidFill>
                   <a:srgbClr val="1E823C"/>
                 </a:solidFill>
                 <a:latin typeface="Arial"/>
                 <a:hlinkClick r:id="rId4"/>
               </a:rPr>
-              <a:t>Trabalho - Normalização e Dependências Funcionais</a:t>
-            </a:r>
-          </a:p>
-          <a:p>
-            <a:pPr algn="ctr"/>
-            <a:r>
-              <a:rPr sz="1600">
+              <a:t>Normalização &amp; Dependências Funcionais</a:t>
+            </a:r>
+          </a:p>
+          <a:p>
+            <a:pPr algn="ctr">
+              <a:spcBef>
+                <a:spcPts val="400"/>
+              </a:spcBef>
+            </a:pPr>
+            <a:r>
+              <a:rPr sz="1500">
                 <a:solidFill>
                   <a:srgbClr val="141414"/>
                 </a:solidFill>
                 <a:latin typeface="Arial"/>
               </a:rPr>
-              <a:t>Fundamentação Matemática das Dependências Funcionais e Decomposição em 1FN, 2FN e 3FN</a:t>
+              <a:t>Teoria Relacional e Decomposição em 1FN, 2FN e 3FN (Caso Centro de Memória)</a:t>
             </a:r>
           </a:p>
         </p:txBody>
@@ -3060,8 +3261,8 @@
         </p:nvSpPr>
         <p:spPr>
           <a:xfrm>
-            <a:off x="731520" y="4023360"/>
-            <a:ext cx="10728959" cy="1645920"/>
+            <a:off x="731520" y="4069080"/>
+            <a:ext cx="10728959" cy="1554480"/>
           </a:xfrm>
           <a:prstGeom prst="rect">
             <a:avLst/>
@@ -3076,13 +3277,13 @@
           <a:p>
             <a:pPr algn="ctr"/>
             <a:r>
-              <a:rPr sz="1450" b="1">
+              <a:rPr sz="1400" b="1">
                 <a:solidFill>
                   <a:srgbClr val="141414"/>
                 </a:solidFill>
                 <a:latin typeface="Arial"/>
               </a:rPr>
-              <a:t>Breno Luiz</a:t>
+              <a:t>Pedro Henrique Rocha de Andrade</a:t>
             </a:r>
           </a:p>
           <a:p>
@@ -3092,13 +3293,13 @@
               </a:spcBef>
             </a:pPr>
             <a:r>
-              <a:rPr sz="1450" b="1">
+              <a:rPr sz="1400" b="1">
                 <a:solidFill>
                   <a:srgbClr val="141414"/>
                 </a:solidFill>
                 <a:latin typeface="Arial"/>
               </a:rPr>
-              <a:t>Isaac Salles</a:t>
+              <a:t>Breno Luiz</a:t>
             </a:r>
           </a:p>
           <a:p>
@@ -3108,13 +3309,13 @@
               </a:spcBef>
             </a:pPr>
             <a:r>
-              <a:rPr sz="1450" b="1">
+              <a:rPr sz="1400" b="1">
                 <a:solidFill>
                   <a:srgbClr val="141414"/>
                 </a:solidFill>
                 <a:latin typeface="Arial"/>
               </a:rPr>
-              <a:t>Pedro Henrique Rocha de Andrade</a:t>
+              <a:t>Isaac Salles</a:t>
             </a:r>
           </a:p>
         </p:txBody>
@@ -3165,11 +3366,240 @@
                 </a:solidFill>
                 <a:latin typeface="Arial"/>
               </a:rPr>
-              <a:t>28 de Agosto de 2026</a:t>
-            </a:r>
-          </a:p>
-        </p:txBody>
-      </p:sp>
+              <a:t>02 de Setembro de 2026</a:t>
+            </a:r>
+          </a:p>
+        </p:txBody>
+      </p:sp>
+    </p:spTree>
+  </p:cSld>
+  <p:clrMapOvr>
+    <a:masterClrMapping/>
+  </p:clrMapOvr>
+  <p:transition spd="med">
+    <p:fade/>
+  </p:transition>
+</p:sld>
+</file>
+
+<file path=ppt/slides/slide10.xml><?xml version="1.0" encoding="utf-8"?>
+<p:sld xmlns:a="http://schemas.openxmlformats.org/drawingml/2006/main" xmlns:p="http://schemas.openxmlformats.org/presentationml/2006/main" xmlns:r="http://schemas.openxmlformats.org/officeDocument/2006/relationships">
+  <p:cSld>
+    <p:spTree>
+      <p:nvGrpSpPr>
+        <p:cNvPr id="1" name=""/>
+        <p:cNvGrpSpPr/>
+        <p:nvPr/>
+      </p:nvGrpSpPr>
+      <p:grpSpPr/>
+      <p:sp>
+        <p:nvSpPr>
+          <p:cNvPr id="2" name="Rectangle 1"/>
+          <p:cNvSpPr/>
+          <p:nvPr/>
+        </p:nvSpPr>
+        <p:spPr>
+          <a:xfrm>
+            <a:off x="0" y="0"/>
+            <a:ext cx="12191999" cy="6858000"/>
+          </a:xfrm>
+          <a:prstGeom prst="rect">
+            <a:avLst/>
+          </a:prstGeom>
+          <a:solidFill>
+            <a:srgbClr val="FFFFFF"/>
+          </a:solidFill>
+          <a:ln>
+            <a:noFill/>
+          </a:ln>
+        </p:spPr>
+        <p:style>
+          <a:lnRef idx="1">
+            <a:schemeClr val="accent1"/>
+          </a:lnRef>
+          <a:fillRef idx="3">
+            <a:schemeClr val="accent1"/>
+          </a:fillRef>
+          <a:effectRef idx="2">
+            <a:schemeClr val="accent1"/>
+          </a:effectRef>
+          <a:fontRef idx="minor">
+            <a:schemeClr val="lt1"/>
+          </a:fontRef>
+        </p:style>
+        <p:txBody>
+          <a:bodyPr rtlCol="0" anchor="ctr"/>
+          <a:lstStyle/>
+          <a:p>
+            <a:pPr algn="ctr"/>
+          </a:p>
+        </p:txBody>
+      </p:sp>
+      <p:sp>
+        <p:nvSpPr>
+          <p:cNvPr id="3" name="TextBox 2"/>
+          <p:cNvSpPr txBox="1"/>
+          <p:nvPr/>
+        </p:nvSpPr>
+        <p:spPr>
+          <a:xfrm>
+            <a:off x="731520" y="137160"/>
+            <a:ext cx="10728959" cy="1188720"/>
+          </a:xfrm>
+          <a:prstGeom prst="rect">
+            <a:avLst/>
+          </a:prstGeom>
+          <a:noFill/>
+        </p:spPr>
+        <p:txBody>
+          <a:bodyPr wrap="square">
+            <a:spAutoFit/>
+          </a:bodyPr>
+          <a:lstStyle/>
+          <a:p>
+            <a:pPr algn="ctr"/>
+            <a:r>
+              <a:rPr sz="3200" b="1">
+                <a:solidFill>
+                  <a:srgbClr val="1E823C"/>
+                </a:solidFill>
+                <a:latin typeface="Arial"/>
+              </a:rPr>
+              <a:t>Obrigado!</a:t>
+            </a:r>
+            <a:r>
+              <a:rPr sz="1800" b="1">
+                <a:solidFill>
+                  <a:srgbClr val="1E823C"/>
+                </a:solidFill>
+                <a:latin typeface="Arial"/>
+              </a:rPr>
+              <a:t>   —   Perguntas &amp; Discussão</a:t>
+            </a:r>
+          </a:p>
+          <a:p>
+            <a:pPr algn="ctr">
+              <a:spcBef>
+                <a:spcPts val="200"/>
+              </a:spcBef>
+            </a:pPr>
+            <a:r>
+              <a:rPr sz="1300" b="1">
+                <a:solidFill>
+                  <a:srgbClr val="1E823C"/>
+                </a:solidFill>
+                <a:latin typeface="Arial"/>
+              </a:rPr>
+              <a:t>Contatos: pedroiff0@gmail.com  |  brenooh7@gmail.com  |  isaacsalles2005@gmail.com</a:t>
+            </a:r>
+          </a:p>
+        </p:txBody>
+      </p:sp>
+      <p:pic>
+        <p:nvPicPr>
+          <p:cNvPr id="4" name="Picture 3" descr="qrcode_iff.png"/>
+          <p:cNvPicPr>
+            <a:picLocks noChangeAspect="1"/>
+          </p:cNvPicPr>
+          <p:nvPr/>
+        </p:nvPicPr>
+        <p:blipFill>
+          <a:blip r:embed="rId2"/>
+          <a:stretch>
+            <a:fillRect/>
+          </a:stretch>
+        </p:blipFill>
+        <p:spPr>
+          <a:xfrm>
+            <a:off x="3535679" y="1188720"/>
+            <a:ext cx="5120640" cy="5115425"/>
+          </a:xfrm>
+          <a:prstGeom prst="rect">
+            <a:avLst/>
+          </a:prstGeom>
+        </p:spPr>
+      </p:pic>
+      <p:sp>
+        <p:nvSpPr>
+          <p:cNvPr id="5" name="TextBox 4"/>
+          <p:cNvSpPr txBox="1"/>
+          <p:nvPr/>
+        </p:nvSpPr>
+        <p:spPr>
+          <a:xfrm>
+            <a:off x="731520" y="6263640"/>
+            <a:ext cx="10728959" cy="320040"/>
+          </a:xfrm>
+          <a:prstGeom prst="rect">
+            <a:avLst/>
+          </a:prstGeom>
+          <a:noFill/>
+        </p:spPr>
+        <p:txBody>
+          <a:bodyPr wrap="none">
+            <a:spAutoFit/>
+          </a:bodyPr>
+          <a:lstStyle/>
+          <a:p>
+            <a:pPr algn="ctr"/>
+            <a:r>
+              <a:rPr sz="1200" b="1">
+                <a:solidFill>
+                  <a:srgbClr val="1E823C"/>
+                </a:solidFill>
+                <a:latin typeface="Arial"/>
+                <a:hlinkClick r:id="rId3"/>
+              </a:rPr>
+              <a:t>https://www.phrandrade.com/pt-br/resource/engenharia-de-computacao/6-periodo/banco-de-dados/anotacoes/atividades/trabalho---normalizacao-e-dependencias-funcionais/</a:t>
+            </a:r>
+          </a:p>
+        </p:txBody>
+      </p:sp>
+    </p:spTree>
+  </p:cSld>
+  <p:clrMapOvr>
+    <a:masterClrMapping/>
+  </p:clrMapOvr>
+  <p:transition spd="med">
+    <p:fade/>
+  </p:transition>
+</p:sld>
+</file>
+
+<file path=ppt/slides/slide11.xml><?xml version="1.0" encoding="utf-8"?>
+<p:sld xmlns:a="http://schemas.openxmlformats.org/drawingml/2006/main" xmlns:p="http://schemas.openxmlformats.org/presentationml/2006/main" xmlns:r="http://schemas.openxmlformats.org/officeDocument/2006/relationships">
+  <p:cSld>
+    <p:spTree>
+      <p:nvGrpSpPr>
+        <p:cNvPr id="1" name=""/>
+        <p:cNvGrpSpPr/>
+        <p:nvPr/>
+      </p:nvGrpSpPr>
+      <p:grpSpPr/>
+      <p:pic>
+        <p:nvPicPr>
+          <p:cNvPr id="2" name="Picture 1" descr="pillars.jpg"/>
+          <p:cNvPicPr>
+            <a:picLocks noChangeAspect="1"/>
+          </p:cNvPicPr>
+          <p:nvPr/>
+        </p:nvPicPr>
+        <p:blipFill>
+          <a:blip r:embed="rId2"/>
+          <a:stretch>
+            <a:fillRect/>
+          </a:stretch>
+        </p:blipFill>
+        <p:spPr>
+          <a:xfrm>
+            <a:off x="0" y="0"/>
+            <a:ext cx="12191999" cy="6858000"/>
+          </a:xfrm>
+          <a:prstGeom prst="rect">
+            <a:avLst/>
+          </a:prstGeom>
+        </p:spPr>
+      </p:pic>
     </p:spTree>
   </p:cSld>
   <p:clrMapOvr>
@@ -3193,13 +3623,80 @@
       <p:grpSpPr/>
       <p:sp>
         <p:nvSpPr>
-          <p:cNvPr id="2" name="TextBox 1"/>
+          <p:cNvPr id="2" name="Rectangle 1"/>
+          <p:cNvSpPr/>
+          <p:nvPr/>
+        </p:nvSpPr>
+        <p:spPr>
+          <a:xfrm>
+            <a:off x="0" y="0"/>
+            <a:ext cx="12191999" cy="6858000"/>
+          </a:xfrm>
+          <a:prstGeom prst="rect">
+            <a:avLst/>
+          </a:prstGeom>
+          <a:solidFill>
+            <a:srgbClr val="FFFFFF"/>
+          </a:solidFill>
+          <a:ln>
+            <a:noFill/>
+          </a:ln>
+        </p:spPr>
+        <p:style>
+          <a:lnRef idx="1">
+            <a:schemeClr val="accent1"/>
+          </a:lnRef>
+          <a:fillRef idx="3">
+            <a:schemeClr val="accent1"/>
+          </a:fillRef>
+          <a:effectRef idx="2">
+            <a:schemeClr val="accent1"/>
+          </a:effectRef>
+          <a:fontRef idx="minor">
+            <a:schemeClr val="lt1"/>
+          </a:fontRef>
+        </p:style>
+        <p:txBody>
+          <a:bodyPr rtlCol="0" anchor="ctr"/>
+          <a:lstStyle/>
+          <a:p>
+            <a:pPr algn="ctr"/>
+          </a:p>
+        </p:txBody>
+      </p:sp>
+      <p:pic>
+        <p:nvPicPr>
+          <p:cNvPr id="3" name="Picture 2" descr="logo_iff_crop.png"/>
+          <p:cNvPicPr>
+            <a:picLocks noChangeAspect="1"/>
+          </p:cNvPicPr>
+          <p:nvPr/>
+        </p:nvPicPr>
+        <p:blipFill>
+          <a:blip r:embed="rId2"/>
+          <a:stretch>
+            <a:fillRect/>
+          </a:stretch>
+        </p:blipFill>
+        <p:spPr>
+          <a:xfrm>
+            <a:off x="365760" y="73152"/>
+            <a:ext cx="1395412" cy="384048"/>
+          </a:xfrm>
+          <a:prstGeom prst="rect">
+            <a:avLst/>
+          </a:prstGeom>
+        </p:spPr>
+      </p:pic>
+      <p:sp>
+        <p:nvSpPr>
+          <p:cNvPr id="4" name="TextBox 3"/>
           <p:cNvSpPr txBox="1"/>
           <p:nvPr/>
         </p:nvSpPr>
         <p:spPr>
           <a:xfrm>
-            <a:off x="2450592" y="27432"/>
+            <a:off x="2331720" y="27432"/>
             <a:ext cx="4389120" cy="475488"/>
           </a:xfrm>
           <a:prstGeom prst="rect">
@@ -3214,7 +3711,7 @@
           <a:lstStyle/>
           <a:p>
             <a:r>
-              <a:rPr sz="2200" b="0">
+              <a:rPr sz="2000" b="0">
                 <a:solidFill>
                   <a:srgbClr val="5A5A5A"/>
                 </a:solidFill>
@@ -3223,7 +3720,7 @@
               <a:t> |   </a:t>
             </a:r>
             <a:r>
-              <a:rPr sz="2400" b="1">
+              <a:rPr sz="2000" b="1">
                 <a:solidFill>
                   <a:srgbClr val="141414"/>
                 </a:solidFill>
@@ -3236,14 +3733,14 @@
       </p:sp>
       <p:sp>
         <p:nvSpPr>
-          <p:cNvPr id="3" name="TextBox 2"/>
+          <p:cNvPr id="5" name="TextBox 4"/>
           <p:cNvSpPr txBox="1"/>
           <p:nvPr/>
         </p:nvSpPr>
         <p:spPr>
           <a:xfrm>
-            <a:off x="548640" y="658368"/>
-            <a:ext cx="4937760" cy="457200"/>
+            <a:off x="5852160" y="73152"/>
+            <a:ext cx="5943600" cy="365760"/>
           </a:xfrm>
           <a:prstGeom prst="rect">
             <a:avLst/>
@@ -3256,8 +3753,106 @@
           </a:bodyPr>
           <a:lstStyle/>
           <a:p>
+            <a:pPr algn="r"/>
+            <a:r>
+              <a:rPr sz="1300" b="1">
+                <a:solidFill>
+                  <a:srgbClr val="141414"/>
+                </a:solidFill>
+                <a:latin typeface="Arial"/>
+                <a:hlinkClick r:id="rId3"/>
+              </a:rPr>
+              <a:t>Banco de Dados</a:t>
+            </a:r>
+            <a:r>
+              <a:rPr sz="1300">
+                <a:solidFill>
+                  <a:srgbClr val="5A5A5A"/>
+                </a:solidFill>
+                <a:latin typeface="Arial"/>
+              </a:rPr>
+              <a:t>   |   </a:t>
+            </a:r>
+            <a:r>
+              <a:rPr sz="1300" b="1">
+                <a:solidFill>
+                  <a:srgbClr val="1E823C"/>
+                </a:solidFill>
+                <a:latin typeface="Arial"/>
+                <a:hlinkClick r:id="rId4"/>
+              </a:rPr>
+              <a:t>Normalização &amp; DFs</a:t>
+            </a:r>
+          </a:p>
+        </p:txBody>
+      </p:sp>
+      <p:sp>
+        <p:nvSpPr>
+          <p:cNvPr id="6" name="Rectangle 5"/>
+          <p:cNvSpPr/>
+          <p:nvPr/>
+        </p:nvSpPr>
+        <p:spPr>
+          <a:xfrm>
+            <a:off x="0" y="566928"/>
+            <a:ext cx="12191999" cy="13716"/>
+          </a:xfrm>
+          <a:prstGeom prst="rect">
+            <a:avLst/>
+          </a:prstGeom>
+          <a:solidFill>
+            <a:srgbClr val="1E823C"/>
+          </a:solidFill>
+          <a:ln>
+            <a:noFill/>
+          </a:ln>
+        </p:spPr>
+        <p:style>
+          <a:lnRef idx="1">
+            <a:schemeClr val="accent1"/>
+          </a:lnRef>
+          <a:fillRef idx="3">
+            <a:schemeClr val="accent1"/>
+          </a:fillRef>
+          <a:effectRef idx="2">
+            <a:schemeClr val="accent1"/>
+          </a:effectRef>
+          <a:fontRef idx="minor">
+            <a:schemeClr val="lt1"/>
+          </a:fontRef>
+        </p:style>
+        <p:txBody>
+          <a:bodyPr rtlCol="0" anchor="ctr"/>
+          <a:lstStyle/>
+          <a:p>
+            <a:pPr algn="ctr"/>
+          </a:p>
+        </p:txBody>
+      </p:sp>
+      <p:sp>
+        <p:nvSpPr>
+          <p:cNvPr id="7" name="TextBox 6"/>
+          <p:cNvSpPr txBox="1"/>
+          <p:nvPr/>
+        </p:nvSpPr>
+        <p:spPr>
+          <a:xfrm>
+            <a:off x="365760" y="658368"/>
+            <a:ext cx="5303520" cy="457200"/>
+          </a:xfrm>
+          <a:prstGeom prst="rect">
+            <a:avLst/>
+          </a:prstGeom>
+          <a:noFill/>
+        </p:spPr>
+        <p:txBody>
+          <a:bodyPr wrap="none">
+            <a:spAutoFit/>
+          </a:bodyPr>
+          <a:lstStyle/>
+          <a:p>
             <a:pPr>
-              <a:defRPr sz="2000" b="1">
+              <a:defRPr sz="1800" b="1">
                 <a:solidFill>
                   <a:srgbClr val="1E823C"/>
                 </a:solidFill>
@@ -3272,7 +3867,155 @@
       </p:sp>
       <p:sp>
         <p:nvSpPr>
-          <p:cNvPr id="4" name="TextBox 3"/>
+          <p:cNvPr id="8" name="Rectangle 7"/>
+          <p:cNvSpPr/>
+          <p:nvPr/>
+        </p:nvSpPr>
+        <p:spPr>
+          <a:xfrm>
+            <a:off x="0" y="6400800"/>
+            <a:ext cx="12191999" cy="13716"/>
+          </a:xfrm>
+          <a:prstGeom prst="rect">
+            <a:avLst/>
+          </a:prstGeom>
+          <a:solidFill>
+            <a:srgbClr val="1E823C"/>
+          </a:solidFill>
+          <a:ln>
+            <a:noFill/>
+          </a:ln>
+        </p:spPr>
+        <p:style>
+          <a:lnRef idx="1">
+            <a:schemeClr val="accent1"/>
+          </a:lnRef>
+          <a:fillRef idx="3">
+            <a:schemeClr val="accent1"/>
+          </a:fillRef>
+          <a:effectRef idx="2">
+            <a:schemeClr val="accent1"/>
+          </a:effectRef>
+          <a:fontRef idx="minor">
+            <a:schemeClr val="lt1"/>
+          </a:fontRef>
+        </p:style>
+        <p:txBody>
+          <a:bodyPr rtlCol="0" anchor="ctr"/>
+          <a:lstStyle/>
+          <a:p>
+            <a:pPr algn="ctr"/>
+          </a:p>
+        </p:txBody>
+      </p:sp>
+      <p:sp>
+        <p:nvSpPr>
+          <p:cNvPr id="9" name="TextBox 8"/>
+          <p:cNvSpPr txBox="1"/>
+          <p:nvPr/>
+        </p:nvSpPr>
+        <p:spPr>
+          <a:xfrm>
+            <a:off x="365760" y="6446520"/>
+            <a:ext cx="4114800" cy="320040"/>
+          </a:xfrm>
+          <a:prstGeom prst="rect">
+            <a:avLst/>
+          </a:prstGeom>
+          <a:noFill/>
+        </p:spPr>
+        <p:txBody>
+          <a:bodyPr wrap="none">
+            <a:spAutoFit/>
+          </a:bodyPr>
+          <a:lstStyle/>
+          <a:p>
+            <a:r>
+              <a:rPr sz="1000" b="1">
+                <a:solidFill>
+                  <a:srgbClr val="000000"/>
+                </a:solidFill>
+                <a:latin typeface="Arial"/>
+              </a:rPr>
+              <a:t>de Andrade, P. H. R.; Luiz, B.; Salles, I.</a:t>
+            </a:r>
+          </a:p>
+        </p:txBody>
+      </p:sp>
+      <p:sp>
+        <p:nvSpPr>
+          <p:cNvPr id="10" name="TextBox 9"/>
+          <p:cNvSpPr txBox="1"/>
+          <p:nvPr/>
+        </p:nvSpPr>
+        <p:spPr>
+          <a:xfrm>
+            <a:off x="4114800" y="6446520"/>
+            <a:ext cx="4572000" cy="320040"/>
+          </a:xfrm>
+          <a:prstGeom prst="rect">
+            <a:avLst/>
+          </a:prstGeom>
+          <a:noFill/>
+        </p:spPr>
+        <p:txBody>
+          <a:bodyPr wrap="none">
+            <a:spAutoFit/>
+          </a:bodyPr>
+          <a:lstStyle/>
+          <a:p>
+            <a:pPr algn="ctr"/>
+            <a:r>
+              <a:rPr sz="1000" b="1">
+                <a:solidFill>
+                  <a:srgbClr val="141414"/>
+                </a:solidFill>
+                <a:latin typeface="Arial"/>
+                <a:hlinkClick r:id="rId4"/>
+              </a:rPr>
+              <a:t>Normalização &amp; Dependências Funcionais</a:t>
+            </a:r>
+          </a:p>
+        </p:txBody>
+      </p:sp>
+      <p:sp>
+        <p:nvSpPr>
+          <p:cNvPr id="11" name="TextBox 10"/>
+          <p:cNvSpPr txBox="1"/>
+          <p:nvPr/>
+        </p:nvSpPr>
+        <p:spPr>
+          <a:xfrm>
+            <a:off x="9326880" y="6446520"/>
+            <a:ext cx="2468880" cy="320040"/>
+          </a:xfrm>
+          <a:prstGeom prst="rect">
+            <a:avLst/>
+          </a:prstGeom>
+          <a:noFill/>
+        </p:spPr>
+        <p:txBody>
+          <a:bodyPr wrap="none">
+            <a:spAutoFit/>
+          </a:bodyPr>
+          <a:lstStyle/>
+          <a:p>
+            <a:pPr algn="r"/>
+            <a:r>
+              <a:rPr sz="1000" b="1">
+                <a:solidFill>
+                  <a:srgbClr val="141414"/>
+                </a:solidFill>
+                <a:latin typeface="Arial"/>
+              </a:rPr>
+              <a:t>2 / 11</a:t>
+            </a:r>
+          </a:p>
+        </p:txBody>
+      </p:sp>
+      <p:sp>
+        <p:nvSpPr>
+          <p:cNvPr id="12" name="TextBox 11"/>
           <p:cNvSpPr txBox="1"/>
           <p:nvPr/>
         </p:nvSpPr>
@@ -3304,7 +4047,7 @@
               </a:defRPr>
             </a:pPr>
             <a:r>
-              <a:t>1.  Introdução &amp; Contextualização do Tema</a:t>
+              <a:t>1.  Conceitos</a:t>
             </a:r>
           </a:p>
           <a:p>
@@ -3320,7 +4063,7 @@
               </a:defRPr>
             </a:pPr>
             <a:r>
-              <a:t>2.  Metodologia &amp; Etapas de Desenvolvimento</a:t>
+              <a:t>2.  Cenário 0FN</a:t>
             </a:r>
           </a:p>
           <a:p>
@@ -3336,7 +4079,7 @@
               </a:defRPr>
             </a:pPr>
             <a:r>
-              <a:t>3.  Resultados Obtidos &amp; Análise Crítica</a:t>
+              <a:t>3.  1ª FN</a:t>
             </a:r>
           </a:p>
           <a:p>
@@ -3352,7 +4095,39 @@
               </a:defRPr>
             </a:pPr>
             <a:r>
-              <a:t>4.  Conclusões Finais &amp; Trabalhos Futuros</a:t>
+              <a:t>4.  2ª FN</a:t>
+            </a:r>
+          </a:p>
+          <a:p>
+            <a:pPr>
+              <a:spcAft>
+                <a:spcPts val="1800"/>
+              </a:spcAft>
+              <a:defRPr sz="1800" b="1">
+                <a:solidFill>
+                  <a:srgbClr val="1E823C"/>
+                </a:solidFill>
+                <a:latin typeface="Arial"/>
+              </a:defRPr>
+            </a:pPr>
+            <a:r>
+              <a:t>5.  3ª FN</a:t>
+            </a:r>
+          </a:p>
+          <a:p>
+            <a:pPr>
+              <a:spcAft>
+                <a:spcPts val="1800"/>
+              </a:spcAft>
+              <a:defRPr sz="1800" b="1">
+                <a:solidFill>
+                  <a:srgbClr val="1E823C"/>
+                </a:solidFill>
+                <a:latin typeface="Arial"/>
+              </a:defRPr>
+            </a:pPr>
+            <a:r>
+              <a:t>6.  Conclusões</a:t>
             </a:r>
           </a:p>
         </p:txBody>
@@ -3380,13 +4155,80 @@
       <p:grpSpPr/>
       <p:sp>
         <p:nvSpPr>
-          <p:cNvPr id="2" name="TextBox 1"/>
+          <p:cNvPr id="2" name="Rectangle 1"/>
+          <p:cNvSpPr/>
+          <p:nvPr/>
+        </p:nvSpPr>
+        <p:spPr>
+          <a:xfrm>
+            <a:off x="0" y="0"/>
+            <a:ext cx="12191999" cy="6858000"/>
+          </a:xfrm>
+          <a:prstGeom prst="rect">
+            <a:avLst/>
+          </a:prstGeom>
+          <a:solidFill>
+            <a:srgbClr val="FFFFFF"/>
+          </a:solidFill>
+          <a:ln>
+            <a:noFill/>
+          </a:ln>
+        </p:spPr>
+        <p:style>
+          <a:lnRef idx="1">
+            <a:schemeClr val="accent1"/>
+          </a:lnRef>
+          <a:fillRef idx="3">
+            <a:schemeClr val="accent1"/>
+          </a:fillRef>
+          <a:effectRef idx="2">
+            <a:schemeClr val="accent1"/>
+          </a:effectRef>
+          <a:fontRef idx="minor">
+            <a:schemeClr val="lt1"/>
+          </a:fontRef>
+        </p:style>
+        <p:txBody>
+          <a:bodyPr rtlCol="0" anchor="ctr"/>
+          <a:lstStyle/>
+          <a:p>
+            <a:pPr algn="ctr"/>
+          </a:p>
+        </p:txBody>
+      </p:sp>
+      <p:pic>
+        <p:nvPicPr>
+          <p:cNvPr id="3" name="Picture 2" descr="logo_iff_crop.png"/>
+          <p:cNvPicPr>
+            <a:picLocks noChangeAspect="1"/>
+          </p:cNvPicPr>
+          <p:nvPr/>
+        </p:nvPicPr>
+        <p:blipFill>
+          <a:blip r:embed="rId2"/>
+          <a:stretch>
+            <a:fillRect/>
+          </a:stretch>
+        </p:blipFill>
+        <p:spPr>
+          <a:xfrm>
+            <a:off x="365760" y="73152"/>
+            <a:ext cx="1395412" cy="384048"/>
+          </a:xfrm>
+          <a:prstGeom prst="rect">
+            <a:avLst/>
+          </a:prstGeom>
+        </p:spPr>
+      </p:pic>
+      <p:sp>
+        <p:nvSpPr>
+          <p:cNvPr id="4" name="TextBox 3"/>
           <p:cNvSpPr txBox="1"/>
           <p:nvPr/>
         </p:nvSpPr>
         <p:spPr>
           <a:xfrm>
-            <a:off x="2450592" y="27432"/>
+            <a:off x="2331720" y="27432"/>
             <a:ext cx="4389120" cy="475488"/>
           </a:xfrm>
           <a:prstGeom prst="rect">
@@ -3401,7 +4243,7 @@
           <a:lstStyle/>
           <a:p>
             <a:r>
-              <a:rPr sz="2200" b="0">
+              <a:rPr sz="2000" b="0">
                 <a:solidFill>
                   <a:srgbClr val="5A5A5A"/>
                 </a:solidFill>
@@ -3410,27 +4252,27 @@
               <a:t> |   </a:t>
             </a:r>
             <a:r>
-              <a:rPr sz="2400" b="1">
+              <a:rPr sz="2000" b="1">
                 <a:solidFill>
                   <a:srgbClr val="141414"/>
                 </a:solidFill>
                 <a:latin typeface="Arial"/>
               </a:rPr>
-              <a:t>Introdução</a:t>
-            </a:r>
-          </a:p>
-        </p:txBody>
-      </p:sp>
-      <p:sp>
-        <p:nvSpPr>
-          <p:cNvPr id="3" name="TextBox 2"/>
+              <a:t>Conceitos</a:t>
+            </a:r>
+          </a:p>
+        </p:txBody>
+      </p:sp>
+      <p:sp>
+        <p:nvSpPr>
+          <p:cNvPr id="5" name="TextBox 4"/>
           <p:cNvSpPr txBox="1"/>
           <p:nvPr/>
         </p:nvSpPr>
         <p:spPr>
           <a:xfrm>
-            <a:off x="548640" y="658368"/>
-            <a:ext cx="4937760" cy="457200"/>
+            <a:off x="5852160" y="73152"/>
+            <a:ext cx="5943600" cy="365760"/>
           </a:xfrm>
           <a:prstGeom prst="rect">
             <a:avLst/>
@@ -3443,8 +4285,106 @@
           </a:bodyPr>
           <a:lstStyle/>
           <a:p>
+            <a:pPr algn="r"/>
+            <a:r>
+              <a:rPr sz="1300" b="1">
+                <a:solidFill>
+                  <a:srgbClr val="141414"/>
+                </a:solidFill>
+                <a:latin typeface="Arial"/>
+                <a:hlinkClick r:id="rId3"/>
+              </a:rPr>
+              <a:t>Banco de Dados</a:t>
+            </a:r>
+            <a:r>
+              <a:rPr sz="1300">
+                <a:solidFill>
+                  <a:srgbClr val="5A5A5A"/>
+                </a:solidFill>
+                <a:latin typeface="Arial"/>
+              </a:rPr>
+              <a:t>   |   </a:t>
+            </a:r>
+            <a:r>
+              <a:rPr sz="1300" b="1">
+                <a:solidFill>
+                  <a:srgbClr val="1E823C"/>
+                </a:solidFill>
+                <a:latin typeface="Arial"/>
+                <a:hlinkClick r:id="rId4"/>
+              </a:rPr>
+              <a:t>Normalização &amp; DFs</a:t>
+            </a:r>
+          </a:p>
+        </p:txBody>
+      </p:sp>
+      <p:sp>
+        <p:nvSpPr>
+          <p:cNvPr id="6" name="Rectangle 5"/>
+          <p:cNvSpPr/>
+          <p:nvPr/>
+        </p:nvSpPr>
+        <p:spPr>
+          <a:xfrm>
+            <a:off x="0" y="566928"/>
+            <a:ext cx="12191999" cy="13716"/>
+          </a:xfrm>
+          <a:prstGeom prst="rect">
+            <a:avLst/>
+          </a:prstGeom>
+          <a:solidFill>
+            <a:srgbClr val="1E823C"/>
+          </a:solidFill>
+          <a:ln>
+            <a:noFill/>
+          </a:ln>
+        </p:spPr>
+        <p:style>
+          <a:lnRef idx="1">
+            <a:schemeClr val="accent1"/>
+          </a:lnRef>
+          <a:fillRef idx="3">
+            <a:schemeClr val="accent1"/>
+          </a:fillRef>
+          <a:effectRef idx="2">
+            <a:schemeClr val="accent1"/>
+          </a:effectRef>
+          <a:fontRef idx="minor">
+            <a:schemeClr val="lt1"/>
+          </a:fontRef>
+        </p:style>
+        <p:txBody>
+          <a:bodyPr rtlCol="0" anchor="ctr"/>
+          <a:lstStyle/>
+          <a:p>
+            <a:pPr algn="ctr"/>
+          </a:p>
+        </p:txBody>
+      </p:sp>
+      <p:sp>
+        <p:nvSpPr>
+          <p:cNvPr id="7" name="TextBox 6"/>
+          <p:cNvSpPr txBox="1"/>
+          <p:nvPr/>
+        </p:nvSpPr>
+        <p:spPr>
+          <a:xfrm>
+            <a:off x="365760" y="658368"/>
+            <a:ext cx="5303520" cy="457200"/>
+          </a:xfrm>
+          <a:prstGeom prst="rect">
+            <a:avLst/>
+          </a:prstGeom>
+          <a:noFill/>
+        </p:spPr>
+        <p:txBody>
+          <a:bodyPr wrap="none">
+            <a:spAutoFit/>
+          </a:bodyPr>
+          <a:lstStyle/>
+          <a:p>
             <a:pPr>
-              <a:defRPr sz="2000" b="1">
+              <a:defRPr sz="1800" b="1">
                 <a:solidFill>
                   <a:srgbClr val="1E823C"/>
                 </a:solidFill>
@@ -3452,21 +4392,64 @@
               </a:defRPr>
             </a:pPr>
             <a:r>
-              <a:t>Contextualização e Problemática</a:t>
-            </a:r>
-          </a:p>
-        </p:txBody>
-      </p:sp>
-      <p:sp>
-        <p:nvSpPr>
-          <p:cNvPr id="4" name="TextBox 3"/>
+              <a:t>O que são Dependências Funcionais?</a:t>
+            </a:r>
+          </a:p>
+        </p:txBody>
+      </p:sp>
+      <p:sp>
+        <p:nvSpPr>
+          <p:cNvPr id="8" name="Rectangle 7"/>
+          <p:cNvSpPr/>
+          <p:nvPr/>
+        </p:nvSpPr>
+        <p:spPr>
+          <a:xfrm>
+            <a:off x="0" y="6400800"/>
+            <a:ext cx="12191999" cy="13716"/>
+          </a:xfrm>
+          <a:prstGeom prst="rect">
+            <a:avLst/>
+          </a:prstGeom>
+          <a:solidFill>
+            <a:srgbClr val="1E823C"/>
+          </a:solidFill>
+          <a:ln>
+            <a:noFill/>
+          </a:ln>
+        </p:spPr>
+        <p:style>
+          <a:lnRef idx="1">
+            <a:schemeClr val="accent1"/>
+          </a:lnRef>
+          <a:fillRef idx="3">
+            <a:schemeClr val="accent1"/>
+          </a:fillRef>
+          <a:effectRef idx="2">
+            <a:schemeClr val="accent1"/>
+          </a:effectRef>
+          <a:fontRef idx="minor">
+            <a:schemeClr val="lt1"/>
+          </a:fontRef>
+        </p:style>
+        <p:txBody>
+          <a:bodyPr rtlCol="0" anchor="ctr"/>
+          <a:lstStyle/>
+          <a:p>
+            <a:pPr algn="ctr"/>
+          </a:p>
+        </p:txBody>
+      </p:sp>
+      <p:sp>
+        <p:nvSpPr>
+          <p:cNvPr id="9" name="TextBox 8"/>
           <p:cNvSpPr txBox="1"/>
           <p:nvPr/>
         </p:nvSpPr>
         <p:spPr>
           <a:xfrm>
-            <a:off x="502920" y="1188720"/>
-            <a:ext cx="4983480" cy="5120640"/>
+            <a:off x="365760" y="6446520"/>
+            <a:ext cx="4114800" cy="320040"/>
           </a:xfrm>
           <a:prstGeom prst="rect">
             <a:avLst/>
@@ -3474,86 +4457,263 @@
           <a:noFill/>
         </p:spPr>
         <p:txBody>
-          <a:bodyPr wrap="square">
+          <a:bodyPr wrap="none">
             <a:spAutoFit/>
           </a:bodyPr>
           <a:lstStyle/>
           <a:p>
+            <a:r>
+              <a:rPr sz="1000" b="1">
+                <a:solidFill>
+                  <a:srgbClr val="000000"/>
+                </a:solidFill>
+                <a:latin typeface="Arial"/>
+              </a:rPr>
+              <a:t>de Andrade, P. H. R.; Luiz, B.; Salles, I.</a:t>
+            </a:r>
+          </a:p>
+        </p:txBody>
+      </p:sp>
+      <p:sp>
+        <p:nvSpPr>
+          <p:cNvPr id="10" name="TextBox 9"/>
+          <p:cNvSpPr txBox="1"/>
+          <p:nvPr/>
+        </p:nvSpPr>
+        <p:spPr>
+          <a:xfrm>
+            <a:off x="4114800" y="6446520"/>
+            <a:ext cx="4572000" cy="320040"/>
+          </a:xfrm>
+          <a:prstGeom prst="rect">
+            <a:avLst/>
+          </a:prstGeom>
+          <a:noFill/>
+        </p:spPr>
+        <p:txBody>
+          <a:bodyPr wrap="none">
+            <a:spAutoFit/>
+          </a:bodyPr>
+          <a:lstStyle/>
+          <a:p>
+            <a:pPr algn="ctr"/>
+            <a:r>
+              <a:rPr sz="1000" b="1">
+                <a:solidFill>
+                  <a:srgbClr val="141414"/>
+                </a:solidFill>
+                <a:latin typeface="Arial"/>
+                <a:hlinkClick r:id="rId4"/>
+              </a:rPr>
+              <a:t>Normalização &amp; Dependências Funcionais</a:t>
+            </a:r>
+          </a:p>
+        </p:txBody>
+      </p:sp>
+      <p:sp>
+        <p:nvSpPr>
+          <p:cNvPr id="11" name="TextBox 10"/>
+          <p:cNvSpPr txBox="1"/>
+          <p:nvPr/>
+        </p:nvSpPr>
+        <p:spPr>
+          <a:xfrm>
+            <a:off x="9326880" y="6446520"/>
+            <a:ext cx="2468880" cy="320040"/>
+          </a:xfrm>
+          <a:prstGeom prst="rect">
+            <a:avLst/>
+          </a:prstGeom>
+          <a:noFill/>
+        </p:spPr>
+        <p:txBody>
+          <a:bodyPr wrap="none">
+            <a:spAutoFit/>
+          </a:bodyPr>
+          <a:lstStyle/>
+          <a:p>
+            <a:pPr algn="r"/>
+            <a:r>
+              <a:rPr sz="1000" b="1">
+                <a:solidFill>
+                  <a:srgbClr val="141414"/>
+                </a:solidFill>
+                <a:latin typeface="Arial"/>
+              </a:rPr>
+              <a:t>3 / 11</a:t>
+            </a:r>
+          </a:p>
+        </p:txBody>
+      </p:sp>
+      <p:sp>
+        <p:nvSpPr>
+          <p:cNvPr id="12" name="TextBox 11"/>
+          <p:cNvSpPr txBox="1"/>
+          <p:nvPr/>
+        </p:nvSpPr>
+        <p:spPr>
+          <a:xfrm>
+            <a:off x="457200" y="1188720"/>
+            <a:ext cx="5120640" cy="5029200"/>
+          </a:xfrm>
+          <a:prstGeom prst="rect">
+            <a:avLst/>
+          </a:prstGeom>
+          <a:noFill/>
+        </p:spPr>
+        <p:txBody>
+          <a:bodyPr wrap="square" lIns="0" rIns="0" tIns="0" bIns="0">
+            <a:spAutoFit/>
+          </a:bodyPr>
+          <a:lstStyle/>
+          <a:p>
             <a:pPr>
               <a:spcAft>
-                <a:spcPts val="1200"/>
+                <a:spcPts val="1600"/>
               </a:spcAft>
-              <a:defRPr sz="1450" b="1" i="0">
+            </a:pPr>
+            <a:r>
+              <a:rPr sz="1400" b="1">
                 <a:solidFill>
                   <a:srgbClr val="1E823C"/>
                 </a:solidFill>
                 <a:latin typeface="Arial"/>
-              </a:defRPr>
-            </a:pPr>
-            <a:r>
-              <a:t>•  Contexto do Tema: Apresentação dos conceitos fundamentais estudados na disciplina.</a:t>
+              </a:rPr>
+              <a:t>•  </a:t>
+            </a:r>
+            <a:r>
+              <a:rPr sz="1400" b="1">
+                <a:solidFill>
+                  <a:srgbClr val="1E823C"/>
+                </a:solidFill>
+                <a:latin typeface="Arial"/>
+              </a:rPr>
+              <a:t>Definição (X → Y): </a:t>
+            </a:r>
+            <a:r>
+              <a:rPr sz="1400" b="0">
+                <a:solidFill>
+                  <a:srgbClr val="141414"/>
+                </a:solidFill>
+                <a:latin typeface="Arial"/>
+              </a:rPr>
+              <a:t>X determina unicamente o valor de Y.</a:t>
             </a:r>
           </a:p>
           <a:p>
             <a:pPr>
               <a:spcAft>
-                <a:spcPts val="1200"/>
+                <a:spcPts val="1600"/>
               </a:spcAft>
-              <a:defRPr sz="1450" b="1" i="0">
-                <a:solidFill>
-                  <a:srgbClr val="B41E1E"/>
-                </a:solidFill>
-                <a:latin typeface="Arial"/>
-              </a:defRPr>
             </a:pPr>
             <a:r>
-              <a:t>•  O Problema Abordado: Desafios práticos e teóricos encontrados no desenvolvimento do trabalho.</a:t>
+              <a:rPr sz="1400" b="1">
+                <a:solidFill>
+                  <a:srgbClr val="1E823C"/>
+                </a:solidFill>
+                <a:latin typeface="Arial"/>
+              </a:rPr>
+              <a:t>•  </a:t>
+            </a:r>
+            <a:r>
+              <a:rPr sz="1400" b="1">
+                <a:solidFill>
+                  <a:srgbClr val="1E823C"/>
+                </a:solidFill>
+                <a:latin typeface="Arial"/>
+              </a:rPr>
+              <a:t>Determinante vs Determinado: </a:t>
+            </a:r>
+            <a:r>
+              <a:rPr sz="1400" b="0">
+                <a:solidFill>
+                  <a:srgbClr val="141414"/>
+                </a:solidFill>
+                <a:latin typeface="Arial"/>
+              </a:rPr>
+              <a:t>X determina; Y depende.</a:t>
             </a:r>
           </a:p>
           <a:p>
             <a:pPr>
               <a:spcAft>
-                <a:spcPts val="1200"/>
+                <a:spcPts val="1600"/>
               </a:spcAft>
-              <a:defRPr sz="1450" b="0" i="1">
+            </a:pPr>
+            <a:r>
+              <a:rPr sz="1400" b="1">
+                <a:solidFill>
+                  <a:srgbClr val="B41E1E"/>
+                </a:solidFill>
+                <a:latin typeface="Arial"/>
+              </a:rPr>
+              <a:t>•  </a:t>
+            </a:r>
+            <a:r>
+              <a:rPr sz="1400" b="1">
+                <a:solidFill>
+                  <a:srgbClr val="B41E1E"/>
+                </a:solidFill>
+                <a:latin typeface="Arial"/>
+              </a:rPr>
+              <a:t>Anomalias Clássicas: </a:t>
+            </a:r>
+            <a:r>
+              <a:rPr sz="1400" b="0">
                 <a:solidFill>
                   <a:srgbClr val="141414"/>
                 </a:solidFill>
                 <a:latin typeface="Arial"/>
-              </a:defRPr>
-            </a:pPr>
-            <a:r>
-              <a:t>•  Pergunta Central: Quais metodologias respondem aos objetivos propostos?</a:t>
+              </a:rPr>
+              <a:t>Inserção, Exclusão e Alteração.</a:t>
             </a:r>
           </a:p>
           <a:p>
             <a:pPr>
               <a:spcAft>
-                <a:spcPts val="1200"/>
+                <a:spcPts val="1600"/>
               </a:spcAft>
-              <a:defRPr sz="1450" b="1" i="0">
+            </a:pPr>
+            <a:r>
+              <a:rPr sz="1400" b="1">
                 <a:solidFill>
                   <a:srgbClr val="1E823C"/>
                 </a:solidFill>
                 <a:latin typeface="Arial"/>
-              </a:defRPr>
-            </a:pPr>
-            <a:r>
-              <a:t>•  Objetivo Geral: Implementar e demonstrar soluções eficientes com base no conteúdo programático.</a:t>
-            </a:r>
-          </a:p>
-        </p:txBody>
-      </p:sp>
-      <p:sp>
-        <p:nvSpPr>
-          <p:cNvPr id="5" name="Rounded Rectangle 4"/>
+              </a:rPr>
+              <a:t>•  </a:t>
+            </a:r>
+            <a:r>
+              <a:rPr sz="1400" b="1">
+                <a:solidFill>
+                  <a:srgbClr val="1E823C"/>
+                </a:solidFill>
+                <a:latin typeface="Arial"/>
+              </a:rPr>
+              <a:t>Objetivo Central: </a:t>
+            </a:r>
+            <a:r>
+              <a:rPr sz="1400" b="0">
+                <a:solidFill>
+                  <a:srgbClr val="141414"/>
+                </a:solidFill>
+                <a:latin typeface="Arial"/>
+              </a:rPr>
+              <a:t>Eliminar redundâncias sem perda de dados.</a:t>
+            </a:r>
+          </a:p>
+        </p:txBody>
+      </p:sp>
+      <p:sp>
+        <p:nvSpPr>
+          <p:cNvPr id="13" name="Rounded Rectangle 12"/>
           <p:cNvSpPr/>
           <p:nvPr/>
         </p:nvSpPr>
         <p:spPr>
           <a:xfrm>
-            <a:off x="5888736" y="722376"/>
-            <a:ext cx="6172200" cy="5596128"/>
+            <a:off x="5943600" y="722376"/>
+            <a:ext cx="5806440" cy="5532120"/>
           </a:xfrm>
           <a:prstGeom prst="roundRect">
             <a:avLst>
@@ -3593,14 +4753,14 @@
       </p:sp>
       <p:sp>
         <p:nvSpPr>
-          <p:cNvPr id="6" name="TextBox 5"/>
+          <p:cNvPr id="14" name="TextBox 13"/>
           <p:cNvSpPr txBox="1"/>
           <p:nvPr/>
         </p:nvSpPr>
         <p:spPr>
           <a:xfrm>
-            <a:off x="7379208" y="804672"/>
-            <a:ext cx="3566160" cy="274320"/>
+            <a:off x="5989320" y="777240"/>
+            <a:ext cx="5715000" cy="274320"/>
           </a:xfrm>
           <a:prstGeom prst="rect">
             <a:avLst/>
@@ -3615,35 +4775,35 @@
           <a:p>
             <a:pPr algn="ctr"/>
             <a:r>
-              <a:rPr sz="1200" b="1">
-                <a:solidFill>
-                  <a:srgbClr val="141414"/>
-                </a:solidFill>
-                <a:latin typeface="Arial"/>
-              </a:rPr>
-              <a:t>Figura 1 - Visão Geral do Sistema/Experimento</a:t>
+              <a:rPr sz="1100" b="1">
+                <a:solidFill>
+                  <a:srgbClr val="1E823C"/>
+                </a:solidFill>
+                <a:latin typeface="Arial"/>
+              </a:rPr>
+              <a:t>Figura 1 - Teoria de DFs e Anomalias</a:t>
             </a:r>
           </a:p>
         </p:txBody>
       </p:sp>
       <p:pic>
         <p:nvPicPr>
-          <p:cNvPr id="7" name="Picture 6" descr="anatomia.png"/>
+          <p:cNvPr id="15" name="Picture 14" descr="figura1_df_anomalias.png"/>
           <p:cNvPicPr>
             <a:picLocks noChangeAspect="1"/>
           </p:cNvPicPr>
           <p:nvPr/>
         </p:nvPicPr>
         <p:blipFill>
-          <a:blip r:embed="rId2"/>
+          <a:blip r:embed="rId5"/>
           <a:stretch>
             <a:fillRect/>
           </a:stretch>
         </p:blipFill>
         <p:spPr>
           <a:xfrm>
-            <a:off x="6025896" y="1078992"/>
-            <a:ext cx="5897880" cy="4718304"/>
+            <a:off x="6035040" y="1097280"/>
+            <a:ext cx="5623560" cy="4754880"/>
           </a:xfrm>
           <a:prstGeom prst="rect">
             <a:avLst/>
@@ -3652,14 +4812,14 @@
       </p:pic>
       <p:sp>
         <p:nvSpPr>
-          <p:cNvPr id="8" name="TextBox 7"/>
+          <p:cNvPr id="16" name="TextBox 15"/>
           <p:cNvSpPr txBox="1"/>
           <p:nvPr/>
         </p:nvSpPr>
         <p:spPr>
           <a:xfrm>
-            <a:off x="7562088" y="5907024"/>
-            <a:ext cx="2916936" cy="402336"/>
+            <a:off x="5989320" y="5897880"/>
+            <a:ext cx="5715000" cy="274320"/>
           </a:xfrm>
           <a:prstGeom prst="rect">
             <a:avLst/>
@@ -3674,26 +4834,13 @@
           <a:p>
             <a:pPr algn="ctr"/>
             <a:r>
-              <a:rPr sz="1000" i="0">
+              <a:rPr sz="900">
                 <a:solidFill>
                   <a:srgbClr val="5A5A5A"/>
                 </a:solidFill>
                 <a:latin typeface="Arial"/>
               </a:rPr>
               <a:t>Fonte: Elaboração dos Autores (2026)</a:t>
-            </a:r>
-          </a:p>
-          <a:p>
-            <a:pPr algn="ctr"/>
-            <a:r>
-              <a:rPr sz="1050" b="1">
-                <a:solidFill>
-                  <a:srgbClr val="1E823C"/>
-                </a:solidFill>
-                <a:latin typeface="Arial"/>
-                <a:hlinkClick r:id="rId3"/>
-              </a:rPr>
-              <a:t>Documento Técnico | Relatório do Trabalho</a:t>
             </a:r>
           </a:p>
         </p:txBody>
@@ -3721,13 +4868,80 @@
       <p:grpSpPr/>
       <p:sp>
         <p:nvSpPr>
-          <p:cNvPr id="2" name="TextBox 1"/>
+          <p:cNvPr id="2" name="Rectangle 1"/>
+          <p:cNvSpPr/>
+          <p:nvPr/>
+        </p:nvSpPr>
+        <p:spPr>
+          <a:xfrm>
+            <a:off x="0" y="0"/>
+            <a:ext cx="12191999" cy="6858000"/>
+          </a:xfrm>
+          <a:prstGeom prst="rect">
+            <a:avLst/>
+          </a:prstGeom>
+          <a:solidFill>
+            <a:srgbClr val="FFFFFF"/>
+          </a:solidFill>
+          <a:ln>
+            <a:noFill/>
+          </a:ln>
+        </p:spPr>
+        <p:style>
+          <a:lnRef idx="1">
+            <a:schemeClr val="accent1"/>
+          </a:lnRef>
+          <a:fillRef idx="3">
+            <a:schemeClr val="accent1"/>
+          </a:fillRef>
+          <a:effectRef idx="2">
+            <a:schemeClr val="accent1"/>
+          </a:effectRef>
+          <a:fontRef idx="minor">
+            <a:schemeClr val="lt1"/>
+          </a:fontRef>
+        </p:style>
+        <p:txBody>
+          <a:bodyPr rtlCol="0" anchor="ctr"/>
+          <a:lstStyle/>
+          <a:p>
+            <a:pPr algn="ctr"/>
+          </a:p>
+        </p:txBody>
+      </p:sp>
+      <p:pic>
+        <p:nvPicPr>
+          <p:cNvPr id="3" name="Picture 2" descr="logo_iff_crop.png"/>
+          <p:cNvPicPr>
+            <a:picLocks noChangeAspect="1"/>
+          </p:cNvPicPr>
+          <p:nvPr/>
+        </p:nvPicPr>
+        <p:blipFill>
+          <a:blip r:embed="rId2"/>
+          <a:stretch>
+            <a:fillRect/>
+          </a:stretch>
+        </p:blipFill>
+        <p:spPr>
+          <a:xfrm>
+            <a:off x="365760" y="73152"/>
+            <a:ext cx="1395412" cy="384048"/>
+          </a:xfrm>
+          <a:prstGeom prst="rect">
+            <a:avLst/>
+          </a:prstGeom>
+        </p:spPr>
+      </p:pic>
+      <p:sp>
+        <p:nvSpPr>
+          <p:cNvPr id="4" name="TextBox 3"/>
           <p:cNvSpPr txBox="1"/>
           <p:nvPr/>
         </p:nvSpPr>
         <p:spPr>
           <a:xfrm>
-            <a:off x="2450592" y="27432"/>
+            <a:off x="2331720" y="27432"/>
             <a:ext cx="4389120" cy="475488"/>
           </a:xfrm>
           <a:prstGeom prst="rect">
@@ -3742,7 +4956,7 @@
           <a:lstStyle/>
           <a:p>
             <a:r>
-              <a:rPr sz="2200" b="0">
+              <a:rPr sz="2000" b="0">
                 <a:solidFill>
                   <a:srgbClr val="5A5A5A"/>
                 </a:solidFill>
@@ -3751,27 +4965,27 @@
               <a:t> |   </a:t>
             </a:r>
             <a:r>
-              <a:rPr sz="2400" b="1">
+              <a:rPr sz="2000" b="1">
                 <a:solidFill>
                   <a:srgbClr val="141414"/>
                 </a:solidFill>
                 <a:latin typeface="Arial"/>
               </a:rPr>
-              <a:t>Metodologia</a:t>
-            </a:r>
-          </a:p>
-        </p:txBody>
-      </p:sp>
-      <p:sp>
-        <p:nvSpPr>
-          <p:cNvPr id="3" name="TextBox 2"/>
+              <a:t>Cenário 0FN</a:t>
+            </a:r>
+          </a:p>
+        </p:txBody>
+      </p:sp>
+      <p:sp>
+        <p:nvSpPr>
+          <p:cNvPr id="5" name="TextBox 4"/>
           <p:cNvSpPr txBox="1"/>
           <p:nvPr/>
         </p:nvSpPr>
         <p:spPr>
           <a:xfrm>
-            <a:off x="548640" y="658368"/>
-            <a:ext cx="4937760" cy="457200"/>
+            <a:off x="5852160" y="73152"/>
+            <a:ext cx="5943600" cy="365760"/>
           </a:xfrm>
           <a:prstGeom prst="rect">
             <a:avLst/>
@@ -3784,8 +4998,106 @@
           </a:bodyPr>
           <a:lstStyle/>
           <a:p>
+            <a:pPr algn="r"/>
+            <a:r>
+              <a:rPr sz="1300" b="1">
+                <a:solidFill>
+                  <a:srgbClr val="141414"/>
+                </a:solidFill>
+                <a:latin typeface="Arial"/>
+                <a:hlinkClick r:id="rId3"/>
+              </a:rPr>
+              <a:t>Banco de Dados</a:t>
+            </a:r>
+            <a:r>
+              <a:rPr sz="1300">
+                <a:solidFill>
+                  <a:srgbClr val="5A5A5A"/>
+                </a:solidFill>
+                <a:latin typeface="Arial"/>
+              </a:rPr>
+              <a:t>   |   </a:t>
+            </a:r>
+            <a:r>
+              <a:rPr sz="1300" b="1">
+                <a:solidFill>
+                  <a:srgbClr val="1E823C"/>
+                </a:solidFill>
+                <a:latin typeface="Arial"/>
+                <a:hlinkClick r:id="rId4"/>
+              </a:rPr>
+              <a:t>Normalização &amp; DFs</a:t>
+            </a:r>
+          </a:p>
+        </p:txBody>
+      </p:sp>
+      <p:sp>
+        <p:nvSpPr>
+          <p:cNvPr id="6" name="Rectangle 5"/>
+          <p:cNvSpPr/>
+          <p:nvPr/>
+        </p:nvSpPr>
+        <p:spPr>
+          <a:xfrm>
+            <a:off x="0" y="566928"/>
+            <a:ext cx="12191999" cy="13716"/>
+          </a:xfrm>
+          <a:prstGeom prst="rect">
+            <a:avLst/>
+          </a:prstGeom>
+          <a:solidFill>
+            <a:srgbClr val="1E823C"/>
+          </a:solidFill>
+          <a:ln>
+            <a:noFill/>
+          </a:ln>
+        </p:spPr>
+        <p:style>
+          <a:lnRef idx="1">
+            <a:schemeClr val="accent1"/>
+          </a:lnRef>
+          <a:fillRef idx="3">
+            <a:schemeClr val="accent1"/>
+          </a:fillRef>
+          <a:effectRef idx="2">
+            <a:schemeClr val="accent1"/>
+          </a:effectRef>
+          <a:fontRef idx="minor">
+            <a:schemeClr val="lt1"/>
+          </a:fontRef>
+        </p:style>
+        <p:txBody>
+          <a:bodyPr rtlCol="0" anchor="ctr"/>
+          <a:lstStyle/>
+          <a:p>
+            <a:pPr algn="ctr"/>
+          </a:p>
+        </p:txBody>
+      </p:sp>
+      <p:sp>
+        <p:nvSpPr>
+          <p:cNvPr id="7" name="TextBox 6"/>
+          <p:cNvSpPr txBox="1"/>
+          <p:nvPr/>
+        </p:nvSpPr>
+        <p:spPr>
+          <a:xfrm>
+            <a:off x="365760" y="658368"/>
+            <a:ext cx="5303520" cy="457200"/>
+          </a:xfrm>
+          <a:prstGeom prst="rect">
+            <a:avLst/>
+          </a:prstGeom>
+          <a:noFill/>
+        </p:spPr>
+        <p:txBody>
+          <a:bodyPr wrap="none">
+            <a:spAutoFit/>
+          </a:bodyPr>
+          <a:lstStyle/>
+          <a:p>
             <a:pPr>
-              <a:defRPr sz="2000" b="1">
+              <a:defRPr sz="1800" b="1">
                 <a:solidFill>
                   <a:srgbClr val="1E823C"/>
                 </a:solidFill>
@@ -3793,21 +5105,64 @@
               </a:defRPr>
             </a:pPr>
             <a:r>
-              <a:t>Etapas de Execução do Trabalho</a:t>
-            </a:r>
-          </a:p>
-        </p:txBody>
-      </p:sp>
-      <p:sp>
-        <p:nvSpPr>
-          <p:cNvPr id="4" name="TextBox 3"/>
+              <a:t>O Cenário Não-Normalizado (0FN)</a:t>
+            </a:r>
+          </a:p>
+        </p:txBody>
+      </p:sp>
+      <p:sp>
+        <p:nvSpPr>
+          <p:cNvPr id="8" name="Rectangle 7"/>
+          <p:cNvSpPr/>
+          <p:nvPr/>
+        </p:nvSpPr>
+        <p:spPr>
+          <a:xfrm>
+            <a:off x="0" y="6400800"/>
+            <a:ext cx="12191999" cy="13716"/>
+          </a:xfrm>
+          <a:prstGeom prst="rect">
+            <a:avLst/>
+          </a:prstGeom>
+          <a:solidFill>
+            <a:srgbClr val="1E823C"/>
+          </a:solidFill>
+          <a:ln>
+            <a:noFill/>
+          </a:ln>
+        </p:spPr>
+        <p:style>
+          <a:lnRef idx="1">
+            <a:schemeClr val="accent1"/>
+          </a:lnRef>
+          <a:fillRef idx="3">
+            <a:schemeClr val="accent1"/>
+          </a:fillRef>
+          <a:effectRef idx="2">
+            <a:schemeClr val="accent1"/>
+          </a:effectRef>
+          <a:fontRef idx="minor">
+            <a:schemeClr val="lt1"/>
+          </a:fontRef>
+        </p:style>
+        <p:txBody>
+          <a:bodyPr rtlCol="0" anchor="ctr"/>
+          <a:lstStyle/>
+          <a:p>
+            <a:pPr algn="ctr"/>
+          </a:p>
+        </p:txBody>
+      </p:sp>
+      <p:sp>
+        <p:nvSpPr>
+          <p:cNvPr id="9" name="TextBox 8"/>
           <p:cNvSpPr txBox="1"/>
           <p:nvPr/>
         </p:nvSpPr>
         <p:spPr>
           <a:xfrm>
-            <a:off x="502920" y="1188720"/>
-            <a:ext cx="4983480" cy="5120640"/>
+            <a:off x="365760" y="6446520"/>
+            <a:ext cx="4114800" cy="320040"/>
           </a:xfrm>
           <a:prstGeom prst="rect">
             <a:avLst/>
@@ -3815,102 +5170,263 @@
           <a:noFill/>
         </p:spPr>
         <p:txBody>
-          <a:bodyPr wrap="square">
+          <a:bodyPr wrap="none">
             <a:spAutoFit/>
           </a:bodyPr>
           <a:lstStyle/>
           <a:p>
+            <a:r>
+              <a:rPr sz="1000" b="1">
+                <a:solidFill>
+                  <a:srgbClr val="000000"/>
+                </a:solidFill>
+                <a:latin typeface="Arial"/>
+              </a:rPr>
+              <a:t>de Andrade, P. H. R.; Luiz, B.; Salles, I.</a:t>
+            </a:r>
+          </a:p>
+        </p:txBody>
+      </p:sp>
+      <p:sp>
+        <p:nvSpPr>
+          <p:cNvPr id="10" name="TextBox 9"/>
+          <p:cNvSpPr txBox="1"/>
+          <p:nvPr/>
+        </p:nvSpPr>
+        <p:spPr>
+          <a:xfrm>
+            <a:off x="4114800" y="6446520"/>
+            <a:ext cx="4572000" cy="320040"/>
+          </a:xfrm>
+          <a:prstGeom prst="rect">
+            <a:avLst/>
+          </a:prstGeom>
+          <a:noFill/>
+        </p:spPr>
+        <p:txBody>
+          <a:bodyPr wrap="none">
+            <a:spAutoFit/>
+          </a:bodyPr>
+          <a:lstStyle/>
+          <a:p>
+            <a:pPr algn="ctr"/>
+            <a:r>
+              <a:rPr sz="1000" b="1">
+                <a:solidFill>
+                  <a:srgbClr val="141414"/>
+                </a:solidFill>
+                <a:latin typeface="Arial"/>
+                <a:hlinkClick r:id="rId4"/>
+              </a:rPr>
+              <a:t>Normalização &amp; Dependências Funcionais</a:t>
+            </a:r>
+          </a:p>
+        </p:txBody>
+      </p:sp>
+      <p:sp>
+        <p:nvSpPr>
+          <p:cNvPr id="11" name="TextBox 10"/>
+          <p:cNvSpPr txBox="1"/>
+          <p:nvPr/>
+        </p:nvSpPr>
+        <p:spPr>
+          <a:xfrm>
+            <a:off x="9326880" y="6446520"/>
+            <a:ext cx="2468880" cy="320040"/>
+          </a:xfrm>
+          <a:prstGeom prst="rect">
+            <a:avLst/>
+          </a:prstGeom>
+          <a:noFill/>
+        </p:spPr>
+        <p:txBody>
+          <a:bodyPr wrap="none">
+            <a:spAutoFit/>
+          </a:bodyPr>
+          <a:lstStyle/>
+          <a:p>
+            <a:pPr algn="r"/>
+            <a:r>
+              <a:rPr sz="1000" b="1">
+                <a:solidFill>
+                  <a:srgbClr val="141414"/>
+                </a:solidFill>
+                <a:latin typeface="Arial"/>
+              </a:rPr>
+              <a:t>4 / 11</a:t>
+            </a:r>
+          </a:p>
+        </p:txBody>
+      </p:sp>
+      <p:sp>
+        <p:nvSpPr>
+          <p:cNvPr id="12" name="TextBox 11"/>
+          <p:cNvSpPr txBox="1"/>
+          <p:nvPr/>
+        </p:nvSpPr>
+        <p:spPr>
+          <a:xfrm>
+            <a:off x="457200" y="1188720"/>
+            <a:ext cx="5120640" cy="5029200"/>
+          </a:xfrm>
+          <a:prstGeom prst="rect">
+            <a:avLst/>
+          </a:prstGeom>
+          <a:noFill/>
+        </p:spPr>
+        <p:txBody>
+          <a:bodyPr wrap="square" lIns="0" rIns="0" tIns="0" bIns="0">
+            <a:spAutoFit/>
+          </a:bodyPr>
+          <a:lstStyle/>
+          <a:p>
             <a:pPr>
               <a:spcAft>
-                <a:spcPts val="1200"/>
+                <a:spcPts val="1600"/>
               </a:spcAft>
-              <a:defRPr sz="1450" b="1" i="0">
+            </a:pPr>
+            <a:r>
+              <a:rPr sz="1400" b="1">
                 <a:solidFill>
                   <a:srgbClr val="1E823C"/>
                 </a:solidFill>
                 <a:latin typeface="Arial"/>
-              </a:defRPr>
-            </a:pPr>
-            <a:r>
-              <a:t>•  Coleta e Preparação: Definição das ferramentas computacionais e dados utilizados.</a:t>
+              </a:rPr>
+              <a:t>•  </a:t>
+            </a:r>
+            <a:r>
+              <a:rPr sz="1400" b="1">
+                <a:solidFill>
+                  <a:srgbClr val="1E823C"/>
+                </a:solidFill>
+                <a:latin typeface="Arial"/>
+              </a:rPr>
+              <a:t>Domínio: </a:t>
+            </a:r>
+            <a:r>
+              <a:rPr sz="1400" b="0">
+                <a:solidFill>
+                  <a:srgbClr val="141414"/>
+                </a:solidFill>
+                <a:latin typeface="Arial"/>
+              </a:rPr>
+              <a:t>Acervo, doações e exposições unificados.</a:t>
             </a:r>
           </a:p>
           <a:p>
             <a:pPr>
               <a:spcAft>
-                <a:spcPts val="1200"/>
+                <a:spcPts val="1600"/>
               </a:spcAft>
-              <a:defRPr sz="1450" b="1" i="0">
-                <a:solidFill>
-                  <a:srgbClr val="1E823C"/>
-                </a:solidFill>
-                <a:latin typeface="Arial"/>
-              </a:defRPr>
             </a:pPr>
             <a:r>
-              <a:t>•  Etapas de Desenvolvimento:</a:t>
+              <a:rPr sz="1400" b="1">
+                <a:solidFill>
+                  <a:srgbClr val="B41E1E"/>
+                </a:solidFill>
+                <a:latin typeface="Arial"/>
+              </a:rPr>
+              <a:t>•  </a:t>
+            </a:r>
+            <a:r>
+              <a:rPr sz="1400" b="1">
+                <a:solidFill>
+                  <a:srgbClr val="B41E1E"/>
+                </a:solidFill>
+                <a:latin typeface="Arial"/>
+              </a:rPr>
+              <a:t>Anomalia de Inserção: </a:t>
+            </a:r>
+            <a:r>
+              <a:rPr sz="1400" b="0">
+                <a:solidFill>
+                  <a:srgbClr val="141414"/>
+                </a:solidFill>
+                <a:latin typeface="Arial"/>
+              </a:rPr>
+              <a:t>Impossível cadastrar doador sem item do acervo.</a:t>
             </a:r>
           </a:p>
           <a:p>
             <a:pPr>
               <a:spcAft>
-                <a:spcPts val="1200"/>
+                <a:spcPts val="1600"/>
               </a:spcAft>
-              <a:defRPr sz="1450" b="0" i="0">
+            </a:pPr>
+            <a:r>
+              <a:rPr sz="1400" b="1">
+                <a:solidFill>
+                  <a:srgbClr val="B41E1E"/>
+                </a:solidFill>
+                <a:latin typeface="Arial"/>
+              </a:rPr>
+              <a:t>•  </a:t>
+            </a:r>
+            <a:r>
+              <a:rPr sz="1400" b="1">
+                <a:solidFill>
+                  <a:srgbClr val="B41E1E"/>
+                </a:solidFill>
+                <a:latin typeface="Arial"/>
+              </a:rPr>
+              <a:t>Anomalia de Exclusão: </a:t>
+            </a:r>
+            <a:r>
+              <a:rPr sz="1400" b="0">
                 <a:solidFill>
                   <a:srgbClr val="141414"/>
                 </a:solidFill>
                 <a:latin typeface="Arial"/>
-              </a:defRPr>
-            </a:pPr>
-            <a:r>
-              <a:t>•    - Modelagem e implementação do fluxo de trabalho.</a:t>
+              </a:rPr>
+              <a:t>Cancelar exposição apaga o item do acervo.</a:t>
             </a:r>
           </a:p>
           <a:p>
             <a:pPr>
               <a:spcAft>
-                <a:spcPts val="1200"/>
+                <a:spcPts val="1600"/>
               </a:spcAft>
-              <a:defRPr sz="1450" b="0" i="0">
+            </a:pPr>
+            <a:r>
+              <a:rPr sz="1400" b="1">
+                <a:solidFill>
+                  <a:srgbClr val="B41E1E"/>
+                </a:solidFill>
+                <a:latin typeface="Arial"/>
+              </a:rPr>
+              <a:t>•  </a:t>
+            </a:r>
+            <a:r>
+              <a:rPr sz="1400" b="1">
+                <a:solidFill>
+                  <a:srgbClr val="B41E1E"/>
+                </a:solidFill>
+                <a:latin typeface="Arial"/>
+              </a:rPr>
+              <a:t>Anomalia de Alteração: </a:t>
+            </a:r>
+            <a:r>
+              <a:rPr sz="1400" b="0">
                 <a:solidFill>
                   <a:srgbClr val="141414"/>
                 </a:solidFill>
                 <a:latin typeface="Arial"/>
-              </a:defRPr>
-            </a:pPr>
-            <a:r>
-              <a:t>•    - Testes de validação e verificação de consistência.</a:t>
-            </a:r>
-          </a:p>
-          <a:p>
-            <a:pPr>
-              <a:spcAft>
-                <a:spcPts val="1200"/>
-              </a:spcAft>
-              <a:defRPr sz="1450" b="1" i="0">
-                <a:solidFill>
-                  <a:srgbClr val="1E823C"/>
-                </a:solidFill>
-                <a:latin typeface="Arial"/>
-              </a:defRPr>
-            </a:pPr>
-            <a:r>
-              <a:t>•  Critérios de Avaliação: Métricas adotadas para validar o desempenho dos resultados.</a:t>
-            </a:r>
-          </a:p>
-        </p:txBody>
-      </p:sp>
-      <p:sp>
-        <p:nvSpPr>
-          <p:cNvPr id="5" name="Rounded Rectangle 4"/>
+              </a:rPr>
+              <a:t>Atualização repetida de dados do doador.</a:t>
+            </a:r>
+          </a:p>
+        </p:txBody>
+      </p:sp>
+      <p:sp>
+        <p:nvSpPr>
+          <p:cNvPr id="13" name="Rounded Rectangle 12"/>
           <p:cNvSpPr/>
           <p:nvPr/>
         </p:nvSpPr>
         <p:spPr>
           <a:xfrm>
-            <a:off x="5888736" y="722376"/>
-            <a:ext cx="6172200" cy="5596128"/>
+            <a:off x="5943600" y="722376"/>
+            <a:ext cx="5806440" cy="5532120"/>
           </a:xfrm>
           <a:prstGeom prst="roundRect">
             <a:avLst>
@@ -3950,14 +5466,14 @@
       </p:sp>
       <p:sp>
         <p:nvSpPr>
-          <p:cNvPr id="6" name="TextBox 5"/>
+          <p:cNvPr id="14" name="TextBox 13"/>
           <p:cNvSpPr txBox="1"/>
           <p:nvPr/>
         </p:nvSpPr>
         <p:spPr>
           <a:xfrm>
-            <a:off x="7379208" y="804672"/>
-            <a:ext cx="3566160" cy="274320"/>
+            <a:off x="5989320" y="777240"/>
+            <a:ext cx="5715000" cy="274320"/>
           </a:xfrm>
           <a:prstGeom prst="rect">
             <a:avLst/>
@@ -3972,35 +5488,35 @@
           <a:p>
             <a:pPr algn="ctr"/>
             <a:r>
-              <a:rPr sz="1200" b="1">
-                <a:solidFill>
-                  <a:srgbClr val="141414"/>
-                </a:solidFill>
-                <a:latin typeface="Arial"/>
-              </a:rPr>
-              <a:t>Figura 2 - Instrumentação / Espectrógrafo</a:t>
+              <a:rPr sz="1100" b="1">
+                <a:solidFill>
+                  <a:srgbClr val="1E823C"/>
+                </a:solidFill>
+                <a:latin typeface="Arial"/>
+              </a:rPr>
+              <a:t>Figura 2 - Relação Universal 0FN</a:t>
             </a:r>
           </a:p>
         </p:txBody>
       </p:sp>
       <p:pic>
         <p:nvPicPr>
-          <p:cNvPr id="7" name="Picture 6" descr="espectografo.png"/>
+          <p:cNvPr id="15" name="Picture 14" descr="figura2_cenario_0fn.png"/>
           <p:cNvPicPr>
             <a:picLocks noChangeAspect="1"/>
           </p:cNvPicPr>
           <p:nvPr/>
         </p:nvPicPr>
         <p:blipFill>
-          <a:blip r:embed="rId2"/>
+          <a:blip r:embed="rId5"/>
           <a:stretch>
             <a:fillRect/>
           </a:stretch>
         </p:blipFill>
         <p:spPr>
           <a:xfrm>
-            <a:off x="6025896" y="1078992"/>
-            <a:ext cx="5897880" cy="4718304"/>
+            <a:off x="6035040" y="1097280"/>
+            <a:ext cx="5623560" cy="4754880"/>
           </a:xfrm>
           <a:prstGeom prst="rect">
             <a:avLst/>
@@ -4009,14 +5525,14 @@
       </p:pic>
       <p:sp>
         <p:nvSpPr>
-          <p:cNvPr id="8" name="TextBox 7"/>
+          <p:cNvPr id="16" name="TextBox 15"/>
           <p:cNvSpPr txBox="1"/>
           <p:nvPr/>
         </p:nvSpPr>
         <p:spPr>
           <a:xfrm>
-            <a:off x="7562088" y="5907024"/>
-            <a:ext cx="2916936" cy="402336"/>
+            <a:off x="5989320" y="5897880"/>
+            <a:ext cx="5715000" cy="274320"/>
           </a:xfrm>
           <a:prstGeom prst="rect">
             <a:avLst/>
@@ -4031,26 +5547,13 @@
           <a:p>
             <a:pPr algn="ctr"/>
             <a:r>
-              <a:rPr sz="1000" i="0">
+              <a:rPr sz="900">
                 <a:solidFill>
                   <a:srgbClr val="5A5A5A"/>
                 </a:solidFill>
                 <a:latin typeface="Arial"/>
               </a:rPr>
-              <a:t>Fonte: Laboratório de Física/Automação (2026)</a:t>
-            </a:r>
-          </a:p>
-          <a:p>
-            <a:pPr algn="ctr"/>
-            <a:r>
-              <a:rPr sz="1050" b="1">
-                <a:solidFill>
-                  <a:srgbClr val="1E823C"/>
-                </a:solidFill>
-                <a:latin typeface="Arial"/>
-                <a:hlinkClick r:id="rId3"/>
-              </a:rPr>
-              <a:t>Documento Técnico | Relatório do Trabalho</a:t>
+              <a:t>Fonte: Baseado no Sistema Centro de Memória</a:t>
             </a:r>
           </a:p>
         </p:txBody>
@@ -4078,13 +5581,80 @@
       <p:grpSpPr/>
       <p:sp>
         <p:nvSpPr>
-          <p:cNvPr id="2" name="TextBox 1"/>
+          <p:cNvPr id="2" name="Rectangle 1"/>
+          <p:cNvSpPr/>
+          <p:nvPr/>
+        </p:nvSpPr>
+        <p:spPr>
+          <a:xfrm>
+            <a:off x="0" y="0"/>
+            <a:ext cx="12191999" cy="6858000"/>
+          </a:xfrm>
+          <a:prstGeom prst="rect">
+            <a:avLst/>
+          </a:prstGeom>
+          <a:solidFill>
+            <a:srgbClr val="FFFFFF"/>
+          </a:solidFill>
+          <a:ln>
+            <a:noFill/>
+          </a:ln>
+        </p:spPr>
+        <p:style>
+          <a:lnRef idx="1">
+            <a:schemeClr val="accent1"/>
+          </a:lnRef>
+          <a:fillRef idx="3">
+            <a:schemeClr val="accent1"/>
+          </a:fillRef>
+          <a:effectRef idx="2">
+            <a:schemeClr val="accent1"/>
+          </a:effectRef>
+          <a:fontRef idx="minor">
+            <a:schemeClr val="lt1"/>
+          </a:fontRef>
+        </p:style>
+        <p:txBody>
+          <a:bodyPr rtlCol="0" anchor="ctr"/>
+          <a:lstStyle/>
+          <a:p>
+            <a:pPr algn="ctr"/>
+          </a:p>
+        </p:txBody>
+      </p:sp>
+      <p:pic>
+        <p:nvPicPr>
+          <p:cNvPr id="3" name="Picture 2" descr="logo_iff_crop.png"/>
+          <p:cNvPicPr>
+            <a:picLocks noChangeAspect="1"/>
+          </p:cNvPicPr>
+          <p:nvPr/>
+        </p:nvPicPr>
+        <p:blipFill>
+          <a:blip r:embed="rId2"/>
+          <a:stretch>
+            <a:fillRect/>
+          </a:stretch>
+        </p:blipFill>
+        <p:spPr>
+          <a:xfrm>
+            <a:off x="365760" y="73152"/>
+            <a:ext cx="1395412" cy="384048"/>
+          </a:xfrm>
+          <a:prstGeom prst="rect">
+            <a:avLst/>
+          </a:prstGeom>
+        </p:spPr>
+      </p:pic>
+      <p:sp>
+        <p:nvSpPr>
+          <p:cNvPr id="4" name="TextBox 3"/>
           <p:cNvSpPr txBox="1"/>
           <p:nvPr/>
         </p:nvSpPr>
         <p:spPr>
           <a:xfrm>
-            <a:off x="2450592" y="27432"/>
+            <a:off x="2331720" y="27432"/>
             <a:ext cx="4389120" cy="475488"/>
           </a:xfrm>
           <a:prstGeom prst="rect">
@@ -4099,7 +5669,7 @@
           <a:lstStyle/>
           <a:p>
             <a:r>
-              <a:rPr sz="2200" b="0">
+              <a:rPr sz="2000" b="0">
                 <a:solidFill>
                   <a:srgbClr val="5A5A5A"/>
                 </a:solidFill>
@@ -4108,27 +5678,27 @@
               <a:t> |   </a:t>
             </a:r>
             <a:r>
-              <a:rPr sz="2400" b="1">
+              <a:rPr sz="2000" b="1">
                 <a:solidFill>
                   <a:srgbClr val="141414"/>
                 </a:solidFill>
                 <a:latin typeface="Arial"/>
               </a:rPr>
-              <a:t>Resultados</a:t>
-            </a:r>
-          </a:p>
-        </p:txBody>
-      </p:sp>
-      <p:sp>
-        <p:nvSpPr>
-          <p:cNvPr id="3" name="TextBox 2"/>
+              <a:t>1ª FN</a:t>
+            </a:r>
+          </a:p>
+        </p:txBody>
+      </p:sp>
+      <p:sp>
+        <p:nvSpPr>
+          <p:cNvPr id="5" name="TextBox 4"/>
           <p:cNvSpPr txBox="1"/>
           <p:nvPr/>
         </p:nvSpPr>
         <p:spPr>
           <a:xfrm>
-            <a:off x="548640" y="658368"/>
-            <a:ext cx="4937760" cy="457200"/>
+            <a:off x="5852160" y="73152"/>
+            <a:ext cx="5943600" cy="365760"/>
           </a:xfrm>
           <a:prstGeom prst="rect">
             <a:avLst/>
@@ -4141,8 +5711,106 @@
           </a:bodyPr>
           <a:lstStyle/>
           <a:p>
+            <a:pPr algn="r"/>
+            <a:r>
+              <a:rPr sz="1300" b="1">
+                <a:solidFill>
+                  <a:srgbClr val="141414"/>
+                </a:solidFill>
+                <a:latin typeface="Arial"/>
+                <a:hlinkClick r:id="rId3"/>
+              </a:rPr>
+              <a:t>Banco de Dados</a:t>
+            </a:r>
+            <a:r>
+              <a:rPr sz="1300">
+                <a:solidFill>
+                  <a:srgbClr val="5A5A5A"/>
+                </a:solidFill>
+                <a:latin typeface="Arial"/>
+              </a:rPr>
+              <a:t>   |   </a:t>
+            </a:r>
+            <a:r>
+              <a:rPr sz="1300" b="1">
+                <a:solidFill>
+                  <a:srgbClr val="1E823C"/>
+                </a:solidFill>
+                <a:latin typeface="Arial"/>
+                <a:hlinkClick r:id="rId4"/>
+              </a:rPr>
+              <a:t>Normalização &amp; DFs</a:t>
+            </a:r>
+          </a:p>
+        </p:txBody>
+      </p:sp>
+      <p:sp>
+        <p:nvSpPr>
+          <p:cNvPr id="6" name="Rectangle 5"/>
+          <p:cNvSpPr/>
+          <p:nvPr/>
+        </p:nvSpPr>
+        <p:spPr>
+          <a:xfrm>
+            <a:off x="0" y="566928"/>
+            <a:ext cx="12191999" cy="13716"/>
+          </a:xfrm>
+          <a:prstGeom prst="rect">
+            <a:avLst/>
+          </a:prstGeom>
+          <a:solidFill>
+            <a:srgbClr val="1E823C"/>
+          </a:solidFill>
+          <a:ln>
+            <a:noFill/>
+          </a:ln>
+        </p:spPr>
+        <p:style>
+          <a:lnRef idx="1">
+            <a:schemeClr val="accent1"/>
+          </a:lnRef>
+          <a:fillRef idx="3">
+            <a:schemeClr val="accent1"/>
+          </a:fillRef>
+          <a:effectRef idx="2">
+            <a:schemeClr val="accent1"/>
+          </a:effectRef>
+          <a:fontRef idx="minor">
+            <a:schemeClr val="lt1"/>
+          </a:fontRef>
+        </p:style>
+        <p:txBody>
+          <a:bodyPr rtlCol="0" anchor="ctr"/>
+          <a:lstStyle/>
+          <a:p>
+            <a:pPr algn="ctr"/>
+          </a:p>
+        </p:txBody>
+      </p:sp>
+      <p:sp>
+        <p:nvSpPr>
+          <p:cNvPr id="7" name="TextBox 6"/>
+          <p:cNvSpPr txBox="1"/>
+          <p:nvPr/>
+        </p:nvSpPr>
+        <p:spPr>
+          <a:xfrm>
+            <a:off x="365760" y="658368"/>
+            <a:ext cx="5303520" cy="457200"/>
+          </a:xfrm>
+          <a:prstGeom prst="rect">
+            <a:avLst/>
+          </a:prstGeom>
+          <a:noFill/>
+        </p:spPr>
+        <p:txBody>
+          <a:bodyPr wrap="none">
+            <a:spAutoFit/>
+          </a:bodyPr>
+          <a:lstStyle/>
+          <a:p>
             <a:pPr>
-              <a:defRPr sz="2000" b="1">
+              <a:defRPr sz="1800" b="1">
                 <a:solidFill>
                   <a:srgbClr val="1E823C"/>
                 </a:solidFill>
@@ -4150,21 +5818,64 @@
               </a:defRPr>
             </a:pPr>
             <a:r>
-              <a:t>Resultados Obtidos e Discussão</a:t>
-            </a:r>
-          </a:p>
-        </p:txBody>
-      </p:sp>
-      <p:sp>
-        <p:nvSpPr>
-          <p:cNvPr id="4" name="TextBox 3"/>
+              <a:t>Primeira Forma Normal (1FN) --- Atomicidade</a:t>
+            </a:r>
+          </a:p>
+        </p:txBody>
+      </p:sp>
+      <p:sp>
+        <p:nvSpPr>
+          <p:cNvPr id="8" name="Rectangle 7"/>
+          <p:cNvSpPr/>
+          <p:nvPr/>
+        </p:nvSpPr>
+        <p:spPr>
+          <a:xfrm>
+            <a:off x="0" y="6400800"/>
+            <a:ext cx="12191999" cy="13716"/>
+          </a:xfrm>
+          <a:prstGeom prst="rect">
+            <a:avLst/>
+          </a:prstGeom>
+          <a:solidFill>
+            <a:srgbClr val="1E823C"/>
+          </a:solidFill>
+          <a:ln>
+            <a:noFill/>
+          </a:ln>
+        </p:spPr>
+        <p:style>
+          <a:lnRef idx="1">
+            <a:schemeClr val="accent1"/>
+          </a:lnRef>
+          <a:fillRef idx="3">
+            <a:schemeClr val="accent1"/>
+          </a:fillRef>
+          <a:effectRef idx="2">
+            <a:schemeClr val="accent1"/>
+          </a:effectRef>
+          <a:fontRef idx="minor">
+            <a:schemeClr val="lt1"/>
+          </a:fontRef>
+        </p:style>
+        <p:txBody>
+          <a:bodyPr rtlCol="0" anchor="ctr"/>
+          <a:lstStyle/>
+          <a:p>
+            <a:pPr algn="ctr"/>
+          </a:p>
+        </p:txBody>
+      </p:sp>
+      <p:sp>
+        <p:nvSpPr>
+          <p:cNvPr id="9" name="TextBox 8"/>
           <p:cNvSpPr txBox="1"/>
           <p:nvPr/>
         </p:nvSpPr>
         <p:spPr>
           <a:xfrm>
-            <a:off x="502920" y="1188720"/>
-            <a:ext cx="4983480" cy="5120640"/>
+            <a:off x="365760" y="6446520"/>
+            <a:ext cx="4114800" cy="320040"/>
           </a:xfrm>
           <a:prstGeom prst="rect">
             <a:avLst/>
@@ -4172,70 +5883,288 @@
           <a:noFill/>
         </p:spPr>
         <p:txBody>
-          <a:bodyPr wrap="square">
+          <a:bodyPr wrap="none">
             <a:spAutoFit/>
           </a:bodyPr>
           <a:lstStyle/>
           <a:p>
+            <a:r>
+              <a:rPr sz="1000" b="1">
+                <a:solidFill>
+                  <a:srgbClr val="000000"/>
+                </a:solidFill>
+                <a:latin typeface="Arial"/>
+              </a:rPr>
+              <a:t>de Andrade, P. H. R.; Luiz, B.; Salles, I.</a:t>
+            </a:r>
+          </a:p>
+        </p:txBody>
+      </p:sp>
+      <p:sp>
+        <p:nvSpPr>
+          <p:cNvPr id="10" name="TextBox 9"/>
+          <p:cNvSpPr txBox="1"/>
+          <p:nvPr/>
+        </p:nvSpPr>
+        <p:spPr>
+          <a:xfrm>
+            <a:off x="4114800" y="6446520"/>
+            <a:ext cx="4572000" cy="320040"/>
+          </a:xfrm>
+          <a:prstGeom prst="rect">
+            <a:avLst/>
+          </a:prstGeom>
+          <a:noFill/>
+        </p:spPr>
+        <p:txBody>
+          <a:bodyPr wrap="none">
+            <a:spAutoFit/>
+          </a:bodyPr>
+          <a:lstStyle/>
+          <a:p>
+            <a:pPr algn="ctr"/>
+            <a:r>
+              <a:rPr sz="1000" b="1">
+                <a:solidFill>
+                  <a:srgbClr val="141414"/>
+                </a:solidFill>
+                <a:latin typeface="Arial"/>
+                <a:hlinkClick r:id="rId4"/>
+              </a:rPr>
+              <a:t>Normalização &amp; Dependências Funcionais</a:t>
+            </a:r>
+          </a:p>
+        </p:txBody>
+      </p:sp>
+      <p:sp>
+        <p:nvSpPr>
+          <p:cNvPr id="11" name="TextBox 10"/>
+          <p:cNvSpPr txBox="1"/>
+          <p:nvPr/>
+        </p:nvSpPr>
+        <p:spPr>
+          <a:xfrm>
+            <a:off x="9326880" y="6446520"/>
+            <a:ext cx="2468880" cy="320040"/>
+          </a:xfrm>
+          <a:prstGeom prst="rect">
+            <a:avLst/>
+          </a:prstGeom>
+          <a:noFill/>
+        </p:spPr>
+        <p:txBody>
+          <a:bodyPr wrap="none">
+            <a:spAutoFit/>
+          </a:bodyPr>
+          <a:lstStyle/>
+          <a:p>
+            <a:pPr algn="r"/>
+            <a:r>
+              <a:rPr sz="1000" b="1">
+                <a:solidFill>
+                  <a:srgbClr val="141414"/>
+                </a:solidFill>
+                <a:latin typeface="Arial"/>
+              </a:rPr>
+              <a:t>5 / 11</a:t>
+            </a:r>
+          </a:p>
+        </p:txBody>
+      </p:sp>
+      <p:sp>
+        <p:nvSpPr>
+          <p:cNvPr id="12" name="TextBox 11"/>
+          <p:cNvSpPr txBox="1"/>
+          <p:nvPr/>
+        </p:nvSpPr>
+        <p:spPr>
+          <a:xfrm>
+            <a:off x="457200" y="1188720"/>
+            <a:ext cx="5120640" cy="5029200"/>
+          </a:xfrm>
+          <a:prstGeom prst="rect">
+            <a:avLst/>
+          </a:prstGeom>
+          <a:noFill/>
+        </p:spPr>
+        <p:txBody>
+          <a:bodyPr wrap="square" lIns="0" rIns="0" tIns="0" bIns="0">
+            <a:spAutoFit/>
+          </a:bodyPr>
+          <a:lstStyle/>
+          <a:p>
             <a:pPr>
               <a:spcAft>
-                <a:spcPts val="1200"/>
+                <a:spcPts val="1600"/>
               </a:spcAft>
-              <a:defRPr sz="1450" b="1" i="0">
+            </a:pPr>
+            <a:r>
+              <a:rPr sz="1400" b="1">
                 <a:solidFill>
                   <a:srgbClr val="1E823C"/>
                 </a:solidFill>
                 <a:latin typeface="Arial"/>
-              </a:defRPr>
-            </a:pPr>
-            <a:r>
-              <a:t>•  Análise Quantitativa: Demonstração dos dados obtidos nas simulações e experimentos.</a:t>
+              </a:rPr>
+              <a:t>•  </a:t>
+            </a:r>
+            <a:r>
+              <a:rPr sz="1400" b="1">
+                <a:solidFill>
+                  <a:srgbClr val="1E823C"/>
+                </a:solidFill>
+                <a:latin typeface="Arial"/>
+              </a:rPr>
+              <a:t>Regra da 1FN: </a:t>
+            </a:r>
+            <a:r>
+              <a:rPr sz="1400" b="0">
+                <a:solidFill>
+                  <a:srgbClr val="141414"/>
+                </a:solidFill>
+                <a:latin typeface="Arial"/>
+              </a:rPr>
+              <a:t>Atributos estritamente atômicos.</a:t>
             </a:r>
           </a:p>
           <a:p>
             <a:pPr>
               <a:spcAft>
-                <a:spcPts val="1200"/>
+                <a:spcPts val="1600"/>
               </a:spcAft>
-              <a:defRPr sz="1450" b="1" i="0">
-                <a:solidFill>
-                  <a:srgbClr val="1E823C"/>
-                </a:solidFill>
-                <a:latin typeface="Arial"/>
-              </a:defRPr>
             </a:pPr>
             <a:r>
-              <a:t>•  Conformidade com a Teoria: Aderência dos resultados práticos aos modelos estudados em aula.</a:t>
+              <a:rPr sz="1400" b="1">
+                <a:solidFill>
+                  <a:srgbClr val="B41E1E"/>
+                </a:solidFill>
+                <a:latin typeface="Arial"/>
+              </a:rPr>
+              <a:t>•  </a:t>
+            </a:r>
+            <a:r>
+              <a:rPr sz="1400" b="1">
+                <a:solidFill>
+                  <a:srgbClr val="B41E1E"/>
+                </a:solidFill>
+                <a:latin typeface="Arial"/>
+              </a:rPr>
+              <a:t>Problema (0FN): </a:t>
+            </a:r>
+            <a:r>
+              <a:rPr sz="1400" b="0">
+                <a:solidFill>
+                  <a:srgbClr val="141414"/>
+                </a:solidFill>
+                <a:latin typeface="Arial"/>
+              </a:rPr>
+              <a:t>palavras_chave agrupadas na mesma célula.</a:t>
             </a:r>
           </a:p>
           <a:p>
             <a:pPr>
               <a:spcAft>
-                <a:spcPts val="1200"/>
+                <a:spcPts val="400"/>
               </a:spcAft>
-              <a:defRPr sz="1450" b="1" i="0">
-                <a:solidFill>
-                  <a:srgbClr val="B41E1E"/>
-                </a:solidFill>
-                <a:latin typeface="Arial"/>
-              </a:defRPr>
             </a:pPr>
             <a:r>
-              <a:t>•  Casos de Borda e Limitações: Discussão sobre divergências e pontos de melhoria futura.</a:t>
-            </a:r>
-          </a:p>
-        </p:txBody>
-      </p:sp>
-      <p:sp>
-        <p:nvSpPr>
-          <p:cNvPr id="5" name="Rounded Rectangle 4"/>
+              <a:rPr sz="1400" b="1">
+                <a:solidFill>
+                  <a:srgbClr val="1E823C"/>
+                </a:solidFill>
+                <a:latin typeface="Arial"/>
+              </a:rPr>
+              <a:t>•  </a:t>
+            </a:r>
+            <a:r>
+              <a:rPr sz="1400" b="1">
+                <a:solidFill>
+                  <a:srgbClr val="1E823C"/>
+                </a:solidFill>
+                <a:latin typeface="Arial"/>
+              </a:rPr>
+              <a:t>Decomposição: </a:t>
+            </a:r>
+            <a:r>
+              <a:rPr sz="1400" b="0">
+                <a:solidFill>
+                  <a:srgbClr val="141414"/>
+                </a:solidFill>
+                <a:latin typeface="Arial"/>
+              </a:rPr>
+              <a:t>Extração para tabela associativa:</a:t>
+            </a:r>
+          </a:p>
+          <a:p>
+            <a:pPr>
+              <a:spcAft>
+                <a:spcPts val="400"/>
+              </a:spcAft>
+            </a:pPr>
+            <a:r>
+              <a:rPr sz="1200" b="1">
+                <a:solidFill>
+                  <a:srgbClr val="1E823C"/>
+                </a:solidFill>
+                <a:latin typeface="Arial"/>
+              </a:rPr>
+              <a:t>     ↳  </a:t>
+            </a:r>
+            <a:r>
+              <a:rPr sz="1200" b="0">
+                <a:solidFill>
+                  <a:srgbClr val="141414"/>
+                </a:solidFill>
+                <a:latin typeface="Arial"/>
+              </a:rPr>
+              <a:t>Item_PalavraChave(cod_tombo, palavra_chave)</a:t>
+            </a:r>
+          </a:p>
+          <a:p>
+            <a:pPr>
+              <a:spcAft>
+                <a:spcPts val="1600"/>
+              </a:spcAft>
+            </a:pPr>
+            <a:r>
+              <a:rPr sz="1400" b="1">
+                <a:solidFill>
+                  <a:srgbClr val="141414"/>
+                </a:solidFill>
+                <a:latin typeface="Arial"/>
+              </a:rPr>
+              <a:t>•  </a:t>
+            </a:r>
+            <a:r>
+              <a:rPr sz="1400" b="1">
+                <a:solidFill>
+                  <a:srgbClr val="141414"/>
+                </a:solidFill>
+                <a:latin typeface="Arial"/>
+              </a:rPr>
+              <a:t>Benefício: </a:t>
+            </a:r>
+            <a:r>
+              <a:rPr sz="1400" b="0">
+                <a:solidFill>
+                  <a:srgbClr val="141414"/>
+                </a:solidFill>
+                <a:latin typeface="Arial"/>
+              </a:rPr>
+              <a:t>Atomicidade e facilidade de indexação.</a:t>
+            </a:r>
+          </a:p>
+        </p:txBody>
+      </p:sp>
+      <p:sp>
+        <p:nvSpPr>
+          <p:cNvPr id="13" name="Rounded Rectangle 12"/>
           <p:cNvSpPr/>
           <p:nvPr/>
         </p:nvSpPr>
         <p:spPr>
           <a:xfrm>
-            <a:off x="5888736" y="722376"/>
-            <a:ext cx="6172200" cy="5596128"/>
+            <a:off x="5943600" y="722376"/>
+            <a:ext cx="5806440" cy="5532120"/>
           </a:xfrm>
           <a:prstGeom prst="roundRect">
             <a:avLst>
@@ -4275,14 +6204,14 @@
       </p:sp>
       <p:sp>
         <p:nvSpPr>
-          <p:cNvPr id="6" name="TextBox 5"/>
+          <p:cNvPr id="14" name="TextBox 13"/>
           <p:cNvSpPr txBox="1"/>
           <p:nvPr/>
         </p:nvSpPr>
         <p:spPr>
           <a:xfrm>
-            <a:off x="7379208" y="804672"/>
-            <a:ext cx="3566160" cy="274320"/>
+            <a:off x="5989320" y="777240"/>
+            <a:ext cx="5715000" cy="274320"/>
           </a:xfrm>
           <a:prstGeom prst="rect">
             <a:avLst/>
@@ -4297,35 +6226,35 @@
           <a:p>
             <a:pPr algn="ctr"/>
             <a:r>
-              <a:rPr sz="1200" b="1">
-                <a:solidFill>
-                  <a:srgbClr val="141414"/>
-                </a:solidFill>
-                <a:latin typeface="Arial"/>
-              </a:rPr>
-              <a:t>Figura 3 - Distribuição de Parâmetros Analisados</a:t>
+              <a:rPr sz="1100" b="1">
+                <a:solidFill>
+                  <a:srgbClr val="1E823C"/>
+                </a:solidFill>
+                <a:latin typeface="Arial"/>
+              </a:rPr>
+              <a:t>Figura 3 - Transição para 1FN e 2FN</a:t>
             </a:r>
           </a:p>
         </p:txBody>
       </p:sp>
       <p:pic>
         <p:nvPicPr>
-          <p:cNvPr id="7" name="Picture 6" descr="TCC_Kiel_Demonstracao.png"/>
+          <p:cNvPr id="15" name="Picture 14" descr="figura3_decomposicao_1fn_2fn.png"/>
           <p:cNvPicPr>
             <a:picLocks noChangeAspect="1"/>
           </p:cNvPicPr>
           <p:nvPr/>
         </p:nvPicPr>
         <p:blipFill>
-          <a:blip r:embed="rId2"/>
+          <a:blip r:embed="rId5"/>
           <a:stretch>
             <a:fillRect/>
           </a:stretch>
         </p:blipFill>
         <p:spPr>
           <a:xfrm>
-            <a:off x="6025896" y="1078992"/>
-            <a:ext cx="5897880" cy="4718304"/>
+            <a:off x="6035040" y="1097280"/>
+            <a:ext cx="5623560" cy="4754880"/>
           </a:xfrm>
           <a:prstGeom prst="rect">
             <a:avLst/>
@@ -4334,14 +6263,14 @@
       </p:pic>
       <p:sp>
         <p:nvSpPr>
-          <p:cNvPr id="8" name="TextBox 7"/>
+          <p:cNvPr id="16" name="TextBox 15"/>
           <p:cNvSpPr txBox="1"/>
           <p:nvPr/>
         </p:nvSpPr>
         <p:spPr>
           <a:xfrm>
-            <a:off x="7562088" y="5907024"/>
-            <a:ext cx="2916936" cy="402336"/>
+            <a:off x="5989320" y="5897880"/>
+            <a:ext cx="5715000" cy="274320"/>
           </a:xfrm>
           <a:prstGeom prst="rect">
             <a:avLst/>
@@ -4356,26 +6285,13 @@
           <a:p>
             <a:pPr algn="ctr"/>
             <a:r>
-              <a:rPr sz="1000" i="0">
+              <a:rPr sz="900">
                 <a:solidFill>
                   <a:srgbClr val="5A5A5A"/>
                 </a:solidFill>
                 <a:latin typeface="Arial"/>
               </a:rPr>
-              <a:t>Fonte: Resultados dos Autores (2026)</a:t>
-            </a:r>
-          </a:p>
-          <a:p>
-            <a:pPr algn="ctr"/>
-            <a:r>
-              <a:rPr sz="1050" b="1">
-                <a:solidFill>
-                  <a:srgbClr val="1E823C"/>
-                </a:solidFill>
-                <a:latin typeface="Arial"/>
-                <a:hlinkClick r:id="rId3"/>
-              </a:rPr>
-              <a:t>Documento Técnico | Relatório do Trabalho</a:t>
+              <a:t>Fonte: Elaboração dos Autores (2026)</a:t>
             </a:r>
           </a:p>
         </p:txBody>
@@ -4403,13 +6319,80 @@
       <p:grpSpPr/>
       <p:sp>
         <p:nvSpPr>
-          <p:cNvPr id="2" name="TextBox 1"/>
+          <p:cNvPr id="2" name="Rectangle 1"/>
+          <p:cNvSpPr/>
+          <p:nvPr/>
+        </p:nvSpPr>
+        <p:spPr>
+          <a:xfrm>
+            <a:off x="0" y="0"/>
+            <a:ext cx="12191999" cy="6858000"/>
+          </a:xfrm>
+          <a:prstGeom prst="rect">
+            <a:avLst/>
+          </a:prstGeom>
+          <a:solidFill>
+            <a:srgbClr val="FFFFFF"/>
+          </a:solidFill>
+          <a:ln>
+            <a:noFill/>
+          </a:ln>
+        </p:spPr>
+        <p:style>
+          <a:lnRef idx="1">
+            <a:schemeClr val="accent1"/>
+          </a:lnRef>
+          <a:fillRef idx="3">
+            <a:schemeClr val="accent1"/>
+          </a:fillRef>
+          <a:effectRef idx="2">
+            <a:schemeClr val="accent1"/>
+          </a:effectRef>
+          <a:fontRef idx="minor">
+            <a:schemeClr val="lt1"/>
+          </a:fontRef>
+        </p:style>
+        <p:txBody>
+          <a:bodyPr rtlCol="0" anchor="ctr"/>
+          <a:lstStyle/>
+          <a:p>
+            <a:pPr algn="ctr"/>
+          </a:p>
+        </p:txBody>
+      </p:sp>
+      <p:pic>
+        <p:nvPicPr>
+          <p:cNvPr id="3" name="Picture 2" descr="logo_iff_crop.png"/>
+          <p:cNvPicPr>
+            <a:picLocks noChangeAspect="1"/>
+          </p:cNvPicPr>
+          <p:nvPr/>
+        </p:nvPicPr>
+        <p:blipFill>
+          <a:blip r:embed="rId2"/>
+          <a:stretch>
+            <a:fillRect/>
+          </a:stretch>
+        </p:blipFill>
+        <p:spPr>
+          <a:xfrm>
+            <a:off x="365760" y="73152"/>
+            <a:ext cx="1395412" cy="384048"/>
+          </a:xfrm>
+          <a:prstGeom prst="rect">
+            <a:avLst/>
+          </a:prstGeom>
+        </p:spPr>
+      </p:pic>
+      <p:sp>
+        <p:nvSpPr>
+          <p:cNvPr id="4" name="TextBox 3"/>
           <p:cNvSpPr txBox="1"/>
           <p:nvPr/>
         </p:nvSpPr>
         <p:spPr>
           <a:xfrm>
-            <a:off x="2450592" y="27432"/>
+            <a:off x="2331720" y="27432"/>
             <a:ext cx="4389120" cy="475488"/>
           </a:xfrm>
           <a:prstGeom prst="rect">
@@ -4424,7 +6407,7 @@
           <a:lstStyle/>
           <a:p>
             <a:r>
-              <a:rPr sz="2200" b="0">
+              <a:rPr sz="2000" b="0">
                 <a:solidFill>
                   <a:srgbClr val="5A5A5A"/>
                 </a:solidFill>
@@ -4433,27 +6416,27 @@
               <a:t> |   </a:t>
             </a:r>
             <a:r>
-              <a:rPr sz="2400" b="1">
+              <a:rPr sz="2000" b="1">
                 <a:solidFill>
                   <a:srgbClr val="141414"/>
                 </a:solidFill>
                 <a:latin typeface="Arial"/>
               </a:rPr>
-              <a:t>Conclusões</a:t>
-            </a:r>
-          </a:p>
-        </p:txBody>
-      </p:sp>
-      <p:sp>
-        <p:nvSpPr>
-          <p:cNvPr id="3" name="TextBox 2"/>
+              <a:t>2ª FN</a:t>
+            </a:r>
+          </a:p>
+        </p:txBody>
+      </p:sp>
+      <p:sp>
+        <p:nvSpPr>
+          <p:cNvPr id="5" name="TextBox 4"/>
           <p:cNvSpPr txBox="1"/>
           <p:nvPr/>
         </p:nvSpPr>
         <p:spPr>
           <a:xfrm>
-            <a:off x="548640" y="658368"/>
-            <a:ext cx="4937760" cy="457200"/>
+            <a:off x="5852160" y="73152"/>
+            <a:ext cx="5943600" cy="365760"/>
           </a:xfrm>
           <a:prstGeom prst="rect">
             <a:avLst/>
@@ -4466,8 +6449,106 @@
           </a:bodyPr>
           <a:lstStyle/>
           <a:p>
+            <a:pPr algn="r"/>
+            <a:r>
+              <a:rPr sz="1300" b="1">
+                <a:solidFill>
+                  <a:srgbClr val="141414"/>
+                </a:solidFill>
+                <a:latin typeface="Arial"/>
+                <a:hlinkClick r:id="rId3"/>
+              </a:rPr>
+              <a:t>Banco de Dados</a:t>
+            </a:r>
+            <a:r>
+              <a:rPr sz="1300">
+                <a:solidFill>
+                  <a:srgbClr val="5A5A5A"/>
+                </a:solidFill>
+                <a:latin typeface="Arial"/>
+              </a:rPr>
+              <a:t>   |   </a:t>
+            </a:r>
+            <a:r>
+              <a:rPr sz="1300" b="1">
+                <a:solidFill>
+                  <a:srgbClr val="1E823C"/>
+                </a:solidFill>
+                <a:latin typeface="Arial"/>
+                <a:hlinkClick r:id="rId4"/>
+              </a:rPr>
+              <a:t>Normalização &amp; DFs</a:t>
+            </a:r>
+          </a:p>
+        </p:txBody>
+      </p:sp>
+      <p:sp>
+        <p:nvSpPr>
+          <p:cNvPr id="6" name="Rectangle 5"/>
+          <p:cNvSpPr/>
+          <p:nvPr/>
+        </p:nvSpPr>
+        <p:spPr>
+          <a:xfrm>
+            <a:off x="0" y="566928"/>
+            <a:ext cx="12191999" cy="13716"/>
+          </a:xfrm>
+          <a:prstGeom prst="rect">
+            <a:avLst/>
+          </a:prstGeom>
+          <a:solidFill>
+            <a:srgbClr val="1E823C"/>
+          </a:solidFill>
+          <a:ln>
+            <a:noFill/>
+          </a:ln>
+        </p:spPr>
+        <p:style>
+          <a:lnRef idx="1">
+            <a:schemeClr val="accent1"/>
+          </a:lnRef>
+          <a:fillRef idx="3">
+            <a:schemeClr val="accent1"/>
+          </a:fillRef>
+          <a:effectRef idx="2">
+            <a:schemeClr val="accent1"/>
+          </a:effectRef>
+          <a:fontRef idx="minor">
+            <a:schemeClr val="lt1"/>
+          </a:fontRef>
+        </p:style>
+        <p:txBody>
+          <a:bodyPr rtlCol="0" anchor="ctr"/>
+          <a:lstStyle/>
+          <a:p>
+            <a:pPr algn="ctr"/>
+          </a:p>
+        </p:txBody>
+      </p:sp>
+      <p:sp>
+        <p:nvSpPr>
+          <p:cNvPr id="7" name="TextBox 6"/>
+          <p:cNvSpPr txBox="1"/>
+          <p:nvPr/>
+        </p:nvSpPr>
+        <p:spPr>
+          <a:xfrm>
+            <a:off x="365760" y="658368"/>
+            <a:ext cx="5303520" cy="457200"/>
+          </a:xfrm>
+          <a:prstGeom prst="rect">
+            <a:avLst/>
+          </a:prstGeom>
+          <a:noFill/>
+        </p:spPr>
+        <p:txBody>
+          <a:bodyPr wrap="none">
+            <a:spAutoFit/>
+          </a:bodyPr>
+          <a:lstStyle/>
+          <a:p>
             <a:pPr>
-              <a:defRPr sz="2000" b="1">
+              <a:defRPr sz="1800" b="1">
                 <a:solidFill>
                   <a:srgbClr val="1E823C"/>
                 </a:solidFill>
@@ -4475,21 +6556,64 @@
               </a:defRPr>
             </a:pPr>
             <a:r>
-              <a:t>Considerações Finais</a:t>
-            </a:r>
-          </a:p>
-        </p:txBody>
-      </p:sp>
-      <p:sp>
-        <p:nvSpPr>
-          <p:cNvPr id="4" name="TextBox 3"/>
+              <a:t>Segunda Forma Normal (2FN) --- Dependência Total</a:t>
+            </a:r>
+          </a:p>
+        </p:txBody>
+      </p:sp>
+      <p:sp>
+        <p:nvSpPr>
+          <p:cNvPr id="8" name="Rectangle 7"/>
+          <p:cNvSpPr/>
+          <p:nvPr/>
+        </p:nvSpPr>
+        <p:spPr>
+          <a:xfrm>
+            <a:off x="0" y="6400800"/>
+            <a:ext cx="12191999" cy="13716"/>
+          </a:xfrm>
+          <a:prstGeom prst="rect">
+            <a:avLst/>
+          </a:prstGeom>
+          <a:solidFill>
+            <a:srgbClr val="1E823C"/>
+          </a:solidFill>
+          <a:ln>
+            <a:noFill/>
+          </a:ln>
+        </p:spPr>
+        <p:style>
+          <a:lnRef idx="1">
+            <a:schemeClr val="accent1"/>
+          </a:lnRef>
+          <a:fillRef idx="3">
+            <a:schemeClr val="accent1"/>
+          </a:fillRef>
+          <a:effectRef idx="2">
+            <a:schemeClr val="accent1"/>
+          </a:effectRef>
+          <a:fontRef idx="minor">
+            <a:schemeClr val="lt1"/>
+          </a:fontRef>
+        </p:style>
+        <p:txBody>
+          <a:bodyPr rtlCol="0" anchor="ctr"/>
+          <a:lstStyle/>
+          <a:p>
+            <a:pPr algn="ctr"/>
+          </a:p>
+        </p:txBody>
+      </p:sp>
+      <p:sp>
+        <p:nvSpPr>
+          <p:cNvPr id="9" name="TextBox 8"/>
           <p:cNvSpPr txBox="1"/>
           <p:nvPr/>
         </p:nvSpPr>
         <p:spPr>
           <a:xfrm>
-            <a:off x="502920" y="1188720"/>
-            <a:ext cx="4983480" cy="5120640"/>
+            <a:off x="365760" y="6446520"/>
+            <a:ext cx="4114800" cy="320040"/>
           </a:xfrm>
           <a:prstGeom prst="rect">
             <a:avLst/>
@@ -4497,70 +6621,329 @@
           <a:noFill/>
         </p:spPr>
         <p:txBody>
-          <a:bodyPr wrap="square">
+          <a:bodyPr wrap="none">
             <a:spAutoFit/>
           </a:bodyPr>
           <a:lstStyle/>
           <a:p>
+            <a:r>
+              <a:rPr sz="1000" b="1">
+                <a:solidFill>
+                  <a:srgbClr val="000000"/>
+                </a:solidFill>
+                <a:latin typeface="Arial"/>
+              </a:rPr>
+              <a:t>de Andrade, P. H. R.; Luiz, B.; Salles, I.</a:t>
+            </a:r>
+          </a:p>
+        </p:txBody>
+      </p:sp>
+      <p:sp>
+        <p:nvSpPr>
+          <p:cNvPr id="10" name="TextBox 9"/>
+          <p:cNvSpPr txBox="1"/>
+          <p:nvPr/>
+        </p:nvSpPr>
+        <p:spPr>
+          <a:xfrm>
+            <a:off x="4114800" y="6446520"/>
+            <a:ext cx="4572000" cy="320040"/>
+          </a:xfrm>
+          <a:prstGeom prst="rect">
+            <a:avLst/>
+          </a:prstGeom>
+          <a:noFill/>
+        </p:spPr>
+        <p:txBody>
+          <a:bodyPr wrap="none">
+            <a:spAutoFit/>
+          </a:bodyPr>
+          <a:lstStyle/>
+          <a:p>
+            <a:pPr algn="ctr"/>
+            <a:r>
+              <a:rPr sz="1000" b="1">
+                <a:solidFill>
+                  <a:srgbClr val="141414"/>
+                </a:solidFill>
+                <a:latin typeface="Arial"/>
+                <a:hlinkClick r:id="rId4"/>
+              </a:rPr>
+              <a:t>Normalização &amp; Dependências Funcionais</a:t>
+            </a:r>
+          </a:p>
+        </p:txBody>
+      </p:sp>
+      <p:sp>
+        <p:nvSpPr>
+          <p:cNvPr id="11" name="TextBox 10"/>
+          <p:cNvSpPr txBox="1"/>
+          <p:nvPr/>
+        </p:nvSpPr>
+        <p:spPr>
+          <a:xfrm>
+            <a:off x="9326880" y="6446520"/>
+            <a:ext cx="2468880" cy="320040"/>
+          </a:xfrm>
+          <a:prstGeom prst="rect">
+            <a:avLst/>
+          </a:prstGeom>
+          <a:noFill/>
+        </p:spPr>
+        <p:txBody>
+          <a:bodyPr wrap="none">
+            <a:spAutoFit/>
+          </a:bodyPr>
+          <a:lstStyle/>
+          <a:p>
+            <a:pPr algn="r"/>
+            <a:r>
+              <a:rPr sz="1000" b="1">
+                <a:solidFill>
+                  <a:srgbClr val="141414"/>
+                </a:solidFill>
+                <a:latin typeface="Arial"/>
+              </a:rPr>
+              <a:t>6 / 11</a:t>
+            </a:r>
+          </a:p>
+        </p:txBody>
+      </p:sp>
+      <p:sp>
+        <p:nvSpPr>
+          <p:cNvPr id="12" name="TextBox 11"/>
+          <p:cNvSpPr txBox="1"/>
+          <p:nvPr/>
+        </p:nvSpPr>
+        <p:spPr>
+          <a:xfrm>
+            <a:off x="457200" y="1188720"/>
+            <a:ext cx="5120640" cy="5029200"/>
+          </a:xfrm>
+          <a:prstGeom prst="rect">
+            <a:avLst/>
+          </a:prstGeom>
+          <a:noFill/>
+        </p:spPr>
+        <p:txBody>
+          <a:bodyPr wrap="square" lIns="0" rIns="0" tIns="0" bIns="0">
+            <a:spAutoFit/>
+          </a:bodyPr>
+          <a:lstStyle/>
+          <a:p>
             <a:pPr>
               <a:spcAft>
-                <a:spcPts val="1200"/>
+                <a:spcPts val="1600"/>
               </a:spcAft>
-              <a:defRPr sz="1450" b="1" i="0">
+            </a:pPr>
+            <a:r>
+              <a:rPr sz="1400" b="1">
                 <a:solidFill>
                   <a:srgbClr val="1E823C"/>
                 </a:solidFill>
                 <a:latin typeface="Arial"/>
-              </a:defRPr>
-            </a:pPr>
-            <a:r>
-              <a:t>•  Síntese dos Achados: Cumprimento integral dos objetivos definidos no início do projeto.</a:t>
+              </a:rPr>
+              <a:t>•  </a:t>
+            </a:r>
+            <a:r>
+              <a:rPr sz="1400" b="1">
+                <a:solidFill>
+                  <a:srgbClr val="1E823C"/>
+                </a:solidFill>
+                <a:latin typeface="Arial"/>
+              </a:rPr>
+              <a:t>Regra da 2FN: </a:t>
+            </a:r>
+            <a:r>
+              <a:rPr sz="1400" b="0">
+                <a:solidFill>
+                  <a:srgbClr val="141414"/>
+                </a:solidFill>
+                <a:latin typeface="Arial"/>
+              </a:rPr>
+              <a:t>Estar na 1FN e sem dependências parciais.</a:t>
             </a:r>
           </a:p>
           <a:p>
             <a:pPr>
               <a:spcAft>
-                <a:spcPts val="1200"/>
+                <a:spcPts val="1600"/>
               </a:spcAft>
-              <a:defRPr sz="1450" b="1" i="0">
-                <a:solidFill>
-                  <a:srgbClr val="1E823C"/>
-                </a:solidFill>
-                <a:latin typeface="Arial"/>
-              </a:defRPr>
             </a:pPr>
             <a:r>
-              <a:t>•  Contribuição para a Formação: Consolidação prática dos conteúdos lecionados na disciplina.</a:t>
+              <a:rPr sz="1400" b="1">
+                <a:solidFill>
+                  <a:srgbClr val="B41E1E"/>
+                </a:solidFill>
+                <a:latin typeface="Arial"/>
+              </a:rPr>
+              <a:t>•  </a:t>
+            </a:r>
+            <a:r>
+              <a:rPr sz="1400" b="1">
+                <a:solidFill>
+                  <a:srgbClr val="B41E1E"/>
+                </a:solidFill>
+                <a:latin typeface="Arial"/>
+              </a:rPr>
+              <a:t>Problema: </a:t>
+            </a:r>
+            <a:r>
+              <a:rPr sz="1400" b="0">
+                <a:solidFill>
+                  <a:srgbClr val="141414"/>
+                </a:solidFill>
+                <a:latin typeface="Arial"/>
+              </a:rPr>
+              <a:t>Título depende só de cod_tombo em chave composta.</a:t>
             </a:r>
           </a:p>
           <a:p>
             <a:pPr>
               <a:spcAft>
-                <a:spcPts val="1200"/>
+                <a:spcPts val="400"/>
               </a:spcAft>
-              <a:defRPr sz="1450" b="1" i="0">
-                <a:solidFill>
-                  <a:srgbClr val="B41E1E"/>
-                </a:solidFill>
-                <a:latin typeface="Arial"/>
-              </a:defRPr>
             </a:pPr>
             <a:r>
-              <a:t>•  Trabalhos Futuros: Extensão do modelo para novos conjuntos de dados e aplicações.</a:t>
-            </a:r>
-          </a:p>
-        </p:txBody>
-      </p:sp>
-      <p:sp>
-        <p:nvSpPr>
-          <p:cNvPr id="5" name="Rounded Rectangle 4"/>
+              <a:rPr sz="1400" b="1">
+                <a:solidFill>
+                  <a:srgbClr val="1E823C"/>
+                </a:solidFill>
+                <a:latin typeface="Arial"/>
+              </a:rPr>
+              <a:t>•  </a:t>
+            </a:r>
+            <a:r>
+              <a:rPr sz="1400" b="1">
+                <a:solidFill>
+                  <a:srgbClr val="1E823C"/>
+                </a:solidFill>
+                <a:latin typeface="Arial"/>
+              </a:rPr>
+              <a:t>Decomposição 2FN: </a:t>
+            </a:r>
+          </a:p>
+          <a:p>
+            <a:pPr>
+              <a:spcAft>
+                <a:spcPts val="400"/>
+              </a:spcAft>
+            </a:pPr>
+            <a:r>
+              <a:rPr sz="1200" b="1">
+                <a:solidFill>
+                  <a:srgbClr val="1E823C"/>
+                </a:solidFill>
+                <a:latin typeface="Arial"/>
+              </a:rPr>
+              <a:t>     ↳  </a:t>
+            </a:r>
+            <a:r>
+              <a:rPr sz="1200" b="0">
+                <a:solidFill>
+                  <a:srgbClr val="141414"/>
+                </a:solidFill>
+                <a:latin typeface="Arial"/>
+              </a:rPr>
+              <a:t>Exposicao(codigo_exposicao, titulo, ...)</a:t>
+            </a:r>
+          </a:p>
+          <a:p>
+            <a:pPr>
+              <a:spcAft>
+                <a:spcPts val="400"/>
+              </a:spcAft>
+            </a:pPr>
+            <a:r>
+              <a:rPr sz="1200" b="1">
+                <a:solidFill>
+                  <a:srgbClr val="1E823C"/>
+                </a:solidFill>
+                <a:latin typeface="Arial"/>
+              </a:rPr>
+              <a:t>     ↳  </a:t>
+            </a:r>
+            <a:r>
+              <a:rPr sz="1200" b="0">
+                <a:solidFill>
+                  <a:srgbClr val="141414"/>
+                </a:solidFill>
+                <a:latin typeface="Arial"/>
+              </a:rPr>
+              <a:t>Item_Acervo(cod_tombo, titulo, ...)</a:t>
+            </a:r>
+          </a:p>
+          <a:p>
+            <a:pPr>
+              <a:spcAft>
+                <a:spcPts val="400"/>
+              </a:spcAft>
+            </a:pPr>
+            <a:r>
+              <a:rPr sz="1200" b="1">
+                <a:solidFill>
+                  <a:srgbClr val="1E823C"/>
+                </a:solidFill>
+                <a:latin typeface="Arial"/>
+              </a:rPr>
+              <a:t>     ↳  </a:t>
+            </a:r>
+            <a:r>
+              <a:rPr sz="1200" b="0">
+                <a:solidFill>
+                  <a:srgbClr val="141414"/>
+                </a:solidFill>
+                <a:latin typeface="Arial"/>
+              </a:rPr>
+              <a:t>Item_Exposicao(cod_exp, cod_tombo, pos)</a:t>
+            </a:r>
+          </a:p>
+          <a:p>
+            <a:pPr>
+              <a:spcAft>
+                <a:spcPts val="1600"/>
+              </a:spcAft>
+            </a:pPr>
+            <a:r>
+              <a:rPr sz="1400" b="1">
+                <a:solidFill>
+                  <a:srgbClr val="141414"/>
+                </a:solidFill>
+                <a:latin typeface="Arial"/>
+              </a:rPr>
+              <a:t>•  </a:t>
+            </a:r>
+            <a:r>
+              <a:rPr sz="1400" b="1">
+                <a:solidFill>
+                  <a:srgbClr val="141414"/>
+                </a:solidFill>
+                <a:latin typeface="Arial"/>
+              </a:rPr>
+              <a:t>Garantia: </a:t>
+            </a:r>
+            <a:r>
+              <a:rPr sz="1400" b="0">
+                <a:solidFill>
+                  <a:srgbClr val="141414"/>
+                </a:solidFill>
+                <a:latin typeface="Arial"/>
+              </a:rPr>
+              <a:t>Atributos dependem da chave primária completa.</a:t>
+            </a:r>
+          </a:p>
+        </p:txBody>
+      </p:sp>
+      <p:sp>
+        <p:nvSpPr>
+          <p:cNvPr id="13" name="Rounded Rectangle 12"/>
           <p:cNvSpPr/>
           <p:nvPr/>
         </p:nvSpPr>
         <p:spPr>
           <a:xfrm>
-            <a:off x="5888736" y="722376"/>
-            <a:ext cx="6172200" cy="5596128"/>
+            <a:off x="5943600" y="722376"/>
+            <a:ext cx="5806440" cy="5532120"/>
           </a:xfrm>
           <a:prstGeom prst="roundRect">
             <a:avLst>
@@ -4600,14 +6983,14 @@
       </p:sp>
       <p:sp>
         <p:nvSpPr>
-          <p:cNvPr id="6" name="TextBox 5"/>
+          <p:cNvPr id="14" name="TextBox 13"/>
           <p:cNvSpPr txBox="1"/>
           <p:nvPr/>
         </p:nvSpPr>
         <p:spPr>
           <a:xfrm>
-            <a:off x="7379208" y="804672"/>
-            <a:ext cx="3566160" cy="274320"/>
+            <a:off x="5989320" y="777240"/>
+            <a:ext cx="5715000" cy="274320"/>
           </a:xfrm>
           <a:prstGeom prst="rect">
             <a:avLst/>
@@ -4622,35 +7005,35 @@
           <a:p>
             <a:pPr algn="ctr"/>
             <a:r>
-              <a:rPr sz="1200" b="1">
-                <a:solidFill>
-                  <a:srgbClr val="141414"/>
-                </a:solidFill>
-                <a:latin typeface="Arial"/>
-              </a:rPr>
-              <a:t>Figura 4 - Diagrama Conceitual Final</a:t>
+              <a:rPr sz="1100" b="1">
+                <a:solidFill>
+                  <a:srgbClr val="1E823C"/>
+                </a:solidFill>
+                <a:latin typeface="Arial"/>
+              </a:rPr>
+              <a:t>Figura 3 - Eliminação de DFs Parciais</a:t>
             </a:r>
           </a:p>
         </p:txBody>
       </p:sp>
       <p:pic>
         <p:nvPicPr>
-          <p:cNvPr id="7" name="Picture 6" descr="diagramaHR.jpg"/>
+          <p:cNvPr id="15" name="Picture 14" descr="figura3_decomposicao_1fn_2fn.png"/>
           <p:cNvPicPr>
             <a:picLocks noChangeAspect="1"/>
           </p:cNvPicPr>
           <p:nvPr/>
         </p:nvPicPr>
         <p:blipFill>
-          <a:blip r:embed="rId2"/>
+          <a:blip r:embed="rId5"/>
           <a:stretch>
             <a:fillRect/>
           </a:stretch>
         </p:blipFill>
         <p:spPr>
           <a:xfrm>
-            <a:off x="6025896" y="1078992"/>
-            <a:ext cx="5897880" cy="4718304"/>
+            <a:off x="6035040" y="1097280"/>
+            <a:ext cx="5623560" cy="4754880"/>
           </a:xfrm>
           <a:prstGeom prst="rect">
             <a:avLst/>
@@ -4659,14 +7042,14 @@
       </p:pic>
       <p:sp>
         <p:nvSpPr>
-          <p:cNvPr id="8" name="TextBox 7"/>
+          <p:cNvPr id="16" name="TextBox 15"/>
           <p:cNvSpPr txBox="1"/>
           <p:nvPr/>
         </p:nvSpPr>
         <p:spPr>
           <a:xfrm>
-            <a:off x="7562088" y="5907024"/>
-            <a:ext cx="2916936" cy="402336"/>
+            <a:off x="5989320" y="5897880"/>
+            <a:ext cx="5715000" cy="274320"/>
           </a:xfrm>
           <a:prstGeom prst="rect">
             <a:avLst/>
@@ -4681,26 +7064,13 @@
           <a:p>
             <a:pPr algn="ctr"/>
             <a:r>
-              <a:rPr sz="1000" i="0">
+              <a:rPr sz="900">
                 <a:solidFill>
                   <a:srgbClr val="5A5A5A"/>
                 </a:solidFill>
                 <a:latin typeface="Arial"/>
               </a:rPr>
               <a:t>Fonte: Elaboração dos Autores (2026)</a:t>
-            </a:r>
-          </a:p>
-          <a:p>
-            <a:pPr algn="ctr"/>
-            <a:r>
-              <a:rPr sz="1050" b="1">
-                <a:solidFill>
-                  <a:srgbClr val="1E823C"/>
-                </a:solidFill>
-                <a:latin typeface="Arial"/>
-                <a:hlinkClick r:id="rId3"/>
-              </a:rPr>
-              <a:t>Documento Técnico | Relatório do Trabalho</a:t>
             </a:r>
           </a:p>
         </p:txBody>
@@ -4769,69 +7139,9 @@
           </a:p>
         </p:txBody>
       </p:sp>
-      <p:sp>
-        <p:nvSpPr>
-          <p:cNvPr id="3" name="TextBox 2"/>
-          <p:cNvSpPr txBox="1"/>
-          <p:nvPr/>
-        </p:nvSpPr>
-        <p:spPr>
-          <a:xfrm>
-            <a:off x="731520" y="137160"/>
-            <a:ext cx="10728959" cy="1188720"/>
-          </a:xfrm>
-          <a:prstGeom prst="rect">
-            <a:avLst/>
-          </a:prstGeom>
-          <a:noFill/>
-        </p:spPr>
-        <p:txBody>
-          <a:bodyPr wrap="square">
-            <a:spAutoFit/>
-          </a:bodyPr>
-          <a:lstStyle/>
-          <a:p>
-            <a:pPr algn="ctr"/>
-            <a:r>
-              <a:rPr sz="3200" b="1">
-                <a:solidFill>
-                  <a:srgbClr val="1E823C"/>
-                </a:solidFill>
-                <a:latin typeface="Arial"/>
-              </a:rPr>
-              <a:t>Obrigado!</a:t>
-            </a:r>
-            <a:r>
-              <a:rPr sz="1800" b="1">
-                <a:solidFill>
-                  <a:srgbClr val="1E823C"/>
-                </a:solidFill>
-                <a:latin typeface="Arial"/>
-              </a:rPr>
-              <a:t>   —   Perguntas &amp; Discussão</a:t>
-            </a:r>
-          </a:p>
-          <a:p>
-            <a:pPr algn="ctr">
-              <a:spcBef>
-                <a:spcPts val="200"/>
-              </a:spcBef>
-            </a:pPr>
-            <a:r>
-              <a:rPr sz="1300" b="1">
-                <a:solidFill>
-                  <a:srgbClr val="1E823C"/>
-                </a:solidFill>
-                <a:latin typeface="Arial"/>
-              </a:rPr>
-              <a:t>Contatos: pedroiff0@gmail.com  |  ana.soja@iff.edu.br  |  maria.dantas@iff.edu.br</a:t>
-            </a:r>
-          </a:p>
-        </p:txBody>
-      </p:sp>
       <p:pic>
         <p:nvPicPr>
-          <p:cNvPr id="4" name="Picture 3" descr="qrcode_iff.png"/>
+          <p:cNvPr id="3" name="Picture 2" descr="logo_iff_crop.png"/>
           <p:cNvPicPr>
             <a:picLocks noChangeAspect="1"/>
           </p:cNvPicPr>
@@ -4845,8 +7155,8 @@
         </p:blipFill>
         <p:spPr>
           <a:xfrm>
-            <a:off x="3535679" y="1188720"/>
-            <a:ext cx="5120640" cy="5115425"/>
+            <a:off x="365760" y="73152"/>
+            <a:ext cx="1395412" cy="384048"/>
           </a:xfrm>
           <a:prstGeom prst="rect">
             <a:avLst/>
@@ -4855,14 +7165,14 @@
       </p:pic>
       <p:sp>
         <p:nvSpPr>
-          <p:cNvPr id="5" name="TextBox 4"/>
+          <p:cNvPr id="4" name="TextBox 3"/>
           <p:cNvSpPr txBox="1"/>
           <p:nvPr/>
         </p:nvSpPr>
         <p:spPr>
           <a:xfrm>
-            <a:off x="731520" y="6263640"/>
-            <a:ext cx="10728959" cy="320040"/>
+            <a:off x="2331720" y="27432"/>
+            <a:ext cx="4389120" cy="475488"/>
           </a:xfrm>
           <a:prstGeom prst="rect">
             <a:avLst/>
@@ -4875,16 +7185,646 @@
           </a:bodyPr>
           <a:lstStyle/>
           <a:p>
+            <a:r>
+              <a:rPr sz="2000" b="0">
+                <a:solidFill>
+                  <a:srgbClr val="5A5A5A"/>
+                </a:solidFill>
+                <a:latin typeface="Arial"/>
+              </a:rPr>
+              <a:t> |   </a:t>
+            </a:r>
+            <a:r>
+              <a:rPr sz="2000" b="1">
+                <a:solidFill>
+                  <a:srgbClr val="141414"/>
+                </a:solidFill>
+                <a:latin typeface="Arial"/>
+              </a:rPr>
+              <a:t>3ª FN</a:t>
+            </a:r>
+          </a:p>
+        </p:txBody>
+      </p:sp>
+      <p:sp>
+        <p:nvSpPr>
+          <p:cNvPr id="5" name="TextBox 4"/>
+          <p:cNvSpPr txBox="1"/>
+          <p:nvPr/>
+        </p:nvSpPr>
+        <p:spPr>
+          <a:xfrm>
+            <a:off x="5852160" y="73152"/>
+            <a:ext cx="5943600" cy="365760"/>
+          </a:xfrm>
+          <a:prstGeom prst="rect">
+            <a:avLst/>
+          </a:prstGeom>
+          <a:noFill/>
+        </p:spPr>
+        <p:txBody>
+          <a:bodyPr wrap="none">
+            <a:spAutoFit/>
+          </a:bodyPr>
+          <a:lstStyle/>
+          <a:p>
+            <a:pPr algn="r"/>
+            <a:r>
+              <a:rPr sz="1300" b="1">
+                <a:solidFill>
+                  <a:srgbClr val="141414"/>
+                </a:solidFill>
+                <a:latin typeface="Arial"/>
+                <a:hlinkClick r:id="rId3"/>
+              </a:rPr>
+              <a:t>Banco de Dados</a:t>
+            </a:r>
+            <a:r>
+              <a:rPr sz="1300">
+                <a:solidFill>
+                  <a:srgbClr val="5A5A5A"/>
+                </a:solidFill>
+                <a:latin typeface="Arial"/>
+              </a:rPr>
+              <a:t>   |   </a:t>
+            </a:r>
+            <a:r>
+              <a:rPr sz="1300" b="1">
+                <a:solidFill>
+                  <a:srgbClr val="1E823C"/>
+                </a:solidFill>
+                <a:latin typeface="Arial"/>
+                <a:hlinkClick r:id="rId4"/>
+              </a:rPr>
+              <a:t>Normalização &amp; DFs</a:t>
+            </a:r>
+          </a:p>
+        </p:txBody>
+      </p:sp>
+      <p:sp>
+        <p:nvSpPr>
+          <p:cNvPr id="6" name="Rectangle 5"/>
+          <p:cNvSpPr/>
+          <p:nvPr/>
+        </p:nvSpPr>
+        <p:spPr>
+          <a:xfrm>
+            <a:off x="0" y="566928"/>
+            <a:ext cx="12191999" cy="13716"/>
+          </a:xfrm>
+          <a:prstGeom prst="rect">
+            <a:avLst/>
+          </a:prstGeom>
+          <a:solidFill>
+            <a:srgbClr val="1E823C"/>
+          </a:solidFill>
+          <a:ln>
+            <a:noFill/>
+          </a:ln>
+        </p:spPr>
+        <p:style>
+          <a:lnRef idx="1">
+            <a:schemeClr val="accent1"/>
+          </a:lnRef>
+          <a:fillRef idx="3">
+            <a:schemeClr val="accent1"/>
+          </a:fillRef>
+          <a:effectRef idx="2">
+            <a:schemeClr val="accent1"/>
+          </a:effectRef>
+          <a:fontRef idx="minor">
+            <a:schemeClr val="lt1"/>
+          </a:fontRef>
+        </p:style>
+        <p:txBody>
+          <a:bodyPr rtlCol="0" anchor="ctr"/>
+          <a:lstStyle/>
+          <a:p>
             <a:pPr algn="ctr"/>
-            <a:r>
-              <a:rPr sz="1250" b="1">
+          </a:p>
+        </p:txBody>
+      </p:sp>
+      <p:sp>
+        <p:nvSpPr>
+          <p:cNvPr id="7" name="TextBox 6"/>
+          <p:cNvSpPr txBox="1"/>
+          <p:nvPr/>
+        </p:nvSpPr>
+        <p:spPr>
+          <a:xfrm>
+            <a:off x="365760" y="658368"/>
+            <a:ext cx="5303520" cy="457200"/>
+          </a:xfrm>
+          <a:prstGeom prst="rect">
+            <a:avLst/>
+          </a:prstGeom>
+          <a:noFill/>
+        </p:spPr>
+        <p:txBody>
+          <a:bodyPr wrap="none">
+            <a:spAutoFit/>
+          </a:bodyPr>
+          <a:lstStyle/>
+          <a:p>
+            <a:pPr>
+              <a:defRPr sz="1800" b="1">
                 <a:solidFill>
                   <a:srgbClr val="1E823C"/>
                 </a:solidFill>
                 <a:latin typeface="Arial"/>
-                <a:hlinkClick r:id="rId3"/>
-              </a:rPr>
-              <a:t>https://www.phrandrade.com/pt-br/resource/engenharia-de-computacao/</a:t>
+              </a:defRPr>
+            </a:pPr>
+            <a:r>
+              <a:t>Terceira Forma Normal (3FN) --- Sem DFs Transitivas</a:t>
+            </a:r>
+          </a:p>
+        </p:txBody>
+      </p:sp>
+      <p:sp>
+        <p:nvSpPr>
+          <p:cNvPr id="8" name="Rectangle 7"/>
+          <p:cNvSpPr/>
+          <p:nvPr/>
+        </p:nvSpPr>
+        <p:spPr>
+          <a:xfrm>
+            <a:off x="0" y="6400800"/>
+            <a:ext cx="12191999" cy="13716"/>
+          </a:xfrm>
+          <a:prstGeom prst="rect">
+            <a:avLst/>
+          </a:prstGeom>
+          <a:solidFill>
+            <a:srgbClr val="1E823C"/>
+          </a:solidFill>
+          <a:ln>
+            <a:noFill/>
+          </a:ln>
+        </p:spPr>
+        <p:style>
+          <a:lnRef idx="1">
+            <a:schemeClr val="accent1"/>
+          </a:lnRef>
+          <a:fillRef idx="3">
+            <a:schemeClr val="accent1"/>
+          </a:fillRef>
+          <a:effectRef idx="2">
+            <a:schemeClr val="accent1"/>
+          </a:effectRef>
+          <a:fontRef idx="minor">
+            <a:schemeClr val="lt1"/>
+          </a:fontRef>
+        </p:style>
+        <p:txBody>
+          <a:bodyPr rtlCol="0" anchor="ctr"/>
+          <a:lstStyle/>
+          <a:p>
+            <a:pPr algn="ctr"/>
+          </a:p>
+        </p:txBody>
+      </p:sp>
+      <p:sp>
+        <p:nvSpPr>
+          <p:cNvPr id="9" name="TextBox 8"/>
+          <p:cNvSpPr txBox="1"/>
+          <p:nvPr/>
+        </p:nvSpPr>
+        <p:spPr>
+          <a:xfrm>
+            <a:off x="365760" y="6446520"/>
+            <a:ext cx="4114800" cy="320040"/>
+          </a:xfrm>
+          <a:prstGeom prst="rect">
+            <a:avLst/>
+          </a:prstGeom>
+          <a:noFill/>
+        </p:spPr>
+        <p:txBody>
+          <a:bodyPr wrap="none">
+            <a:spAutoFit/>
+          </a:bodyPr>
+          <a:lstStyle/>
+          <a:p>
+            <a:r>
+              <a:rPr sz="1000" b="1">
+                <a:solidFill>
+                  <a:srgbClr val="000000"/>
+                </a:solidFill>
+                <a:latin typeface="Arial"/>
+              </a:rPr>
+              <a:t>de Andrade, P. H. R.; Luiz, B.; Salles, I.</a:t>
+            </a:r>
+          </a:p>
+        </p:txBody>
+      </p:sp>
+      <p:sp>
+        <p:nvSpPr>
+          <p:cNvPr id="10" name="TextBox 9"/>
+          <p:cNvSpPr txBox="1"/>
+          <p:nvPr/>
+        </p:nvSpPr>
+        <p:spPr>
+          <a:xfrm>
+            <a:off x="4114800" y="6446520"/>
+            <a:ext cx="4572000" cy="320040"/>
+          </a:xfrm>
+          <a:prstGeom prst="rect">
+            <a:avLst/>
+          </a:prstGeom>
+          <a:noFill/>
+        </p:spPr>
+        <p:txBody>
+          <a:bodyPr wrap="none">
+            <a:spAutoFit/>
+          </a:bodyPr>
+          <a:lstStyle/>
+          <a:p>
+            <a:pPr algn="ctr"/>
+            <a:r>
+              <a:rPr sz="1000" b="1">
+                <a:solidFill>
+                  <a:srgbClr val="141414"/>
+                </a:solidFill>
+                <a:latin typeface="Arial"/>
+                <a:hlinkClick r:id="rId4"/>
+              </a:rPr>
+              <a:t>Normalização &amp; Dependências Funcionais</a:t>
+            </a:r>
+          </a:p>
+        </p:txBody>
+      </p:sp>
+      <p:sp>
+        <p:nvSpPr>
+          <p:cNvPr id="11" name="TextBox 10"/>
+          <p:cNvSpPr txBox="1"/>
+          <p:nvPr/>
+        </p:nvSpPr>
+        <p:spPr>
+          <a:xfrm>
+            <a:off x="9326880" y="6446520"/>
+            <a:ext cx="2468880" cy="320040"/>
+          </a:xfrm>
+          <a:prstGeom prst="rect">
+            <a:avLst/>
+          </a:prstGeom>
+          <a:noFill/>
+        </p:spPr>
+        <p:txBody>
+          <a:bodyPr wrap="none">
+            <a:spAutoFit/>
+          </a:bodyPr>
+          <a:lstStyle/>
+          <a:p>
+            <a:pPr algn="r"/>
+            <a:r>
+              <a:rPr sz="1000" b="1">
+                <a:solidFill>
+                  <a:srgbClr val="141414"/>
+                </a:solidFill>
+                <a:latin typeface="Arial"/>
+              </a:rPr>
+              <a:t>7 / 11</a:t>
+            </a:r>
+          </a:p>
+        </p:txBody>
+      </p:sp>
+      <p:sp>
+        <p:nvSpPr>
+          <p:cNvPr id="12" name="TextBox 11"/>
+          <p:cNvSpPr txBox="1"/>
+          <p:nvPr/>
+        </p:nvSpPr>
+        <p:spPr>
+          <a:xfrm>
+            <a:off x="457200" y="1188720"/>
+            <a:ext cx="5120640" cy="5029200"/>
+          </a:xfrm>
+          <a:prstGeom prst="rect">
+            <a:avLst/>
+          </a:prstGeom>
+          <a:noFill/>
+        </p:spPr>
+        <p:txBody>
+          <a:bodyPr wrap="square" lIns="0" rIns="0" tIns="0" bIns="0">
+            <a:spAutoFit/>
+          </a:bodyPr>
+          <a:lstStyle/>
+          <a:p>
+            <a:pPr>
+              <a:spcAft>
+                <a:spcPts val="1600"/>
+              </a:spcAft>
+            </a:pPr>
+            <a:r>
+              <a:rPr sz="1400" b="1">
+                <a:solidFill>
+                  <a:srgbClr val="1E823C"/>
+                </a:solidFill>
+                <a:latin typeface="Arial"/>
+              </a:rPr>
+              <a:t>•  </a:t>
+            </a:r>
+            <a:r>
+              <a:rPr sz="1400" b="1">
+                <a:solidFill>
+                  <a:srgbClr val="1E823C"/>
+                </a:solidFill>
+                <a:latin typeface="Arial"/>
+              </a:rPr>
+              <a:t>Regra da 3FN: </a:t>
+            </a:r>
+            <a:r>
+              <a:rPr sz="1400" b="0">
+                <a:solidFill>
+                  <a:srgbClr val="141414"/>
+                </a:solidFill>
+                <a:latin typeface="Arial"/>
+              </a:rPr>
+              <a:t>Estar na 2FN e sem dependências transitivas.</a:t>
+            </a:r>
+          </a:p>
+          <a:p>
+            <a:pPr>
+              <a:spcAft>
+                <a:spcPts val="1600"/>
+              </a:spcAft>
+            </a:pPr>
+            <a:r>
+              <a:rPr sz="1400" b="1">
+                <a:solidFill>
+                  <a:srgbClr val="B41E1E"/>
+                </a:solidFill>
+                <a:latin typeface="Arial"/>
+              </a:rPr>
+              <a:t>•  </a:t>
+            </a:r>
+            <a:r>
+              <a:rPr sz="1400" b="1">
+                <a:solidFill>
+                  <a:srgbClr val="B41E1E"/>
+                </a:solidFill>
+                <a:latin typeface="Arial"/>
+              </a:rPr>
+              <a:t>Problema: </a:t>
+            </a:r>
+            <a:r>
+              <a:rPr sz="1400" b="0">
+                <a:solidFill>
+                  <a:srgbClr val="141414"/>
+                </a:solidFill>
+                <a:latin typeface="Arial"/>
+              </a:rPr>
+              <a:t>cod_tombo → cod_doacao → dados_doador.</a:t>
+            </a:r>
+          </a:p>
+          <a:p>
+            <a:pPr>
+              <a:spcAft>
+                <a:spcPts val="400"/>
+              </a:spcAft>
+            </a:pPr>
+            <a:r>
+              <a:rPr sz="1400" b="1">
+                <a:solidFill>
+                  <a:srgbClr val="1E823C"/>
+                </a:solidFill>
+                <a:latin typeface="Arial"/>
+              </a:rPr>
+              <a:t>•  </a:t>
+            </a:r>
+            <a:r>
+              <a:rPr sz="1400" b="1">
+                <a:solidFill>
+                  <a:srgbClr val="1E823C"/>
+                </a:solidFill>
+                <a:latin typeface="Arial"/>
+              </a:rPr>
+              <a:t>Decomposição 3FN: </a:t>
+            </a:r>
+          </a:p>
+          <a:p>
+            <a:pPr>
+              <a:spcAft>
+                <a:spcPts val="400"/>
+              </a:spcAft>
+            </a:pPr>
+            <a:r>
+              <a:rPr sz="1200" b="1">
+                <a:solidFill>
+                  <a:srgbClr val="1E823C"/>
+                </a:solidFill>
+                <a:latin typeface="Arial"/>
+              </a:rPr>
+              <a:t>     ↳  </a:t>
+            </a:r>
+            <a:r>
+              <a:rPr sz="1200" b="0">
+                <a:solidFill>
+                  <a:srgbClr val="141414"/>
+                </a:solidFill>
+                <a:latin typeface="Arial"/>
+              </a:rPr>
+              <a:t>Doacao(cod_doacao, data, termo, id_doador)</a:t>
+            </a:r>
+          </a:p>
+          <a:p>
+            <a:pPr>
+              <a:spcAft>
+                <a:spcPts val="400"/>
+              </a:spcAft>
+            </a:pPr>
+            <a:r>
+              <a:rPr sz="1200" b="1">
+                <a:solidFill>
+                  <a:srgbClr val="1E823C"/>
+                </a:solidFill>
+                <a:latin typeface="Arial"/>
+              </a:rPr>
+              <a:t>     ↳  </a:t>
+            </a:r>
+            <a:r>
+              <a:rPr sz="1200" b="0">
+                <a:solidFill>
+                  <a:srgbClr val="141414"/>
+                </a:solidFill>
+                <a:latin typeface="Arial"/>
+              </a:rPr>
+              <a:t>Pessoa(id_pessoa, nome, cpf, email, ...)</a:t>
+            </a:r>
+          </a:p>
+          <a:p>
+            <a:pPr>
+              <a:spcAft>
+                <a:spcPts val="1600"/>
+              </a:spcAft>
+            </a:pPr>
+            <a:r>
+              <a:rPr sz="1400" b="1">
+                <a:solidFill>
+                  <a:srgbClr val="141414"/>
+                </a:solidFill>
+                <a:latin typeface="Arial"/>
+              </a:rPr>
+              <a:t>•  </a:t>
+            </a:r>
+            <a:r>
+              <a:rPr sz="1400" b="1">
+                <a:solidFill>
+                  <a:srgbClr val="141414"/>
+                </a:solidFill>
+                <a:latin typeface="Arial"/>
+              </a:rPr>
+              <a:t>Vínculo: </a:t>
+            </a:r>
+            <a:r>
+              <a:rPr sz="1400" b="0">
+                <a:solidFill>
+                  <a:srgbClr val="141414"/>
+                </a:solidFill>
+                <a:latin typeface="Arial"/>
+              </a:rPr>
+              <a:t>Item_Acervo mantém apenas FK cod_doacao.</a:t>
+            </a:r>
+          </a:p>
+        </p:txBody>
+      </p:sp>
+      <p:sp>
+        <p:nvSpPr>
+          <p:cNvPr id="13" name="Rounded Rectangle 12"/>
+          <p:cNvSpPr/>
+          <p:nvPr/>
+        </p:nvSpPr>
+        <p:spPr>
+          <a:xfrm>
+            <a:off x="5943600" y="722376"/>
+            <a:ext cx="5806440" cy="5532120"/>
+          </a:xfrm>
+          <a:prstGeom prst="roundRect">
+            <a:avLst>
+              <a:gd name="adj" fmla="val 3000"/>
+            </a:avLst>
+          </a:prstGeom>
+          <a:solidFill>
+            <a:srgbClr val="F5F5F5"/>
+          </a:solidFill>
+          <a:ln w="12700">
+            <a:solidFill>
+              <a:srgbClr val="1E823C"/>
+            </a:solidFill>
+          </a:ln>
+        </p:spPr>
+        <p:style>
+          <a:lnRef idx="1">
+            <a:schemeClr val="accent1"/>
+          </a:lnRef>
+          <a:fillRef idx="3">
+            <a:schemeClr val="accent1"/>
+          </a:fillRef>
+          <a:effectRef idx="2">
+            <a:schemeClr val="accent1"/>
+          </a:effectRef>
+          <a:fontRef idx="minor">
+            <a:schemeClr val="lt1"/>
+          </a:fontRef>
+        </p:style>
+        <p:txBody>
+          <a:bodyPr rtlCol="0" anchor="ctr"/>
+          <a:lstStyle/>
+          <a:p>
+            <a:pPr algn="ctr"/>
+          </a:p>
+        </p:txBody>
+      </p:sp>
+      <p:sp>
+        <p:nvSpPr>
+          <p:cNvPr id="14" name="TextBox 13"/>
+          <p:cNvSpPr txBox="1"/>
+          <p:nvPr/>
+        </p:nvSpPr>
+        <p:spPr>
+          <a:xfrm>
+            <a:off x="5989320" y="777240"/>
+            <a:ext cx="5715000" cy="274320"/>
+          </a:xfrm>
+          <a:prstGeom prst="rect">
+            <a:avLst/>
+          </a:prstGeom>
+          <a:noFill/>
+        </p:spPr>
+        <p:txBody>
+          <a:bodyPr wrap="none">
+            <a:spAutoFit/>
+          </a:bodyPr>
+          <a:lstStyle/>
+          <a:p>
+            <a:pPr algn="ctr"/>
+            <a:r>
+              <a:rPr sz="1100" b="1">
+                <a:solidFill>
+                  <a:srgbClr val="1E823C"/>
+                </a:solidFill>
+                <a:latin typeface="Arial"/>
+              </a:rPr>
+              <a:t>Figura 4 - Esquema Final em 3FN</a:t>
+            </a:r>
+          </a:p>
+        </p:txBody>
+      </p:sp>
+      <p:pic>
+        <p:nvPicPr>
+          <p:cNvPr id="15" name="Picture 14" descr="figura4_esquema_3fn_final.png"/>
+          <p:cNvPicPr>
+            <a:picLocks noChangeAspect="1"/>
+          </p:cNvPicPr>
+          <p:nvPr/>
+        </p:nvPicPr>
+        <p:blipFill>
+          <a:blip r:embed="rId5"/>
+          <a:stretch>
+            <a:fillRect/>
+          </a:stretch>
+        </p:blipFill>
+        <p:spPr>
+          <a:xfrm>
+            <a:off x="6035040" y="1097280"/>
+            <a:ext cx="5623560" cy="4754880"/>
+          </a:xfrm>
+          <a:prstGeom prst="rect">
+            <a:avLst/>
+          </a:prstGeom>
+        </p:spPr>
+      </p:pic>
+      <p:sp>
+        <p:nvSpPr>
+          <p:cNvPr id="16" name="TextBox 15"/>
+          <p:cNvSpPr txBox="1"/>
+          <p:nvPr/>
+        </p:nvSpPr>
+        <p:spPr>
+          <a:xfrm>
+            <a:off x="5989320" y="5897880"/>
+            <a:ext cx="5715000" cy="274320"/>
+          </a:xfrm>
+          <a:prstGeom prst="rect">
+            <a:avLst/>
+          </a:prstGeom>
+          <a:noFill/>
+        </p:spPr>
+        <p:txBody>
+          <a:bodyPr wrap="none">
+            <a:spAutoFit/>
+          </a:bodyPr>
+          <a:lstStyle/>
+          <a:p>
+            <a:pPr algn="ctr"/>
+            <a:r>
+              <a:rPr sz="900">
+                <a:solidFill>
+                  <a:srgbClr val="5A5A5A"/>
+                </a:solidFill>
+                <a:latin typeface="Arial"/>
+              </a:rPr>
+              <a:t>Fonte: Elaboração dos Autores (2026)</a:t>
             </a:r>
           </a:p>
         </p:txBody>
@@ -4910,9 +7850,52 @@
         <p:nvPr/>
       </p:nvGrpSpPr>
       <p:grpSpPr/>
+      <p:sp>
+        <p:nvSpPr>
+          <p:cNvPr id="2" name="Rectangle 1"/>
+          <p:cNvSpPr/>
+          <p:nvPr/>
+        </p:nvSpPr>
+        <p:spPr>
+          <a:xfrm>
+            <a:off x="0" y="0"/>
+            <a:ext cx="12191999" cy="6858000"/>
+          </a:xfrm>
+          <a:prstGeom prst="rect">
+            <a:avLst/>
+          </a:prstGeom>
+          <a:solidFill>
+            <a:srgbClr val="FFFFFF"/>
+          </a:solidFill>
+          <a:ln>
+            <a:noFill/>
+          </a:ln>
+        </p:spPr>
+        <p:style>
+          <a:lnRef idx="1">
+            <a:schemeClr val="accent1"/>
+          </a:lnRef>
+          <a:fillRef idx="3">
+            <a:schemeClr val="accent1"/>
+          </a:fillRef>
+          <a:effectRef idx="2">
+            <a:schemeClr val="accent1"/>
+          </a:effectRef>
+          <a:fontRef idx="minor">
+            <a:schemeClr val="lt1"/>
+          </a:fontRef>
+        </p:style>
+        <p:txBody>
+          <a:bodyPr rtlCol="0" anchor="ctr"/>
+          <a:lstStyle/>
+          <a:p>
+            <a:pPr algn="ctr"/>
+          </a:p>
+        </p:txBody>
+      </p:sp>
       <p:pic>
         <p:nvPicPr>
-          <p:cNvPr id="2" name="Picture 1" descr="pillars.jpg"/>
+          <p:cNvPr id="3" name="Picture 2" descr="logo_iff_crop.png"/>
           <p:cNvPicPr>
             <a:picLocks noChangeAspect="1"/>
           </p:cNvPicPr>
@@ -4926,14 +7909,1200 @@
         </p:blipFill>
         <p:spPr>
           <a:xfrm>
+            <a:off x="365760" y="73152"/>
+            <a:ext cx="1395412" cy="384048"/>
+          </a:xfrm>
+          <a:prstGeom prst="rect">
+            <a:avLst/>
+          </a:prstGeom>
+        </p:spPr>
+      </p:pic>
+      <p:sp>
+        <p:nvSpPr>
+          <p:cNvPr id="4" name="TextBox 3"/>
+          <p:cNvSpPr txBox="1"/>
+          <p:nvPr/>
+        </p:nvSpPr>
+        <p:spPr>
+          <a:xfrm>
+            <a:off x="2331720" y="27432"/>
+            <a:ext cx="4389120" cy="475488"/>
+          </a:xfrm>
+          <a:prstGeom prst="rect">
+            <a:avLst/>
+          </a:prstGeom>
+          <a:noFill/>
+        </p:spPr>
+        <p:txBody>
+          <a:bodyPr wrap="none">
+            <a:spAutoFit/>
+          </a:bodyPr>
+          <a:lstStyle/>
+          <a:p>
+            <a:r>
+              <a:rPr sz="2000" b="0">
+                <a:solidFill>
+                  <a:srgbClr val="5A5A5A"/>
+                </a:solidFill>
+                <a:latin typeface="Arial"/>
+              </a:rPr>
+              <a:t> |   </a:t>
+            </a:r>
+            <a:r>
+              <a:rPr sz="2000" b="1">
+                <a:solidFill>
+                  <a:srgbClr val="141414"/>
+                </a:solidFill>
+                <a:latin typeface="Arial"/>
+              </a:rPr>
+              <a:t>Conclusões</a:t>
+            </a:r>
+          </a:p>
+        </p:txBody>
+      </p:sp>
+      <p:sp>
+        <p:nvSpPr>
+          <p:cNvPr id="5" name="TextBox 4"/>
+          <p:cNvSpPr txBox="1"/>
+          <p:nvPr/>
+        </p:nvSpPr>
+        <p:spPr>
+          <a:xfrm>
+            <a:off x="5852160" y="73152"/>
+            <a:ext cx="5943600" cy="365760"/>
+          </a:xfrm>
+          <a:prstGeom prst="rect">
+            <a:avLst/>
+          </a:prstGeom>
+          <a:noFill/>
+        </p:spPr>
+        <p:txBody>
+          <a:bodyPr wrap="none">
+            <a:spAutoFit/>
+          </a:bodyPr>
+          <a:lstStyle/>
+          <a:p>
+            <a:pPr algn="r"/>
+            <a:r>
+              <a:rPr sz="1300" b="1">
+                <a:solidFill>
+                  <a:srgbClr val="141414"/>
+                </a:solidFill>
+                <a:latin typeface="Arial"/>
+                <a:hlinkClick r:id="rId3"/>
+              </a:rPr>
+              <a:t>Banco de Dados</a:t>
+            </a:r>
+            <a:r>
+              <a:rPr sz="1300">
+                <a:solidFill>
+                  <a:srgbClr val="5A5A5A"/>
+                </a:solidFill>
+                <a:latin typeface="Arial"/>
+              </a:rPr>
+              <a:t>   |   </a:t>
+            </a:r>
+            <a:r>
+              <a:rPr sz="1300" b="1">
+                <a:solidFill>
+                  <a:srgbClr val="1E823C"/>
+                </a:solidFill>
+                <a:latin typeface="Arial"/>
+                <a:hlinkClick r:id="rId4"/>
+              </a:rPr>
+              <a:t>Normalização &amp; DFs</a:t>
+            </a:r>
+          </a:p>
+        </p:txBody>
+      </p:sp>
+      <p:sp>
+        <p:nvSpPr>
+          <p:cNvPr id="6" name="Rectangle 5"/>
+          <p:cNvSpPr/>
+          <p:nvPr/>
+        </p:nvSpPr>
+        <p:spPr>
+          <a:xfrm>
+            <a:off x="0" y="566928"/>
+            <a:ext cx="12191999" cy="13716"/>
+          </a:xfrm>
+          <a:prstGeom prst="rect">
+            <a:avLst/>
+          </a:prstGeom>
+          <a:solidFill>
+            <a:srgbClr val="1E823C"/>
+          </a:solidFill>
+          <a:ln>
+            <a:noFill/>
+          </a:ln>
+        </p:spPr>
+        <p:style>
+          <a:lnRef idx="1">
+            <a:schemeClr val="accent1"/>
+          </a:lnRef>
+          <a:fillRef idx="3">
+            <a:schemeClr val="accent1"/>
+          </a:fillRef>
+          <a:effectRef idx="2">
+            <a:schemeClr val="accent1"/>
+          </a:effectRef>
+          <a:fontRef idx="minor">
+            <a:schemeClr val="lt1"/>
+          </a:fontRef>
+        </p:style>
+        <p:txBody>
+          <a:bodyPr rtlCol="0" anchor="ctr"/>
+          <a:lstStyle/>
+          <a:p>
+            <a:pPr algn="ctr"/>
+          </a:p>
+        </p:txBody>
+      </p:sp>
+      <p:sp>
+        <p:nvSpPr>
+          <p:cNvPr id="7" name="TextBox 6"/>
+          <p:cNvSpPr txBox="1"/>
+          <p:nvPr/>
+        </p:nvSpPr>
+        <p:spPr>
+          <a:xfrm>
+            <a:off x="365760" y="658368"/>
+            <a:ext cx="5303520" cy="457200"/>
+          </a:xfrm>
+          <a:prstGeom prst="rect">
+            <a:avLst/>
+          </a:prstGeom>
+          <a:noFill/>
+        </p:spPr>
+        <p:txBody>
+          <a:bodyPr wrap="none">
+            <a:spAutoFit/>
+          </a:bodyPr>
+          <a:lstStyle/>
+          <a:p>
+            <a:pPr>
+              <a:defRPr sz="1800" b="1">
+                <a:solidFill>
+                  <a:srgbClr val="1E823C"/>
+                </a:solidFill>
+                <a:latin typeface="Arial"/>
+              </a:defRPr>
+            </a:pPr>
+            <a:r>
+              <a:t>Esquema Normalizado e Garantias Formais</a:t>
+            </a:r>
+          </a:p>
+        </p:txBody>
+      </p:sp>
+      <p:sp>
+        <p:nvSpPr>
+          <p:cNvPr id="8" name="Rectangle 7"/>
+          <p:cNvSpPr/>
+          <p:nvPr/>
+        </p:nvSpPr>
+        <p:spPr>
+          <a:xfrm>
+            <a:off x="0" y="6400800"/>
+            <a:ext cx="12191999" cy="13716"/>
+          </a:xfrm>
+          <a:prstGeom prst="rect">
+            <a:avLst/>
+          </a:prstGeom>
+          <a:solidFill>
+            <a:srgbClr val="1E823C"/>
+          </a:solidFill>
+          <a:ln>
+            <a:noFill/>
+          </a:ln>
+        </p:spPr>
+        <p:style>
+          <a:lnRef idx="1">
+            <a:schemeClr val="accent1"/>
+          </a:lnRef>
+          <a:fillRef idx="3">
+            <a:schemeClr val="accent1"/>
+          </a:fillRef>
+          <a:effectRef idx="2">
+            <a:schemeClr val="accent1"/>
+          </a:effectRef>
+          <a:fontRef idx="minor">
+            <a:schemeClr val="lt1"/>
+          </a:fontRef>
+        </p:style>
+        <p:txBody>
+          <a:bodyPr rtlCol="0" anchor="ctr"/>
+          <a:lstStyle/>
+          <a:p>
+            <a:pPr algn="ctr"/>
+          </a:p>
+        </p:txBody>
+      </p:sp>
+      <p:sp>
+        <p:nvSpPr>
+          <p:cNvPr id="9" name="TextBox 8"/>
+          <p:cNvSpPr txBox="1"/>
+          <p:nvPr/>
+        </p:nvSpPr>
+        <p:spPr>
+          <a:xfrm>
+            <a:off x="365760" y="6446520"/>
+            <a:ext cx="4114800" cy="320040"/>
+          </a:xfrm>
+          <a:prstGeom prst="rect">
+            <a:avLst/>
+          </a:prstGeom>
+          <a:noFill/>
+        </p:spPr>
+        <p:txBody>
+          <a:bodyPr wrap="none">
+            <a:spAutoFit/>
+          </a:bodyPr>
+          <a:lstStyle/>
+          <a:p>
+            <a:r>
+              <a:rPr sz="1000" b="1">
+                <a:solidFill>
+                  <a:srgbClr val="000000"/>
+                </a:solidFill>
+                <a:latin typeface="Arial"/>
+              </a:rPr>
+              <a:t>de Andrade, P. H. R.; Luiz, B.; Salles, I.</a:t>
+            </a:r>
+          </a:p>
+        </p:txBody>
+      </p:sp>
+      <p:sp>
+        <p:nvSpPr>
+          <p:cNvPr id="10" name="TextBox 9"/>
+          <p:cNvSpPr txBox="1"/>
+          <p:nvPr/>
+        </p:nvSpPr>
+        <p:spPr>
+          <a:xfrm>
+            <a:off x="4114800" y="6446520"/>
+            <a:ext cx="4572000" cy="320040"/>
+          </a:xfrm>
+          <a:prstGeom prst="rect">
+            <a:avLst/>
+          </a:prstGeom>
+          <a:noFill/>
+        </p:spPr>
+        <p:txBody>
+          <a:bodyPr wrap="none">
+            <a:spAutoFit/>
+          </a:bodyPr>
+          <a:lstStyle/>
+          <a:p>
+            <a:pPr algn="ctr"/>
+            <a:r>
+              <a:rPr sz="1000" b="1">
+                <a:solidFill>
+                  <a:srgbClr val="141414"/>
+                </a:solidFill>
+                <a:latin typeface="Arial"/>
+                <a:hlinkClick r:id="rId4"/>
+              </a:rPr>
+              <a:t>Normalização &amp; Dependências Funcionais</a:t>
+            </a:r>
+          </a:p>
+        </p:txBody>
+      </p:sp>
+      <p:sp>
+        <p:nvSpPr>
+          <p:cNvPr id="11" name="TextBox 10"/>
+          <p:cNvSpPr txBox="1"/>
+          <p:nvPr/>
+        </p:nvSpPr>
+        <p:spPr>
+          <a:xfrm>
+            <a:off x="9326880" y="6446520"/>
+            <a:ext cx="2468880" cy="320040"/>
+          </a:xfrm>
+          <a:prstGeom prst="rect">
+            <a:avLst/>
+          </a:prstGeom>
+          <a:noFill/>
+        </p:spPr>
+        <p:txBody>
+          <a:bodyPr wrap="none">
+            <a:spAutoFit/>
+          </a:bodyPr>
+          <a:lstStyle/>
+          <a:p>
+            <a:pPr algn="r"/>
+            <a:r>
+              <a:rPr sz="1000" b="1">
+                <a:solidFill>
+                  <a:srgbClr val="141414"/>
+                </a:solidFill>
+                <a:latin typeface="Arial"/>
+              </a:rPr>
+              <a:t>8 / 11</a:t>
+            </a:r>
+          </a:p>
+        </p:txBody>
+      </p:sp>
+      <p:sp>
+        <p:nvSpPr>
+          <p:cNvPr id="12" name="TextBox 11"/>
+          <p:cNvSpPr txBox="1"/>
+          <p:nvPr/>
+        </p:nvSpPr>
+        <p:spPr>
+          <a:xfrm>
+            <a:off x="457200" y="1188720"/>
+            <a:ext cx="5120640" cy="5029200"/>
+          </a:xfrm>
+          <a:prstGeom prst="rect">
+            <a:avLst/>
+          </a:prstGeom>
+          <a:noFill/>
+        </p:spPr>
+        <p:txBody>
+          <a:bodyPr wrap="square" lIns="0" rIns="0" tIns="0" bIns="0">
+            <a:spAutoFit/>
+          </a:bodyPr>
+          <a:lstStyle/>
+          <a:p>
+            <a:pPr>
+              <a:spcAft>
+                <a:spcPts val="1600"/>
+              </a:spcAft>
+            </a:pPr>
+            <a:r>
+              <a:rPr sz="1400" b="1">
+                <a:solidFill>
+                  <a:srgbClr val="1E823C"/>
+                </a:solidFill>
+                <a:latin typeface="Arial"/>
+              </a:rPr>
+              <a:t>•  </a:t>
+            </a:r>
+            <a:r>
+              <a:rPr sz="1400" b="1">
+                <a:solidFill>
+                  <a:srgbClr val="1E823C"/>
+                </a:solidFill>
+                <a:latin typeface="Arial"/>
+              </a:rPr>
+              <a:t>Lossless Join: </a:t>
+            </a:r>
+            <a:r>
+              <a:rPr sz="1400" b="0">
+                <a:solidFill>
+                  <a:srgbClr val="141414"/>
+                </a:solidFill>
+                <a:latin typeface="Arial"/>
+              </a:rPr>
+              <a:t>Junção natural recompõe dados sem perdas.</a:t>
+            </a:r>
+          </a:p>
+          <a:p>
+            <a:pPr>
+              <a:spcAft>
+                <a:spcPts val="1600"/>
+              </a:spcAft>
+            </a:pPr>
+            <a:r>
+              <a:rPr sz="1400" b="1">
+                <a:solidFill>
+                  <a:srgbClr val="1E823C"/>
+                </a:solidFill>
+                <a:latin typeface="Arial"/>
+              </a:rPr>
+              <a:t>•  </a:t>
+            </a:r>
+            <a:r>
+              <a:rPr sz="1400" b="1">
+                <a:solidFill>
+                  <a:srgbClr val="1E823C"/>
+                </a:solidFill>
+                <a:latin typeface="Arial"/>
+              </a:rPr>
+              <a:t>Preservação de DFs: </a:t>
+            </a:r>
+            <a:r>
+              <a:rPr sz="1400" b="0">
+                <a:solidFill>
+                  <a:srgbClr val="141414"/>
+                </a:solidFill>
+                <a:latin typeface="Arial"/>
+              </a:rPr>
+              <a:t>Regras garantidas localmente por constraints.</a:t>
+            </a:r>
+          </a:p>
+          <a:p>
+            <a:pPr>
+              <a:spcAft>
+                <a:spcPts val="1600"/>
+              </a:spcAft>
+            </a:pPr>
+            <a:r>
+              <a:rPr sz="1400" b="1">
+                <a:solidFill>
+                  <a:srgbClr val="1E823C"/>
+                </a:solidFill>
+                <a:latin typeface="Arial"/>
+              </a:rPr>
+              <a:t>•  </a:t>
+            </a:r>
+            <a:r>
+              <a:rPr sz="1400" b="1">
+                <a:solidFill>
+                  <a:srgbClr val="1E823C"/>
+                </a:solidFill>
+                <a:latin typeface="Arial"/>
+              </a:rPr>
+              <a:t>Redundância Nula: </a:t>
+            </a:r>
+            <a:r>
+              <a:rPr sz="1400" b="0">
+                <a:solidFill>
+                  <a:srgbClr val="141414"/>
+                </a:solidFill>
+                <a:latin typeface="Arial"/>
+              </a:rPr>
+              <a:t>Cada fato registrado em uma única tabela.</a:t>
+            </a:r>
+          </a:p>
+          <a:p>
+            <a:pPr>
+              <a:spcAft>
+                <a:spcPts val="1600"/>
+              </a:spcAft>
+            </a:pPr>
+            <a:r>
+              <a:rPr sz="1400" b="1">
+                <a:solidFill>
+                  <a:srgbClr val="1E823C"/>
+                </a:solidFill>
+                <a:latin typeface="Arial"/>
+              </a:rPr>
+              <a:t>•  </a:t>
+            </a:r>
+            <a:r>
+              <a:rPr sz="1400" b="1">
+                <a:solidFill>
+                  <a:srgbClr val="1E823C"/>
+                </a:solidFill>
+                <a:latin typeface="Arial"/>
+              </a:rPr>
+              <a:t>Integridade: </a:t>
+            </a:r>
+            <a:r>
+              <a:rPr sz="1400" b="0">
+                <a:solidFill>
+                  <a:srgbClr val="141414"/>
+                </a:solidFill>
+                <a:latin typeface="Arial"/>
+              </a:rPr>
+              <a:t>Consistência assegurada por PKs e FKs.</a:t>
+            </a:r>
+          </a:p>
+        </p:txBody>
+      </p:sp>
+      <p:sp>
+        <p:nvSpPr>
+          <p:cNvPr id="13" name="Rounded Rectangle 12"/>
+          <p:cNvSpPr/>
+          <p:nvPr/>
+        </p:nvSpPr>
+        <p:spPr>
+          <a:xfrm>
+            <a:off x="5943600" y="722376"/>
+            <a:ext cx="5806440" cy="5532120"/>
+          </a:xfrm>
+          <a:prstGeom prst="roundRect">
+            <a:avLst>
+              <a:gd name="adj" fmla="val 3000"/>
+            </a:avLst>
+          </a:prstGeom>
+          <a:solidFill>
+            <a:srgbClr val="F5F5F5"/>
+          </a:solidFill>
+          <a:ln w="12700">
+            <a:solidFill>
+              <a:srgbClr val="1E823C"/>
+            </a:solidFill>
+          </a:ln>
+        </p:spPr>
+        <p:style>
+          <a:lnRef idx="1">
+            <a:schemeClr val="accent1"/>
+          </a:lnRef>
+          <a:fillRef idx="3">
+            <a:schemeClr val="accent1"/>
+          </a:fillRef>
+          <a:effectRef idx="2">
+            <a:schemeClr val="accent1"/>
+          </a:effectRef>
+          <a:fontRef idx="minor">
+            <a:schemeClr val="lt1"/>
+          </a:fontRef>
+        </p:style>
+        <p:txBody>
+          <a:bodyPr rtlCol="0" anchor="ctr"/>
+          <a:lstStyle/>
+          <a:p>
+            <a:pPr algn="ctr"/>
+          </a:p>
+        </p:txBody>
+      </p:sp>
+      <p:sp>
+        <p:nvSpPr>
+          <p:cNvPr id="14" name="TextBox 13"/>
+          <p:cNvSpPr txBox="1"/>
+          <p:nvPr/>
+        </p:nvSpPr>
+        <p:spPr>
+          <a:xfrm>
+            <a:off x="5989320" y="777240"/>
+            <a:ext cx="5715000" cy="274320"/>
+          </a:xfrm>
+          <a:prstGeom prst="rect">
+            <a:avLst/>
+          </a:prstGeom>
+          <a:noFill/>
+        </p:spPr>
+        <p:txBody>
+          <a:bodyPr wrap="none">
+            <a:spAutoFit/>
+          </a:bodyPr>
+          <a:lstStyle/>
+          <a:p>
+            <a:pPr algn="ctr"/>
+            <a:r>
+              <a:rPr sz="1100" b="1">
+                <a:solidFill>
+                  <a:srgbClr val="1E823C"/>
+                </a:solidFill>
+                <a:latin typeface="Arial"/>
+              </a:rPr>
+              <a:t>Figura 4 - Relações Especializadas 3FN</a:t>
+            </a:r>
+          </a:p>
+        </p:txBody>
+      </p:sp>
+      <p:pic>
+        <p:nvPicPr>
+          <p:cNvPr id="15" name="Picture 14" descr="figura4_esquema_3fn_final.png"/>
+          <p:cNvPicPr>
+            <a:picLocks noChangeAspect="1"/>
+          </p:cNvPicPr>
+          <p:nvPr/>
+        </p:nvPicPr>
+        <p:blipFill>
+          <a:blip r:embed="rId5"/>
+          <a:stretch>
+            <a:fillRect/>
+          </a:stretch>
+        </p:blipFill>
+        <p:spPr>
+          <a:xfrm>
+            <a:off x="6035040" y="1097280"/>
+            <a:ext cx="5623560" cy="4754880"/>
+          </a:xfrm>
+          <a:prstGeom prst="rect">
+            <a:avLst/>
+          </a:prstGeom>
+        </p:spPr>
+      </p:pic>
+      <p:sp>
+        <p:nvSpPr>
+          <p:cNvPr id="16" name="TextBox 15"/>
+          <p:cNvSpPr txBox="1"/>
+          <p:nvPr/>
+        </p:nvSpPr>
+        <p:spPr>
+          <a:xfrm>
+            <a:off x="5989320" y="5897880"/>
+            <a:ext cx="5715000" cy="274320"/>
+          </a:xfrm>
+          <a:prstGeom prst="rect">
+            <a:avLst/>
+          </a:prstGeom>
+          <a:noFill/>
+        </p:spPr>
+        <p:txBody>
+          <a:bodyPr wrap="none">
+            <a:spAutoFit/>
+          </a:bodyPr>
+          <a:lstStyle/>
+          <a:p>
+            <a:pPr algn="ctr"/>
+            <a:r>
+              <a:rPr sz="900">
+                <a:solidFill>
+                  <a:srgbClr val="5A5A5A"/>
+                </a:solidFill>
+                <a:latin typeface="Arial"/>
+              </a:rPr>
+              <a:t>Fonte: Elaboração dos Autores (2026)</a:t>
+            </a:r>
+          </a:p>
+        </p:txBody>
+      </p:sp>
+    </p:spTree>
+  </p:cSld>
+  <p:clrMapOvr>
+    <a:masterClrMapping/>
+  </p:clrMapOvr>
+  <p:transition spd="med">
+    <p:fade/>
+  </p:transition>
+</p:sld>
+</file>
+
+<file path=ppt/slides/slide9.xml><?xml version="1.0" encoding="utf-8"?>
+<p:sld xmlns:a="http://schemas.openxmlformats.org/drawingml/2006/main" xmlns:p="http://schemas.openxmlformats.org/presentationml/2006/main" xmlns:r="http://schemas.openxmlformats.org/officeDocument/2006/relationships">
+  <p:cSld>
+    <p:spTree>
+      <p:nvGrpSpPr>
+        <p:cNvPr id="1" name=""/>
+        <p:cNvGrpSpPr/>
+        <p:nvPr/>
+      </p:nvGrpSpPr>
+      <p:grpSpPr/>
+      <p:sp>
+        <p:nvSpPr>
+          <p:cNvPr id="2" name="Rectangle 1"/>
+          <p:cNvSpPr/>
+          <p:nvPr/>
+        </p:nvSpPr>
+        <p:spPr>
+          <a:xfrm>
             <a:off x="0" y="0"/>
             <a:ext cx="12191999" cy="6858000"/>
           </a:xfrm>
           <a:prstGeom prst="rect">
             <a:avLst/>
           </a:prstGeom>
+          <a:solidFill>
+            <a:srgbClr val="FFFFFF"/>
+          </a:solidFill>
+          <a:ln>
+            <a:noFill/>
+          </a:ln>
+        </p:spPr>
+        <p:style>
+          <a:lnRef idx="1">
+            <a:schemeClr val="accent1"/>
+          </a:lnRef>
+          <a:fillRef idx="3">
+            <a:schemeClr val="accent1"/>
+          </a:fillRef>
+          <a:effectRef idx="2">
+            <a:schemeClr val="accent1"/>
+          </a:effectRef>
+          <a:fontRef idx="minor">
+            <a:schemeClr val="lt1"/>
+          </a:fontRef>
+        </p:style>
+        <p:txBody>
+          <a:bodyPr rtlCol="0" anchor="ctr"/>
+          <a:lstStyle/>
+          <a:p>
+            <a:pPr algn="ctr"/>
+          </a:p>
+        </p:txBody>
+      </p:sp>
+      <p:pic>
+        <p:nvPicPr>
+          <p:cNvPr id="3" name="Picture 2" descr="logo_iff_crop.png"/>
+          <p:cNvPicPr>
+            <a:picLocks noChangeAspect="1"/>
+          </p:cNvPicPr>
+          <p:nvPr/>
+        </p:nvPicPr>
+        <p:blipFill>
+          <a:blip r:embed="rId2"/>
+          <a:stretch>
+            <a:fillRect/>
+          </a:stretch>
+        </p:blipFill>
+        <p:spPr>
+          <a:xfrm>
+            <a:off x="365760" y="73152"/>
+            <a:ext cx="1395412" cy="384048"/>
+          </a:xfrm>
+          <a:prstGeom prst="rect">
+            <a:avLst/>
+          </a:prstGeom>
         </p:spPr>
       </p:pic>
+      <p:sp>
+        <p:nvSpPr>
+          <p:cNvPr id="4" name="TextBox 3"/>
+          <p:cNvSpPr txBox="1"/>
+          <p:nvPr/>
+        </p:nvSpPr>
+        <p:spPr>
+          <a:xfrm>
+            <a:off x="2331720" y="27432"/>
+            <a:ext cx="4389120" cy="475488"/>
+          </a:xfrm>
+          <a:prstGeom prst="rect">
+            <a:avLst/>
+          </a:prstGeom>
+          <a:noFill/>
+        </p:spPr>
+        <p:txBody>
+          <a:bodyPr wrap="none">
+            <a:spAutoFit/>
+          </a:bodyPr>
+          <a:lstStyle/>
+          <a:p>
+            <a:r>
+              <a:rPr sz="2000" b="0">
+                <a:solidFill>
+                  <a:srgbClr val="5A5A5A"/>
+                </a:solidFill>
+                <a:latin typeface="Arial"/>
+              </a:rPr>
+              <a:t> |   </a:t>
+            </a:r>
+            <a:r>
+              <a:rPr sz="2000" b="1">
+                <a:solidFill>
+                  <a:srgbClr val="141414"/>
+                </a:solidFill>
+                <a:latin typeface="Arial"/>
+              </a:rPr>
+              <a:t>Referências</a:t>
+            </a:r>
+          </a:p>
+        </p:txBody>
+      </p:sp>
+      <p:sp>
+        <p:nvSpPr>
+          <p:cNvPr id="5" name="TextBox 4"/>
+          <p:cNvSpPr txBox="1"/>
+          <p:nvPr/>
+        </p:nvSpPr>
+        <p:spPr>
+          <a:xfrm>
+            <a:off x="5852160" y="73152"/>
+            <a:ext cx="5943600" cy="365760"/>
+          </a:xfrm>
+          <a:prstGeom prst="rect">
+            <a:avLst/>
+          </a:prstGeom>
+          <a:noFill/>
+        </p:spPr>
+        <p:txBody>
+          <a:bodyPr wrap="none">
+            <a:spAutoFit/>
+          </a:bodyPr>
+          <a:lstStyle/>
+          <a:p>
+            <a:pPr algn="r"/>
+            <a:r>
+              <a:rPr sz="1300" b="1">
+                <a:solidFill>
+                  <a:srgbClr val="141414"/>
+                </a:solidFill>
+                <a:latin typeface="Arial"/>
+                <a:hlinkClick r:id="rId3"/>
+              </a:rPr>
+              <a:t>Banco de Dados</a:t>
+            </a:r>
+            <a:r>
+              <a:rPr sz="1300">
+                <a:solidFill>
+                  <a:srgbClr val="5A5A5A"/>
+                </a:solidFill>
+                <a:latin typeface="Arial"/>
+              </a:rPr>
+              <a:t>   |   </a:t>
+            </a:r>
+            <a:r>
+              <a:rPr sz="1300" b="1">
+                <a:solidFill>
+                  <a:srgbClr val="1E823C"/>
+                </a:solidFill>
+                <a:latin typeface="Arial"/>
+                <a:hlinkClick r:id="rId4"/>
+              </a:rPr>
+              <a:t>Normalização &amp; DFs</a:t>
+            </a:r>
+          </a:p>
+        </p:txBody>
+      </p:sp>
+      <p:sp>
+        <p:nvSpPr>
+          <p:cNvPr id="6" name="Rectangle 5"/>
+          <p:cNvSpPr/>
+          <p:nvPr/>
+        </p:nvSpPr>
+        <p:spPr>
+          <a:xfrm>
+            <a:off x="0" y="566928"/>
+            <a:ext cx="12191999" cy="13716"/>
+          </a:xfrm>
+          <a:prstGeom prst="rect">
+            <a:avLst/>
+          </a:prstGeom>
+          <a:solidFill>
+            <a:srgbClr val="1E823C"/>
+          </a:solidFill>
+          <a:ln>
+            <a:noFill/>
+          </a:ln>
+        </p:spPr>
+        <p:style>
+          <a:lnRef idx="1">
+            <a:schemeClr val="accent1"/>
+          </a:lnRef>
+          <a:fillRef idx="3">
+            <a:schemeClr val="accent1"/>
+          </a:fillRef>
+          <a:effectRef idx="2">
+            <a:schemeClr val="accent1"/>
+          </a:effectRef>
+          <a:fontRef idx="minor">
+            <a:schemeClr val="lt1"/>
+          </a:fontRef>
+        </p:style>
+        <p:txBody>
+          <a:bodyPr rtlCol="0" anchor="ctr"/>
+          <a:lstStyle/>
+          <a:p>
+            <a:pPr algn="ctr"/>
+          </a:p>
+        </p:txBody>
+      </p:sp>
+      <p:sp>
+        <p:nvSpPr>
+          <p:cNvPr id="7" name="TextBox 6"/>
+          <p:cNvSpPr txBox="1"/>
+          <p:nvPr/>
+        </p:nvSpPr>
+        <p:spPr>
+          <a:xfrm>
+            <a:off x="365760" y="658368"/>
+            <a:ext cx="5303520" cy="457200"/>
+          </a:xfrm>
+          <a:prstGeom prst="rect">
+            <a:avLst/>
+          </a:prstGeom>
+          <a:noFill/>
+        </p:spPr>
+        <p:txBody>
+          <a:bodyPr wrap="none">
+            <a:spAutoFit/>
+          </a:bodyPr>
+          <a:lstStyle/>
+          <a:p>
+            <a:pPr>
+              <a:defRPr sz="1800" b="1">
+                <a:solidFill>
+                  <a:srgbClr val="1E823C"/>
+                </a:solidFill>
+                <a:latin typeface="Arial"/>
+              </a:defRPr>
+            </a:pPr>
+            <a:r>
+              <a:t>Referências Bibliográficas</a:t>
+            </a:r>
+          </a:p>
+        </p:txBody>
+      </p:sp>
+      <p:sp>
+        <p:nvSpPr>
+          <p:cNvPr id="8" name="Rectangle 7"/>
+          <p:cNvSpPr/>
+          <p:nvPr/>
+        </p:nvSpPr>
+        <p:spPr>
+          <a:xfrm>
+            <a:off x="0" y="6400800"/>
+            <a:ext cx="12191999" cy="13716"/>
+          </a:xfrm>
+          <a:prstGeom prst="rect">
+            <a:avLst/>
+          </a:prstGeom>
+          <a:solidFill>
+            <a:srgbClr val="1E823C"/>
+          </a:solidFill>
+          <a:ln>
+            <a:noFill/>
+          </a:ln>
+        </p:spPr>
+        <p:style>
+          <a:lnRef idx="1">
+            <a:schemeClr val="accent1"/>
+          </a:lnRef>
+          <a:fillRef idx="3">
+            <a:schemeClr val="accent1"/>
+          </a:fillRef>
+          <a:effectRef idx="2">
+            <a:schemeClr val="accent1"/>
+          </a:effectRef>
+          <a:fontRef idx="minor">
+            <a:schemeClr val="lt1"/>
+          </a:fontRef>
+        </p:style>
+        <p:txBody>
+          <a:bodyPr rtlCol="0" anchor="ctr"/>
+          <a:lstStyle/>
+          <a:p>
+            <a:pPr algn="ctr"/>
+          </a:p>
+        </p:txBody>
+      </p:sp>
+      <p:sp>
+        <p:nvSpPr>
+          <p:cNvPr id="9" name="TextBox 8"/>
+          <p:cNvSpPr txBox="1"/>
+          <p:nvPr/>
+        </p:nvSpPr>
+        <p:spPr>
+          <a:xfrm>
+            <a:off x="365760" y="6446520"/>
+            <a:ext cx="4114800" cy="320040"/>
+          </a:xfrm>
+          <a:prstGeom prst="rect">
+            <a:avLst/>
+          </a:prstGeom>
+          <a:noFill/>
+        </p:spPr>
+        <p:txBody>
+          <a:bodyPr wrap="none">
+            <a:spAutoFit/>
+          </a:bodyPr>
+          <a:lstStyle/>
+          <a:p>
+            <a:r>
+              <a:rPr sz="1000" b="1">
+                <a:solidFill>
+                  <a:srgbClr val="000000"/>
+                </a:solidFill>
+                <a:latin typeface="Arial"/>
+              </a:rPr>
+              <a:t>de Andrade, P. H. R.; Luiz, B.; Salles, I.</a:t>
+            </a:r>
+          </a:p>
+        </p:txBody>
+      </p:sp>
+      <p:sp>
+        <p:nvSpPr>
+          <p:cNvPr id="10" name="TextBox 9"/>
+          <p:cNvSpPr txBox="1"/>
+          <p:nvPr/>
+        </p:nvSpPr>
+        <p:spPr>
+          <a:xfrm>
+            <a:off x="4114800" y="6446520"/>
+            <a:ext cx="4572000" cy="320040"/>
+          </a:xfrm>
+          <a:prstGeom prst="rect">
+            <a:avLst/>
+          </a:prstGeom>
+          <a:noFill/>
+        </p:spPr>
+        <p:txBody>
+          <a:bodyPr wrap="none">
+            <a:spAutoFit/>
+          </a:bodyPr>
+          <a:lstStyle/>
+          <a:p>
+            <a:pPr algn="ctr"/>
+            <a:r>
+              <a:rPr sz="1000" b="1">
+                <a:solidFill>
+                  <a:srgbClr val="141414"/>
+                </a:solidFill>
+                <a:latin typeface="Arial"/>
+                <a:hlinkClick r:id="rId4"/>
+              </a:rPr>
+              <a:t>Normalização &amp; Dependências Funcionais</a:t>
+            </a:r>
+          </a:p>
+        </p:txBody>
+      </p:sp>
+      <p:sp>
+        <p:nvSpPr>
+          <p:cNvPr id="11" name="TextBox 10"/>
+          <p:cNvSpPr txBox="1"/>
+          <p:nvPr/>
+        </p:nvSpPr>
+        <p:spPr>
+          <a:xfrm>
+            <a:off x="9326880" y="6446520"/>
+            <a:ext cx="2468880" cy="320040"/>
+          </a:xfrm>
+          <a:prstGeom prst="rect">
+            <a:avLst/>
+          </a:prstGeom>
+          <a:noFill/>
+        </p:spPr>
+        <p:txBody>
+          <a:bodyPr wrap="none">
+            <a:spAutoFit/>
+          </a:bodyPr>
+          <a:lstStyle/>
+          <a:p>
+            <a:pPr algn="r"/>
+            <a:r>
+              <a:rPr sz="1000" b="1">
+                <a:solidFill>
+                  <a:srgbClr val="141414"/>
+                </a:solidFill>
+                <a:latin typeface="Arial"/>
+              </a:rPr>
+              <a:t>9 / 11</a:t>
+            </a:r>
+          </a:p>
+        </p:txBody>
+      </p:sp>
+      <p:sp>
+        <p:nvSpPr>
+          <p:cNvPr id="12" name="TextBox 11"/>
+          <p:cNvSpPr txBox="1"/>
+          <p:nvPr/>
+        </p:nvSpPr>
+        <p:spPr>
+          <a:xfrm>
+            <a:off x="731520" y="1188720"/>
+            <a:ext cx="10725912" cy="5029200"/>
+          </a:xfrm>
+          <a:prstGeom prst="rect">
+            <a:avLst/>
+          </a:prstGeom>
+          <a:noFill/>
+        </p:spPr>
+        <p:txBody>
+          <a:bodyPr wrap="square" lIns="0" rIns="0" tIns="0" bIns="0">
+            <a:spAutoFit/>
+          </a:bodyPr>
+          <a:lstStyle/>
+          <a:p>
+            <a:pPr>
+              <a:spcAft>
+                <a:spcPts val="1400"/>
+              </a:spcAft>
+            </a:pPr>
+            <a:r>
+              <a:rPr sz="1350" b="1">
+                <a:solidFill>
+                  <a:srgbClr val="1E823C"/>
+                </a:solidFill>
+                <a:latin typeface="Arial"/>
+              </a:rPr>
+              <a:t>[1]  </a:t>
+            </a:r>
+            <a:r>
+              <a:rPr sz="1350">
+                <a:solidFill>
+                  <a:srgbClr val="141414"/>
+                </a:solidFill>
+                <a:latin typeface="Arial"/>
+              </a:rPr>
+              <a:t>ELMASRI, R.; NAVATHE, S. B. Sistemas de Banco de Dados. 7. ed. São Paulo: Pearson, 2018.</a:t>
+            </a:r>
+          </a:p>
+          <a:p>
+            <a:pPr>
+              <a:spcAft>
+                <a:spcPts val="1400"/>
+              </a:spcAft>
+            </a:pPr>
+            <a:r>
+              <a:rPr sz="1350" b="1">
+                <a:solidFill>
+                  <a:srgbClr val="1E823C"/>
+                </a:solidFill>
+                <a:latin typeface="Arial"/>
+              </a:rPr>
+              <a:t>[2]  </a:t>
+            </a:r>
+            <a:r>
+              <a:rPr sz="1350">
+                <a:solidFill>
+                  <a:srgbClr val="141414"/>
+                </a:solidFill>
+                <a:latin typeface="Arial"/>
+              </a:rPr>
+              <a:t>SILBERSCHATZ, A.; KORTH, H. F.; SUDARSHAN, S. Sistema de Banco de Dados. 6. ed. Elsevier, 2012.</a:t>
+            </a:r>
+          </a:p>
+          <a:p>
+            <a:pPr>
+              <a:spcAft>
+                <a:spcPts val="1400"/>
+              </a:spcAft>
+            </a:pPr>
+            <a:r>
+              <a:rPr sz="1350" b="1">
+                <a:solidFill>
+                  <a:srgbClr val="1E823C"/>
+                </a:solidFill>
+                <a:latin typeface="Arial"/>
+              </a:rPr>
+              <a:t>[3]  </a:t>
+            </a:r>
+            <a:r>
+              <a:rPr sz="1350">
+                <a:solidFill>
+                  <a:srgbClr val="141414"/>
+                </a:solidFill>
+                <a:latin typeface="Arial"/>
+              </a:rPr>
+              <a:t>CODD, Edgar F. A Relational Model of Data for Large Shared Data Banks. ACM, 1970.</a:t>
+            </a:r>
+          </a:p>
+          <a:p>
+            <a:pPr>
+              <a:spcAft>
+                <a:spcPts val="1400"/>
+              </a:spcAft>
+            </a:pPr>
+            <a:r>
+              <a:rPr sz="1350" b="1">
+                <a:solidFill>
+                  <a:srgbClr val="1E823C"/>
+                </a:solidFill>
+                <a:latin typeface="Arial"/>
+              </a:rPr>
+              <a:t>[4]  </a:t>
+            </a:r>
+            <a:r>
+              <a:rPr sz="1350">
+                <a:solidFill>
+                  <a:srgbClr val="141414"/>
+                </a:solidFill>
+                <a:latin typeface="Arial"/>
+              </a:rPr>
+              <a:t>DATE, C. J. Introdução a Sistemas de Bancos de Dados. 8. ed. Elsevier, 2004.</a:t>
+            </a:r>
+          </a:p>
+          <a:p>
+            <a:pPr>
+              <a:spcAft>
+                <a:spcPts val="1400"/>
+              </a:spcAft>
+            </a:pPr>
+            <a:r>
+              <a:rPr sz="1350" b="1">
+                <a:solidFill>
+                  <a:srgbClr val="1E823C"/>
+                </a:solidFill>
+                <a:latin typeface="Arial"/>
+              </a:rPr>
+              <a:t>[5]  </a:t>
+            </a:r>
+            <a:r>
+              <a:rPr sz="1350">
+                <a:solidFill>
+                  <a:srgbClr val="141414"/>
+                </a:solidFill>
+                <a:latin typeface="Arial"/>
+              </a:rPr>
+              <a:t>IBM. Database Normalization: Guia Prático. IBM Think Topics, 2024.</a:t>
+            </a:r>
+          </a:p>
+        </p:txBody>
+      </p:sp>
     </p:spTree>
   </p:cSld>
   <p:clrMapOvr>

--- a/content/assets/disciplinas/6-periodo/banco-de-dados/slides_iff_disciplina.pptx
+++ b/content/assets/disciplinas/6-periodo/banco-de-dados/slides_iff_disciplina.pptx
@@ -3512,7 +3512,7 @@
         <p:spPr>
           <a:xfrm>
             <a:off x="3535679" y="1188720"/>
-            <a:ext cx="5120640" cy="5115425"/>
+            <a:ext cx="5120640" cy="5120640"/>
           </a:xfrm>
           <a:prstGeom prst="rect">
             <a:avLst/>
@@ -3550,7 +3550,7 @@
                 <a:latin typeface="Arial"/>
                 <a:hlinkClick r:id="rId3"/>
               </a:rPr>
-              <a:t>https://www.phrandrade.com/pt-br/resource/engenharia-de-computacao/6-periodo/banco-de-dados/anotacoes/atividades/trabalho---normalizacao-e-dependencias-funcionais/</a:t>
+              <a:t>https://www.phrandrade.com/pt-br/resource/engenharia-de-computação/6-periodo/banco-de-dados/anotações/atividades/trabalho---normalização-e-dependências-funcionais/</a:t>
             </a:r>
           </a:p>
         </p:txBody>
